--- a/artifacts/GS_AIDL_Ansible_Delivery_CI.pptx
+++ b/artifacts/GS_AIDL_Ansible_Delivery_CI.pptx
@@ -2,18 +2,19 @@
 <file path=ppt/presentation.xml><?xml version="1.0" encoding="utf-8"?>
 <p:presentation xmlns:p="http://schemas.openxmlformats.org/presentationml/2006/main">
   <p:sldMasterIdLst>
-    <p:sldMasterId xmlns:r="http://schemas.openxmlformats.org/officeDocument/2006/relationships" id="2147483648" r:id="R1b1424df3b904532"/>
+    <p:sldMasterId xmlns:r="http://schemas.openxmlformats.org/officeDocument/2006/relationships" id="2147483648" r:id="Rec7a7481e68b4e2c"/>
   </p:sldMasterIdLst>
   <p:notesMasterIdLst>
-    <p:notesMasterId xmlns:r="http://schemas.openxmlformats.org/officeDocument/2006/relationships" r:id="Rbd51f8f3a8e04813"/>
+    <p:notesMasterId xmlns:r="http://schemas.openxmlformats.org/officeDocument/2006/relationships" r:id="Rab3381a7d152479d"/>
   </p:notesMasterIdLst>
   <p:sldIdLst>
-    <p:sldId xmlns:r="http://schemas.openxmlformats.org/officeDocument/2006/relationships" id="256" r:id="Rb71c62bdf7634453"/>
-    <p:sldId xmlns:r="http://schemas.openxmlformats.org/officeDocument/2006/relationships" id="257" r:id="R4f10f42ca0be49ab"/>
-    <p:sldId xmlns:r="http://schemas.openxmlformats.org/officeDocument/2006/relationships" id="258" r:id="R4627bd67155e4d5f"/>
-    <p:sldId xmlns:r="http://schemas.openxmlformats.org/officeDocument/2006/relationships" id="259" r:id="R393910d668324f51"/>
-    <p:sldId xmlns:r="http://schemas.openxmlformats.org/officeDocument/2006/relationships" id="260" r:id="R70c54eb49a6a4f29"/>
-    <p:sldId xmlns:r="http://schemas.openxmlformats.org/officeDocument/2006/relationships" id="261" r:id="R7de9748e031f4e14"/>
+    <p:sldId xmlns:r="http://schemas.openxmlformats.org/officeDocument/2006/relationships" id="256" r:id="R10ffb67161514fdb"/>
+    <p:sldId xmlns:r="http://schemas.openxmlformats.org/officeDocument/2006/relationships" id="257" r:id="Re6e3b4609dc74713"/>
+    <p:sldId xmlns:r="http://schemas.openxmlformats.org/officeDocument/2006/relationships" id="258" r:id="Raf2ba14d3cc848a3"/>
+    <p:sldId xmlns:r="http://schemas.openxmlformats.org/officeDocument/2006/relationships" id="259" r:id="R632348af2f414fa7"/>
+    <p:sldId xmlns:r="http://schemas.openxmlformats.org/officeDocument/2006/relationships" id="260" r:id="Rc86ff843a9b4425c"/>
+    <p:sldId xmlns:r="http://schemas.openxmlformats.org/officeDocument/2006/relationships" id="261" r:id="Rb855c63b22654df9"/>
+    <p:sldId xmlns:r="http://schemas.openxmlformats.org/officeDocument/2006/relationships" id="262" r:id="R3807fd5213ab45da"/>
   </p:sldIdLst>
   <p:sldSz cx="12192000" cy="6858000"/>
   <p:notesSz cx="6858000" cy="9144000"/>
@@ -852,12 +853,12 @@
           <a:lstStyle xmlns:a="http://schemas.openxmlformats.org/drawingml/2006/main"/>
           <a:p xmlns:a="http://schemas.openxmlformats.org/drawingml/2006/main">
             <a:r>
-              <a:t>This slide is the CI/CD operating answer: let AIDL shape the inputs and Ansible enforce the delivery contract.</a:t>
-            </a:r>
-          </a:p>
-          <a:p xmlns:a="http://schemas.openxmlformats.org/drawingml/2006/main">
-            <a:r>
-              <a:t>Emphasize that dev/staging config files make promotion explicit without changing the playbook logic.</a:t>
+              <a:t>Use the screenshot to make the delivery model tangible.</a:t>
+            </a:r>
+          </a:p>
+          <a:p xmlns:a="http://schemas.openxmlformats.org/drawingml/2006/main">
+            <a:r>
+              <a:t>The UI does not replace Ansible; it wraps the same playbook in a safer operator experience.</a:t>
             </a:r>
           </a:p>
           <a:p xmlns:a="http://schemas.openxmlformats.org/drawingml/2006/main">
@@ -872,17 +873,17 @@
           </a:p>
           <a:p xmlns:a="http://schemas.openxmlformats.org/drawingml/2006/main">
             <a:r>
-              <a:t>- README.md, 'Core components', lines 30-42.</a:t>
-            </a:r>
-          </a:p>
-          <a:p xmlns:a="http://schemas.openxmlformats.org/drawingml/2006/main">
-            <a:r>
-              <a:t>- README.md, validation and CI/CD flow, lines 15-23 and 38-41.</a:t>
-            </a:r>
-          </a:p>
-          <a:p xmlns:a="http://schemas.openxmlformats.org/drawingml/2006/main">
-            <a:r>
-              <a:t>- config/environments/dev.json and config/environments/staging.json.</a:t>
+              <a:t>- Screenshot captured locally from deployment_console/server.py at http://127.0.0.1:8766/.</a:t>
+            </a:r>
+          </a:p>
+          <a:p xmlns:a="http://schemas.openxmlformats.org/drawingml/2006/main">
+            <a:r>
+              <a:t>- deployment_console/static/index.html and deployment_console/static/app.js.</a:t>
+            </a:r>
+          </a:p>
+          <a:p xmlns:a="http://schemas.openxmlformats.org/drawingml/2006/main">
+            <a:r>
+              <a:t>- deployment_console/server.py API routes for bastions, environments, deployments, logs, and events.</a:t>
             </a:r>
           </a:p>
         </p:txBody>
@@ -913,6 +914,106 @@
 </file>
 
 <file path=ppt/notesSlides/notesSlide6.xml><?xml version="1.0" encoding="utf-8"?>
+<p:notes xmlns:p="http://schemas.openxmlformats.org/presentationml/2006/main">
+  <p:cSld>
+    <p:spTree>
+      <p:nvGrpSpPr>
+        <p:cNvPr id="1" name=""/>
+        <p:cNvGrpSpPr/>
+        <p:nvPr/>
+      </p:nvGrpSpPr>
+      <p:grpSpPr>
+        <a:xfrm xmlns:a="http://schemas.openxmlformats.org/drawingml/2006/main"/>
+      </p:grpSpPr>
+      <p:sp>
+        <p:nvSpPr>
+          <p:cNvPr id="2" name="Slide Image Placeholder 1"/>
+          <p:cNvSpPr>
+            <a:spLocks xmlns:a="http://schemas.openxmlformats.org/drawingml/2006/main" noGrp="1"/>
+          </p:cNvSpPr>
+          <p:nvPr>
+            <p:ph type="sldImg" idx="0"/>
+          </p:nvPr>
+        </p:nvSpPr>
+        <p:spPr/>
+      </p:sp>
+      <p:sp>
+        <p:nvSpPr>
+          <p:cNvPr id="3" name="Notes Placeholder 2"/>
+          <p:cNvSpPr>
+            <a:spLocks xmlns:a="http://schemas.openxmlformats.org/drawingml/2006/main" noGrp="1"/>
+          </p:cNvSpPr>
+          <p:nvPr>
+            <p:ph type="body" idx="1"/>
+          </p:nvPr>
+        </p:nvSpPr>
+        <p:spPr/>
+        <p:txBody>
+          <a:bodyPr xmlns:a="http://schemas.openxmlformats.org/drawingml/2006/main"/>
+          <a:lstStyle xmlns:a="http://schemas.openxmlformats.org/drawingml/2006/main"/>
+          <a:p xmlns:a="http://schemas.openxmlformats.org/drawingml/2006/main">
+            <a:r>
+              <a:t>This slide is the CI/CD operating answer: let AIDL shape the inputs and Ansible enforce the delivery contract.</a:t>
+            </a:r>
+          </a:p>
+          <a:p xmlns:a="http://schemas.openxmlformats.org/drawingml/2006/main">
+            <a:r>
+              <a:t>Emphasize that dev/staging config files make promotion explicit without changing the playbook logic.</a:t>
+            </a:r>
+          </a:p>
+          <a:p xmlns:a="http://schemas.openxmlformats.org/drawingml/2006/main">
+            <a:r>
+              <a:t/>
+            </a:r>
+          </a:p>
+          <a:p xmlns:a="http://schemas.openxmlformats.org/drawingml/2006/main">
+            <a:r>
+              <a:t>[Sources]</a:t>
+            </a:r>
+          </a:p>
+          <a:p xmlns:a="http://schemas.openxmlformats.org/drawingml/2006/main">
+            <a:r>
+              <a:t>- README.md, 'Core components', lines 30-42.</a:t>
+            </a:r>
+          </a:p>
+          <a:p xmlns:a="http://schemas.openxmlformats.org/drawingml/2006/main">
+            <a:r>
+              <a:t>- README.md, validation and CI/CD flow, lines 15-23 and 38-41.</a:t>
+            </a:r>
+          </a:p>
+          <a:p xmlns:a="http://schemas.openxmlformats.org/drawingml/2006/main">
+            <a:r>
+              <a:t>- config/environments/dev.json and config/environments/staging.json.</a:t>
+            </a:r>
+          </a:p>
+        </p:txBody>
+      </p:sp>
+      <p:sp>
+        <p:nvSpPr>
+          <p:cNvPr id="4" name="Slide Number Placeholder 3"/>
+          <p:cNvSpPr>
+            <a:spLocks xmlns:a="http://schemas.openxmlformats.org/drawingml/2006/main" noGrp="1"/>
+          </p:cNvSpPr>
+          <p:nvPr>
+            <p:ph type="sldNum" idx="5"/>
+          </p:nvPr>
+        </p:nvSpPr>
+        <p:spPr/>
+        <p:txBody>
+          <a:bodyPr xmlns:a="http://schemas.openxmlformats.org/drawingml/2006/main"/>
+          <a:lstStyle xmlns:a="http://schemas.openxmlformats.org/drawingml/2006/main"/>
+          <a:p xmlns:a="http://schemas.openxmlformats.org/drawingml/2006/main"/>
+        </p:txBody>
+      </p:sp>
+    </p:spTree>
+  </p:cSld>
+  <p:clrMapOvr>
+    <a:masterClrMapping xmlns:a="http://schemas.openxmlformats.org/drawingml/2006/main"/>
+  </p:clrMapOvr>
+</p:notes>
+</file>
+
+<file path=ppt/notesSlides/notesSlide7.xml><?xml version="1.0" encoding="utf-8"?>
 <p:notes xmlns:p="http://schemas.openxmlformats.org/presentationml/2006/main">
   <p:cSld>
     <p:spTree>
@@ -1050,7 +1151,7 @@
   </p:cSld>
   <p:clrMap bg1="lt1" tx1="dk1" bg2="lt2" tx2="dk2" accent1="accent1" accent2="accent2" accent3="accent3" accent4="accent4" accent5="accent5" accent6="accent6" hlink="hlink" folHlink="folHlink"/>
   <p:sldLayoutIdLst>
-    <p:sldLayoutId xmlns:r="http://schemas.openxmlformats.org/officeDocument/2006/relationships" id="2147483649" r:id="Rc857a6e2cd1d4a29"/>
+    <p:sldLayoutId xmlns:r="http://schemas.openxmlformats.org/officeDocument/2006/relationships" id="2147483649" r:id="R6306d86845f5402b"/>
   </p:sldLayoutIdLst>
   <p:txStyles>
     <p:titleStyle>
@@ -1601,7 +1702,7 @@
           <p:cNvPr id="24" name="">
             <a:extLst xmlns:a="http://schemas.openxmlformats.org/drawingml/2006/main">
               <a:ext uri="{FF2B5EF4-FFF2-40B4-BE49-F238E27FC236}">
-                <a16:creationId xmlns:a16="http://schemas.microsoft.com/office/drawing/2014/main" id="{00684850-4B2D-4517-9FCB-786757F751C4}"/>
+                <a16:creationId xmlns:a16="http://schemas.microsoft.com/office/drawing/2014/main" id="{AECF9656-1C28-47BA-9EDB-9BE3E041963B}"/>
               </a:ext>
             </a:extLst>
           </p:cNvPr>
@@ -1657,7 +1758,7 @@
           <p:cNvPr id="2" name="">
             <a:extLst xmlns:a="http://schemas.openxmlformats.org/drawingml/2006/main">
               <a:ext uri="{FF2B5EF4-FFF2-40B4-BE49-F238E27FC236}">
-                <a16:creationId xmlns:a16="http://schemas.microsoft.com/office/drawing/2014/main" id="{737B9720-0518-4DF8-9A6B-0E4AA3BB749D}"/>
+                <a16:creationId xmlns:a16="http://schemas.microsoft.com/office/drawing/2014/main" id="{F2217EDE-EBDD-4354-B439-4A482EE2C7D5}"/>
               </a:ext>
             </a:extLst>
           </p:cNvPr>
@@ -1713,7 +1814,7 @@
           <p:cNvPr id="3" name="">
             <a:extLst xmlns:a="http://schemas.openxmlformats.org/drawingml/2006/main">
               <a:ext uri="{FF2B5EF4-FFF2-40B4-BE49-F238E27FC236}">
-                <a16:creationId xmlns:a16="http://schemas.microsoft.com/office/drawing/2014/main" id="{0D1E90F3-5EB5-4804-B607-9FB57B169BB6}"/>
+                <a16:creationId xmlns:a16="http://schemas.microsoft.com/office/drawing/2014/main" id="{2F51C7CD-A577-4CA7-942F-DEE37E0A30CB}"/>
               </a:ext>
             </a:extLst>
           </p:cNvPr>
@@ -1769,7 +1870,7 @@
           <p:cNvPr id="4" name="">
             <a:extLst xmlns:a="http://schemas.openxmlformats.org/drawingml/2006/main">
               <a:ext uri="{FF2B5EF4-FFF2-40B4-BE49-F238E27FC236}">
-                <a16:creationId xmlns:a16="http://schemas.microsoft.com/office/drawing/2014/main" id="{E3518A07-C39B-4232-806D-8C723581007A}"/>
+                <a16:creationId xmlns:a16="http://schemas.microsoft.com/office/drawing/2014/main" id="{6930DDA2-1777-46EE-91D9-12708FAB1B04}"/>
               </a:ext>
             </a:extLst>
           </p:cNvPr>
@@ -1802,7 +1903,7 @@
           <p:cNvPr id="5" name="">
             <a:extLst xmlns:a="http://schemas.openxmlformats.org/drawingml/2006/main">
               <a:ext uri="{FF2B5EF4-FFF2-40B4-BE49-F238E27FC236}">
-                <a16:creationId xmlns:a16="http://schemas.microsoft.com/office/drawing/2014/main" id="{511E840B-79C6-47FB-86F7-EBD019FDD212}"/>
+                <a16:creationId xmlns:a16="http://schemas.microsoft.com/office/drawing/2014/main" id="{9FFBFD23-B27D-4C1C-A8F2-A549D4915DD4}"/>
               </a:ext>
             </a:extLst>
           </p:cNvPr>
@@ -1835,7 +1936,7 @@
           <p:cNvPr id="6" name="">
             <a:extLst xmlns:a="http://schemas.openxmlformats.org/drawingml/2006/main">
               <a:ext uri="{FF2B5EF4-FFF2-40B4-BE49-F238E27FC236}">
-                <a16:creationId xmlns:a16="http://schemas.microsoft.com/office/drawing/2014/main" id="{856C5C84-8FAB-435A-A44A-31A776D7E7D6}"/>
+                <a16:creationId xmlns:a16="http://schemas.microsoft.com/office/drawing/2014/main" id="{F9486543-750D-4957-B498-12E53810A4BC}"/>
               </a:ext>
             </a:extLst>
           </p:cNvPr>
@@ -1891,7 +1992,7 @@
           <p:cNvPr id="7" name="">
             <a:extLst xmlns:a="http://schemas.openxmlformats.org/drawingml/2006/main">
               <a:ext uri="{FF2B5EF4-FFF2-40B4-BE49-F238E27FC236}">
-                <a16:creationId xmlns:a16="http://schemas.microsoft.com/office/drawing/2014/main" id="{DF59EA2A-4FAC-4F31-882D-EDC4F3673292}"/>
+                <a16:creationId xmlns:a16="http://schemas.microsoft.com/office/drawing/2014/main" id="{68CE97C4-DEA0-4254-8392-D309B5531414}"/>
               </a:ext>
             </a:extLst>
           </p:cNvPr>
@@ -1922,7 +2023,7 @@
           <p:cNvPr id="8" name="">
             <a:extLst xmlns:a="http://schemas.openxmlformats.org/drawingml/2006/main">
               <a:ext uri="{FF2B5EF4-FFF2-40B4-BE49-F238E27FC236}">
-                <a16:creationId xmlns:a16="http://schemas.microsoft.com/office/drawing/2014/main" id="{246949DB-CDC2-4AC1-87CA-BDF9420C5AFC}"/>
+                <a16:creationId xmlns:a16="http://schemas.microsoft.com/office/drawing/2014/main" id="{476003CC-514D-4D50-ADCA-CBD249F358D7}"/>
               </a:ext>
             </a:extLst>
           </p:cNvPr>
@@ -1955,7 +2056,7 @@
           <p:cNvPr id="9" name="">
             <a:extLst xmlns:a="http://schemas.openxmlformats.org/drawingml/2006/main">
               <a:ext uri="{FF2B5EF4-FFF2-40B4-BE49-F238E27FC236}">
-                <a16:creationId xmlns:a16="http://schemas.microsoft.com/office/drawing/2014/main" id="{B834F728-6B05-46AC-9C50-5244002E0168}"/>
+                <a16:creationId xmlns:a16="http://schemas.microsoft.com/office/drawing/2014/main" id="{C5146645-0245-4FFE-B47B-11C4DC03481C}"/>
               </a:ext>
             </a:extLst>
           </p:cNvPr>
@@ -2011,7 +2112,7 @@
           <p:cNvPr id="10" name="">
             <a:extLst xmlns:a="http://schemas.openxmlformats.org/drawingml/2006/main">
               <a:ext uri="{FF2B5EF4-FFF2-40B4-BE49-F238E27FC236}">
-                <a16:creationId xmlns:a16="http://schemas.microsoft.com/office/drawing/2014/main" id="{2DC68964-13C5-4F2C-848F-970A6D0C69EC}"/>
+                <a16:creationId xmlns:a16="http://schemas.microsoft.com/office/drawing/2014/main" id="{FE818A72-C8CD-4122-9CB7-F77EA5CA2667}"/>
               </a:ext>
             </a:extLst>
           </p:cNvPr>
@@ -2042,7 +2143,7 @@
           <p:cNvPr id="11" name="">
             <a:extLst xmlns:a="http://schemas.openxmlformats.org/drawingml/2006/main">
               <a:ext uri="{FF2B5EF4-FFF2-40B4-BE49-F238E27FC236}">
-                <a16:creationId xmlns:a16="http://schemas.microsoft.com/office/drawing/2014/main" id="{10BE2A3D-54EF-400D-B88C-1E331B82F829}"/>
+                <a16:creationId xmlns:a16="http://schemas.microsoft.com/office/drawing/2014/main" id="{778E4708-04EF-4A06-AF81-73851AD752F5}"/>
               </a:ext>
             </a:extLst>
           </p:cNvPr>
@@ -2075,7 +2176,7 @@
           <p:cNvPr id="12" name="">
             <a:extLst xmlns:a="http://schemas.openxmlformats.org/drawingml/2006/main">
               <a:ext uri="{FF2B5EF4-FFF2-40B4-BE49-F238E27FC236}">
-                <a16:creationId xmlns:a16="http://schemas.microsoft.com/office/drawing/2014/main" id="{59B318CD-7AF2-4F54-AC3A-F2F27E5A3691}"/>
+                <a16:creationId xmlns:a16="http://schemas.microsoft.com/office/drawing/2014/main" id="{1C34A4D2-3015-43B2-AA94-5DE6A03F5C4C}"/>
               </a:ext>
             </a:extLst>
           </p:cNvPr>
@@ -2131,7 +2232,7 @@
           <p:cNvPr id="13" name="">
             <a:extLst xmlns:a="http://schemas.openxmlformats.org/drawingml/2006/main">
               <a:ext uri="{FF2B5EF4-FFF2-40B4-BE49-F238E27FC236}">
-                <a16:creationId xmlns:a16="http://schemas.microsoft.com/office/drawing/2014/main" id="{052CA197-D93F-4B76-8589-DDFC30230ED5}"/>
+                <a16:creationId xmlns:a16="http://schemas.microsoft.com/office/drawing/2014/main" id="{900ACA1B-9964-4171-84DB-98D648552F63}"/>
               </a:ext>
             </a:extLst>
           </p:cNvPr>
@@ -2162,7 +2263,7 @@
           <p:cNvPr id="14" name="">
             <a:extLst xmlns:a="http://schemas.openxmlformats.org/drawingml/2006/main">
               <a:ext uri="{FF2B5EF4-FFF2-40B4-BE49-F238E27FC236}">
-                <a16:creationId xmlns:a16="http://schemas.microsoft.com/office/drawing/2014/main" id="{EFE80EEE-718A-41AB-86B0-06E19A3A706A}"/>
+                <a16:creationId xmlns:a16="http://schemas.microsoft.com/office/drawing/2014/main" id="{B751F897-3847-46C7-93B3-BC713F3B78BB}"/>
               </a:ext>
             </a:extLst>
           </p:cNvPr>
@@ -2195,7 +2296,7 @@
           <p:cNvPr id="15" name="">
             <a:extLst xmlns:a="http://schemas.openxmlformats.org/drawingml/2006/main">
               <a:ext uri="{FF2B5EF4-FFF2-40B4-BE49-F238E27FC236}">
-                <a16:creationId xmlns:a16="http://schemas.microsoft.com/office/drawing/2014/main" id="{D2CF20D5-EADC-4B01-84BD-B32AC68BF12A}"/>
+                <a16:creationId xmlns:a16="http://schemas.microsoft.com/office/drawing/2014/main" id="{3EC017DD-1444-4927-8422-4D67FBAEB2F0}"/>
               </a:ext>
             </a:extLst>
           </p:cNvPr>
@@ -2251,7 +2352,7 @@
           <p:cNvPr id="16" name="">
             <a:extLst xmlns:a="http://schemas.openxmlformats.org/drawingml/2006/main">
               <a:ext uri="{FF2B5EF4-FFF2-40B4-BE49-F238E27FC236}">
-                <a16:creationId xmlns:a16="http://schemas.microsoft.com/office/drawing/2014/main" id="{25C7F343-312C-449A-9328-594F001D0B48}"/>
+                <a16:creationId xmlns:a16="http://schemas.microsoft.com/office/drawing/2014/main" id="{3224D3AE-43EB-4A9B-9AB1-AC2E57DBA3E6}"/>
               </a:ext>
             </a:extLst>
           </p:cNvPr>
@@ -2282,7 +2383,7 @@
           <p:cNvPr id="17" name="">
             <a:extLst xmlns:a="http://schemas.openxmlformats.org/drawingml/2006/main">
               <a:ext uri="{FF2B5EF4-FFF2-40B4-BE49-F238E27FC236}">
-                <a16:creationId xmlns:a16="http://schemas.microsoft.com/office/drawing/2014/main" id="{44B89AA3-8535-40FF-AEA2-F62E3C3AEF2D}"/>
+                <a16:creationId xmlns:a16="http://schemas.microsoft.com/office/drawing/2014/main" id="{DC7ECBA9-07B2-40CC-9695-22F9199F929A}"/>
               </a:ext>
             </a:extLst>
           </p:cNvPr>
@@ -2315,7 +2416,7 @@
           <p:cNvPr id="18" name="">
             <a:extLst xmlns:a="http://schemas.openxmlformats.org/drawingml/2006/main">
               <a:ext uri="{FF2B5EF4-FFF2-40B4-BE49-F238E27FC236}">
-                <a16:creationId xmlns:a16="http://schemas.microsoft.com/office/drawing/2014/main" id="{35303AAE-AC94-44CC-A538-D5933C71547E}"/>
+                <a16:creationId xmlns:a16="http://schemas.microsoft.com/office/drawing/2014/main" id="{6B8FD45A-A4F1-4700-9DDE-11A3870E6167}"/>
               </a:ext>
             </a:extLst>
           </p:cNvPr>
@@ -2371,7 +2472,7 @@
           <p:cNvPr id="19" name="">
             <a:extLst xmlns:a="http://schemas.openxmlformats.org/drawingml/2006/main">
               <a:ext uri="{FF2B5EF4-FFF2-40B4-BE49-F238E27FC236}">
-                <a16:creationId xmlns:a16="http://schemas.microsoft.com/office/drawing/2014/main" id="{0C790BDA-DCEF-4392-B93E-B27F8A7B07E9}"/>
+                <a16:creationId xmlns:a16="http://schemas.microsoft.com/office/drawing/2014/main" id="{D250AEFD-3D4F-44B4-BBFF-F094335718BE}"/>
               </a:ext>
             </a:extLst>
           </p:cNvPr>
@@ -2402,7 +2503,7 @@
           <p:cNvPr id="20" name="">
             <a:extLst xmlns:a="http://schemas.openxmlformats.org/drawingml/2006/main">
               <a:ext uri="{FF2B5EF4-FFF2-40B4-BE49-F238E27FC236}">
-                <a16:creationId xmlns:a16="http://schemas.microsoft.com/office/drawing/2014/main" id="{3E6E2170-15AF-4E77-9467-2E141A1E706D}"/>
+                <a16:creationId xmlns:a16="http://schemas.microsoft.com/office/drawing/2014/main" id="{AFC6B6B6-9CD0-4332-A099-692691053FBF}"/>
               </a:ext>
             </a:extLst>
           </p:cNvPr>
@@ -2435,7 +2536,7 @@
           <p:cNvPr id="21" name="">
             <a:extLst xmlns:a="http://schemas.openxmlformats.org/drawingml/2006/main">
               <a:ext uri="{FF2B5EF4-FFF2-40B4-BE49-F238E27FC236}">
-                <a16:creationId xmlns:a16="http://schemas.microsoft.com/office/drawing/2014/main" id="{988C1D58-AAA9-4817-9DD1-5C54F3867C7F}"/>
+                <a16:creationId xmlns:a16="http://schemas.microsoft.com/office/drawing/2014/main" id="{808F394F-F8C3-443D-93FC-9ED992C078AE}"/>
               </a:ext>
             </a:extLst>
           </p:cNvPr>
@@ -2491,7 +2592,7 @@
           <p:cNvPr id="22" name="">
             <a:extLst xmlns:a="http://schemas.openxmlformats.org/drawingml/2006/main">
               <a:ext uri="{FF2B5EF4-FFF2-40B4-BE49-F238E27FC236}">
-                <a16:creationId xmlns:a16="http://schemas.microsoft.com/office/drawing/2014/main" id="{BA73142B-8B62-4926-8168-623F2B4C3F9E}"/>
+                <a16:creationId xmlns:a16="http://schemas.microsoft.com/office/drawing/2014/main" id="{626C6B31-938E-4A58-B944-A66731D5B823}"/>
               </a:ext>
             </a:extLst>
           </p:cNvPr>
@@ -2547,7 +2648,7 @@
           <p:cNvPr id="23" name="">
             <a:extLst xmlns:a="http://schemas.openxmlformats.org/drawingml/2006/main">
               <a:ext uri="{FF2B5EF4-FFF2-40B4-BE49-F238E27FC236}">
-                <a16:creationId xmlns:a16="http://schemas.microsoft.com/office/drawing/2014/main" id="{7E37F91A-0A31-4F70-AC02-F64403569741}"/>
+                <a16:creationId xmlns:a16="http://schemas.microsoft.com/office/drawing/2014/main" id="{9D59606B-FF6D-4FEF-99FC-9EBA002AF79C}"/>
               </a:ext>
             </a:extLst>
           </p:cNvPr>
@@ -2601,7 +2702,7 @@
     </p:spTree>
     <p:extLst>
       <p:ext uri="{BB962C8B-B14F-4D97-AF65-F5344CB8AC3E}">
-        <p14:creationId xmlns:p14="http://schemas.microsoft.com/office/powerpoint/2010/main" val="174623006"/>
+        <p14:creationId xmlns:p14="http://schemas.microsoft.com/office/powerpoint/2010/main" val="2085934883"/>
       </p:ext>
     </p:extLst>
   </p:cSld>
@@ -2632,7 +2733,7 @@
           <p:cNvPr id="18" name="">
             <a:extLst xmlns:a="http://schemas.openxmlformats.org/drawingml/2006/main">
               <a:ext uri="{FF2B5EF4-FFF2-40B4-BE49-F238E27FC236}">
-                <a16:creationId xmlns:a16="http://schemas.microsoft.com/office/drawing/2014/main" id="{45D26E7A-F735-43F0-A4F6-66B954E5A543}"/>
+                <a16:creationId xmlns:a16="http://schemas.microsoft.com/office/drawing/2014/main" id="{65F21B47-87EE-41B6-A264-12531613E145}"/>
               </a:ext>
             </a:extLst>
           </p:cNvPr>
@@ -2688,7 +2789,7 @@
           <p:cNvPr id="2" name="">
             <a:extLst xmlns:a="http://schemas.openxmlformats.org/drawingml/2006/main">
               <a:ext uri="{FF2B5EF4-FFF2-40B4-BE49-F238E27FC236}">
-                <a16:creationId xmlns:a16="http://schemas.microsoft.com/office/drawing/2014/main" id="{A130AC66-8805-412A-A85F-8AF7A7BAEA86}"/>
+                <a16:creationId xmlns:a16="http://schemas.microsoft.com/office/drawing/2014/main" id="{B148BEB1-44AA-48F2-B9C4-682FD9AE4307}"/>
               </a:ext>
             </a:extLst>
           </p:cNvPr>
@@ -2719,7 +2820,7 @@
           <p:cNvPr id="3" name="">
             <a:extLst xmlns:a="http://schemas.openxmlformats.org/drawingml/2006/main">
               <a:ext uri="{FF2B5EF4-FFF2-40B4-BE49-F238E27FC236}">
-                <a16:creationId xmlns:a16="http://schemas.microsoft.com/office/drawing/2014/main" id="{8D1C92C2-F44A-40F7-979A-20F412ED8648}"/>
+                <a16:creationId xmlns:a16="http://schemas.microsoft.com/office/drawing/2014/main" id="{830B22A3-B8C0-4382-98CC-AD2E6938F0D8}"/>
               </a:ext>
             </a:extLst>
           </p:cNvPr>
@@ -2775,7 +2876,7 @@
           <p:cNvPr id="4" name="">
             <a:extLst xmlns:a="http://schemas.openxmlformats.org/drawingml/2006/main">
               <a:ext uri="{FF2B5EF4-FFF2-40B4-BE49-F238E27FC236}">
-                <a16:creationId xmlns:a16="http://schemas.microsoft.com/office/drawing/2014/main" id="{5CE20FC2-3BDE-471C-AA51-CAC4B87BB1FB}"/>
+                <a16:creationId xmlns:a16="http://schemas.microsoft.com/office/drawing/2014/main" id="{7D213FF6-824A-4523-A448-998ECC04732B}"/>
               </a:ext>
             </a:extLst>
           </p:cNvPr>
@@ -2808,7 +2909,7 @@
           <p:cNvPr id="5" name="">
             <a:extLst xmlns:a="http://schemas.openxmlformats.org/drawingml/2006/main">
               <a:ext uri="{FF2B5EF4-FFF2-40B4-BE49-F238E27FC236}">
-                <a16:creationId xmlns:a16="http://schemas.microsoft.com/office/drawing/2014/main" id="{22AB3FE1-8611-4E9E-AC75-15FA494608CF}"/>
+                <a16:creationId xmlns:a16="http://schemas.microsoft.com/office/drawing/2014/main" id="{D3C9A3FF-2C12-4469-B1B9-BF92099DC04E}"/>
               </a:ext>
             </a:extLst>
           </p:cNvPr>
@@ -2864,7 +2965,7 @@
           <p:cNvPr id="6" name="">
             <a:extLst xmlns:a="http://schemas.openxmlformats.org/drawingml/2006/main">
               <a:ext uri="{FF2B5EF4-FFF2-40B4-BE49-F238E27FC236}">
-                <a16:creationId xmlns:a16="http://schemas.microsoft.com/office/drawing/2014/main" id="{310045E3-FD5F-442F-AC2C-D2C848EC5FC7}"/>
+                <a16:creationId xmlns:a16="http://schemas.microsoft.com/office/drawing/2014/main" id="{25A4A806-ECDE-42E5-810C-4B90F96953C5}"/>
               </a:ext>
             </a:extLst>
           </p:cNvPr>
@@ -2897,7 +2998,7 @@
           <p:cNvPr id="7" name="">
             <a:extLst xmlns:a="http://schemas.openxmlformats.org/drawingml/2006/main">
               <a:ext uri="{FF2B5EF4-FFF2-40B4-BE49-F238E27FC236}">
-                <a16:creationId xmlns:a16="http://schemas.microsoft.com/office/drawing/2014/main" id="{F2D5590B-08E9-4578-B56F-4C1D29870219}"/>
+                <a16:creationId xmlns:a16="http://schemas.microsoft.com/office/drawing/2014/main" id="{29D77B3C-5684-4740-8D05-25B948DE9B48}"/>
               </a:ext>
             </a:extLst>
           </p:cNvPr>
@@ -2953,7 +3054,7 @@
           <p:cNvPr id="8" name="">
             <a:extLst xmlns:a="http://schemas.openxmlformats.org/drawingml/2006/main">
               <a:ext uri="{FF2B5EF4-FFF2-40B4-BE49-F238E27FC236}">
-                <a16:creationId xmlns:a16="http://schemas.microsoft.com/office/drawing/2014/main" id="{57683472-1A5F-4611-BFA5-6D25D7906860}"/>
+                <a16:creationId xmlns:a16="http://schemas.microsoft.com/office/drawing/2014/main" id="{F5DE4B82-23B6-472A-8993-F21A0EA6E43E}"/>
               </a:ext>
             </a:extLst>
           </p:cNvPr>
@@ -2986,7 +3087,7 @@
           <p:cNvPr id="9" name="">
             <a:extLst xmlns:a="http://schemas.openxmlformats.org/drawingml/2006/main">
               <a:ext uri="{FF2B5EF4-FFF2-40B4-BE49-F238E27FC236}">
-                <a16:creationId xmlns:a16="http://schemas.microsoft.com/office/drawing/2014/main" id="{1F43D158-1896-44EB-9789-4BB28AA2904E}"/>
+                <a16:creationId xmlns:a16="http://schemas.microsoft.com/office/drawing/2014/main" id="{8CB6073A-70CB-46F1-B129-C970865D0B44}"/>
               </a:ext>
             </a:extLst>
           </p:cNvPr>
@@ -3042,7 +3143,7 @@
           <p:cNvPr id="10" name="">
             <a:extLst xmlns:a="http://schemas.openxmlformats.org/drawingml/2006/main">
               <a:ext uri="{FF2B5EF4-FFF2-40B4-BE49-F238E27FC236}">
-                <a16:creationId xmlns:a16="http://schemas.microsoft.com/office/drawing/2014/main" id="{C00B95E9-1683-4D8A-8727-CEA02D882143}"/>
+                <a16:creationId xmlns:a16="http://schemas.microsoft.com/office/drawing/2014/main" id="{1820B8B6-CBB6-43E0-89F0-1867AD52EB9E}"/>
               </a:ext>
             </a:extLst>
           </p:cNvPr>
@@ -3098,7 +3199,7 @@
           <p:cNvPr id="11" name="">
             <a:extLst xmlns:a="http://schemas.openxmlformats.org/drawingml/2006/main">
               <a:ext uri="{FF2B5EF4-FFF2-40B4-BE49-F238E27FC236}">
-                <a16:creationId xmlns:a16="http://schemas.microsoft.com/office/drawing/2014/main" id="{B60FFE1D-47E5-4C40-9861-EDCF0B35E1AC}"/>
+                <a16:creationId xmlns:a16="http://schemas.microsoft.com/office/drawing/2014/main" id="{C173C17B-8928-4F6A-AB15-00D19556994F}"/>
               </a:ext>
             </a:extLst>
           </p:cNvPr>
@@ -3131,7 +3232,7 @@
           <p:cNvPr id="12" name="">
             <a:extLst xmlns:a="http://schemas.openxmlformats.org/drawingml/2006/main">
               <a:ext uri="{FF2B5EF4-FFF2-40B4-BE49-F238E27FC236}">
-                <a16:creationId xmlns:a16="http://schemas.microsoft.com/office/drawing/2014/main" id="{63B07F60-629F-4923-8694-5F11AF142DB7}"/>
+                <a16:creationId xmlns:a16="http://schemas.microsoft.com/office/drawing/2014/main" id="{B8D7FFA7-8EAE-4615-A2F1-148B4722B1BF}"/>
               </a:ext>
             </a:extLst>
           </p:cNvPr>
@@ -3187,7 +3288,7 @@
           <p:cNvPr id="13" name="">
             <a:extLst xmlns:a="http://schemas.openxmlformats.org/drawingml/2006/main">
               <a:ext uri="{FF2B5EF4-FFF2-40B4-BE49-F238E27FC236}">
-                <a16:creationId xmlns:a16="http://schemas.microsoft.com/office/drawing/2014/main" id="{3E93DEDD-DCD0-46DE-9928-0CBC96CB417F}"/>
+                <a16:creationId xmlns:a16="http://schemas.microsoft.com/office/drawing/2014/main" id="{208A063F-780C-49E5-BB25-CFBDBF1E92CE}"/>
               </a:ext>
             </a:extLst>
           </p:cNvPr>
@@ -3220,7 +3321,7 @@
           <p:cNvPr id="14" name="">
             <a:extLst xmlns:a="http://schemas.openxmlformats.org/drawingml/2006/main">
               <a:ext uri="{FF2B5EF4-FFF2-40B4-BE49-F238E27FC236}">
-                <a16:creationId xmlns:a16="http://schemas.microsoft.com/office/drawing/2014/main" id="{7A9E0532-253B-42EC-BD7B-B7F1E8BB3776}"/>
+                <a16:creationId xmlns:a16="http://schemas.microsoft.com/office/drawing/2014/main" id="{99410911-0104-428D-8F90-EBDB97704655}"/>
               </a:ext>
             </a:extLst>
           </p:cNvPr>
@@ -3276,7 +3377,7 @@
           <p:cNvPr id="15" name="">
             <a:extLst xmlns:a="http://schemas.openxmlformats.org/drawingml/2006/main">
               <a:ext uri="{FF2B5EF4-FFF2-40B4-BE49-F238E27FC236}">
-                <a16:creationId xmlns:a16="http://schemas.microsoft.com/office/drawing/2014/main" id="{6C50403F-25FE-4371-8AC7-89B1384D10E9}"/>
+                <a16:creationId xmlns:a16="http://schemas.microsoft.com/office/drawing/2014/main" id="{429B3E38-5566-4DB1-BD51-C00F0E646955}"/>
               </a:ext>
             </a:extLst>
           </p:cNvPr>
@@ -3309,7 +3410,7 @@
           <p:cNvPr id="16" name="">
             <a:extLst xmlns:a="http://schemas.openxmlformats.org/drawingml/2006/main">
               <a:ext uri="{FF2B5EF4-FFF2-40B4-BE49-F238E27FC236}">
-                <a16:creationId xmlns:a16="http://schemas.microsoft.com/office/drawing/2014/main" id="{8F5732DB-F3C5-4DD5-90A1-9A27C01F2DD5}"/>
+                <a16:creationId xmlns:a16="http://schemas.microsoft.com/office/drawing/2014/main" id="{4B713EA2-56E0-4F70-ABAD-F63B438626FB}"/>
               </a:ext>
             </a:extLst>
           </p:cNvPr>
@@ -3365,7 +3466,7 @@
           <p:cNvPr id="17" name="">
             <a:extLst xmlns:a="http://schemas.openxmlformats.org/drawingml/2006/main">
               <a:ext uri="{FF2B5EF4-FFF2-40B4-BE49-F238E27FC236}">
-                <a16:creationId xmlns:a16="http://schemas.microsoft.com/office/drawing/2014/main" id="{14978619-45E6-4AEB-9B9F-3A14E9832A5E}"/>
+                <a16:creationId xmlns:a16="http://schemas.microsoft.com/office/drawing/2014/main" id="{DE5C3F9C-BBA5-4BAD-84BD-223CF4077114}"/>
               </a:ext>
             </a:extLst>
           </p:cNvPr>
@@ -3419,7 +3520,7 @@
     </p:spTree>
     <p:extLst>
       <p:ext uri="{BB962C8B-B14F-4D97-AF65-F5344CB8AC3E}">
-        <p14:creationId xmlns:p14="http://schemas.microsoft.com/office/powerpoint/2010/main" val="1316887439"/>
+        <p14:creationId xmlns:p14="http://schemas.microsoft.com/office/powerpoint/2010/main" val="2117096681"/>
       </p:ext>
     </p:extLst>
   </p:cSld>
@@ -3450,7 +3551,7 @@
           <p:cNvPr id="25" name="">
             <a:extLst xmlns:a="http://schemas.openxmlformats.org/drawingml/2006/main">
               <a:ext uri="{FF2B5EF4-FFF2-40B4-BE49-F238E27FC236}">
-                <a16:creationId xmlns:a16="http://schemas.microsoft.com/office/drawing/2014/main" id="{38911C7F-81BB-4646-83E5-ABFD32DF9CD4}"/>
+                <a16:creationId xmlns:a16="http://schemas.microsoft.com/office/drawing/2014/main" id="{38E93C02-0EDD-44CB-80DF-D993993D7C2A}"/>
               </a:ext>
             </a:extLst>
           </p:cNvPr>
@@ -3506,7 +3607,7 @@
           <p:cNvPr id="2" name="">
             <a:extLst xmlns:a="http://schemas.openxmlformats.org/drawingml/2006/main">
               <a:ext uri="{FF2B5EF4-FFF2-40B4-BE49-F238E27FC236}">
-                <a16:creationId xmlns:a16="http://schemas.microsoft.com/office/drawing/2014/main" id="{EDFC5D80-B8A3-4FB1-9746-4CF7FE4331BF}"/>
+                <a16:creationId xmlns:a16="http://schemas.microsoft.com/office/drawing/2014/main" id="{BC536149-BFB3-417B-BFCA-671B7851FA10}"/>
               </a:ext>
             </a:extLst>
           </p:cNvPr>
@@ -3562,7 +3663,7 @@
           <p:cNvPr id="3" name="">
             <a:extLst xmlns:a="http://schemas.openxmlformats.org/drawingml/2006/main">
               <a:ext uri="{FF2B5EF4-FFF2-40B4-BE49-F238E27FC236}">
-                <a16:creationId xmlns:a16="http://schemas.microsoft.com/office/drawing/2014/main" id="{C8D88645-E7D0-41F1-9FEF-A5E259F43B82}"/>
+                <a16:creationId xmlns:a16="http://schemas.microsoft.com/office/drawing/2014/main" id="{48168E60-7EE8-40DD-878A-1FC19624C0A4}"/>
               </a:ext>
             </a:extLst>
           </p:cNvPr>
@@ -3595,7 +3696,7 @@
           <p:cNvPr id="4" name="">
             <a:extLst xmlns:a="http://schemas.openxmlformats.org/drawingml/2006/main">
               <a:ext uri="{FF2B5EF4-FFF2-40B4-BE49-F238E27FC236}">
-                <a16:creationId xmlns:a16="http://schemas.microsoft.com/office/drawing/2014/main" id="{0F7965B3-03B0-479C-940E-C84BA60F9BFA}"/>
+                <a16:creationId xmlns:a16="http://schemas.microsoft.com/office/drawing/2014/main" id="{66905AF4-FC96-467F-B3E9-44F436504CA4}"/>
               </a:ext>
             </a:extLst>
           </p:cNvPr>
@@ -3651,7 +3752,7 @@
           <p:cNvPr id="5" name="">
             <a:extLst xmlns:a="http://schemas.openxmlformats.org/drawingml/2006/main">
               <a:ext uri="{FF2B5EF4-FFF2-40B4-BE49-F238E27FC236}">
-                <a16:creationId xmlns:a16="http://schemas.microsoft.com/office/drawing/2014/main" id="{A0BF3E17-E6BD-4A2B-8BAA-70517E0AD268}"/>
+                <a16:creationId xmlns:a16="http://schemas.microsoft.com/office/drawing/2014/main" id="{BF69DA11-FE11-4227-B4EB-C24689CA9187}"/>
               </a:ext>
             </a:extLst>
           </p:cNvPr>
@@ -3707,7 +3808,7 @@
           <p:cNvPr id="6" name="">
             <a:extLst xmlns:a="http://schemas.openxmlformats.org/drawingml/2006/main">
               <a:ext uri="{FF2B5EF4-FFF2-40B4-BE49-F238E27FC236}">
-                <a16:creationId xmlns:a16="http://schemas.microsoft.com/office/drawing/2014/main" id="{001B4EEF-E6D7-420E-AEB1-053C8FA8CCFE}"/>
+                <a16:creationId xmlns:a16="http://schemas.microsoft.com/office/drawing/2014/main" id="{EFDFBEFD-2260-4A0B-AB0D-DA7184642F0E}"/>
               </a:ext>
             </a:extLst>
           </p:cNvPr>
@@ -3740,7 +3841,7 @@
           <p:cNvPr id="7" name="">
             <a:extLst xmlns:a="http://schemas.openxmlformats.org/drawingml/2006/main">
               <a:ext uri="{FF2B5EF4-FFF2-40B4-BE49-F238E27FC236}">
-                <a16:creationId xmlns:a16="http://schemas.microsoft.com/office/drawing/2014/main" id="{58F4E955-5796-45FF-A8B5-38D2A2CFFD5A}"/>
+                <a16:creationId xmlns:a16="http://schemas.microsoft.com/office/drawing/2014/main" id="{7CC7B2B6-A0B4-4996-AF8E-6C1A72D7A61D}"/>
               </a:ext>
             </a:extLst>
           </p:cNvPr>
@@ -3796,7 +3897,7 @@
           <p:cNvPr id="8" name="">
             <a:extLst xmlns:a="http://schemas.openxmlformats.org/drawingml/2006/main">
               <a:ext uri="{FF2B5EF4-FFF2-40B4-BE49-F238E27FC236}">
-                <a16:creationId xmlns:a16="http://schemas.microsoft.com/office/drawing/2014/main" id="{D86BF2FA-957C-49F0-A762-92A55172723B}"/>
+                <a16:creationId xmlns:a16="http://schemas.microsoft.com/office/drawing/2014/main" id="{C9E938EA-FFD2-4976-B17A-126D68FCFD0D}"/>
               </a:ext>
             </a:extLst>
           </p:cNvPr>
@@ -3852,7 +3953,7 @@
           <p:cNvPr id="9" name="">
             <a:extLst xmlns:a="http://schemas.openxmlformats.org/drawingml/2006/main">
               <a:ext uri="{FF2B5EF4-FFF2-40B4-BE49-F238E27FC236}">
-                <a16:creationId xmlns:a16="http://schemas.microsoft.com/office/drawing/2014/main" id="{261E01BC-5A49-4C3A-AA97-8F334F1F2FDA}"/>
+                <a16:creationId xmlns:a16="http://schemas.microsoft.com/office/drawing/2014/main" id="{5BCF1C62-4BF0-4F87-9FD2-12333976D5FC}"/>
               </a:ext>
             </a:extLst>
           </p:cNvPr>
@@ -3885,7 +3986,7 @@
           <p:cNvPr id="10" name="">
             <a:extLst xmlns:a="http://schemas.openxmlformats.org/drawingml/2006/main">
               <a:ext uri="{FF2B5EF4-FFF2-40B4-BE49-F238E27FC236}">
-                <a16:creationId xmlns:a16="http://schemas.microsoft.com/office/drawing/2014/main" id="{D8295288-8884-4A78-995C-9AAE94FC32BA}"/>
+                <a16:creationId xmlns:a16="http://schemas.microsoft.com/office/drawing/2014/main" id="{8587BA58-8D98-4714-82C2-C0795CEE92D6}"/>
               </a:ext>
             </a:extLst>
           </p:cNvPr>
@@ -3941,7 +4042,7 @@
           <p:cNvPr id="11" name="">
             <a:extLst xmlns:a="http://schemas.openxmlformats.org/drawingml/2006/main">
               <a:ext uri="{FF2B5EF4-FFF2-40B4-BE49-F238E27FC236}">
-                <a16:creationId xmlns:a16="http://schemas.microsoft.com/office/drawing/2014/main" id="{4A6DDD90-210B-4D0C-9716-5968BAB361BB}"/>
+                <a16:creationId xmlns:a16="http://schemas.microsoft.com/office/drawing/2014/main" id="{31AF9DB7-7947-4504-B26B-6B33363CDE12}"/>
               </a:ext>
             </a:extLst>
           </p:cNvPr>
@@ -3997,7 +4098,7 @@
           <p:cNvPr id="12" name="">
             <a:extLst xmlns:a="http://schemas.openxmlformats.org/drawingml/2006/main">
               <a:ext uri="{FF2B5EF4-FFF2-40B4-BE49-F238E27FC236}">
-                <a16:creationId xmlns:a16="http://schemas.microsoft.com/office/drawing/2014/main" id="{55874963-9CA7-417F-AF84-DE5B1D24CC31}"/>
+                <a16:creationId xmlns:a16="http://schemas.microsoft.com/office/drawing/2014/main" id="{D5A92F20-58AF-46C3-BF5E-648EA8206E61}"/>
               </a:ext>
             </a:extLst>
           </p:cNvPr>
@@ -4030,7 +4131,7 @@
           <p:cNvPr id="13" name="">
             <a:extLst xmlns:a="http://schemas.openxmlformats.org/drawingml/2006/main">
               <a:ext uri="{FF2B5EF4-FFF2-40B4-BE49-F238E27FC236}">
-                <a16:creationId xmlns:a16="http://schemas.microsoft.com/office/drawing/2014/main" id="{6EA720AD-9C30-409D-8B98-F048DBB4508B}"/>
+                <a16:creationId xmlns:a16="http://schemas.microsoft.com/office/drawing/2014/main" id="{BBDDC039-22C4-4918-ACD2-6BE214065A57}"/>
               </a:ext>
             </a:extLst>
           </p:cNvPr>
@@ -4086,7 +4187,7 @@
           <p:cNvPr id="14" name="">
             <a:extLst xmlns:a="http://schemas.openxmlformats.org/drawingml/2006/main">
               <a:ext uri="{FF2B5EF4-FFF2-40B4-BE49-F238E27FC236}">
-                <a16:creationId xmlns:a16="http://schemas.microsoft.com/office/drawing/2014/main" id="{7965035A-8ECE-470D-BEF7-9AB3C4128A1E}"/>
+                <a16:creationId xmlns:a16="http://schemas.microsoft.com/office/drawing/2014/main" id="{10D3888E-EBC3-4368-87AA-876550AAAF12}"/>
               </a:ext>
             </a:extLst>
           </p:cNvPr>
@@ -4142,7 +4243,7 @@
           <p:cNvPr id="15" name="">
             <a:extLst xmlns:a="http://schemas.openxmlformats.org/drawingml/2006/main">
               <a:ext uri="{FF2B5EF4-FFF2-40B4-BE49-F238E27FC236}">
-                <a16:creationId xmlns:a16="http://schemas.microsoft.com/office/drawing/2014/main" id="{DB2DAFC8-BC8A-440E-BDBB-8BB17CD31419}"/>
+                <a16:creationId xmlns:a16="http://schemas.microsoft.com/office/drawing/2014/main" id="{80FD0456-833C-41AA-8933-828AD59189EB}"/>
               </a:ext>
             </a:extLst>
           </p:cNvPr>
@@ -4175,7 +4276,7 @@
           <p:cNvPr id="16" name="">
             <a:extLst xmlns:a="http://schemas.openxmlformats.org/drawingml/2006/main">
               <a:ext uri="{FF2B5EF4-FFF2-40B4-BE49-F238E27FC236}">
-                <a16:creationId xmlns:a16="http://schemas.microsoft.com/office/drawing/2014/main" id="{1FE3B40A-79D3-4CBC-A934-8C15E395B776}"/>
+                <a16:creationId xmlns:a16="http://schemas.microsoft.com/office/drawing/2014/main" id="{0FB73B9E-2258-442B-82D6-B2AF3D900893}"/>
               </a:ext>
             </a:extLst>
           </p:cNvPr>
@@ -4231,7 +4332,7 @@
           <p:cNvPr id="17" name="">
             <a:extLst xmlns:a="http://schemas.openxmlformats.org/drawingml/2006/main">
               <a:ext uri="{FF2B5EF4-FFF2-40B4-BE49-F238E27FC236}">
-                <a16:creationId xmlns:a16="http://schemas.microsoft.com/office/drawing/2014/main" id="{B862530B-CEBE-4772-8D95-25D2C95F1532}"/>
+                <a16:creationId xmlns:a16="http://schemas.microsoft.com/office/drawing/2014/main" id="{763EA290-B777-4A10-85C4-C88E491035A2}"/>
               </a:ext>
             </a:extLst>
           </p:cNvPr>
@@ -4287,7 +4388,7 @@
           <p:cNvPr id="18" name="">
             <a:extLst xmlns:a="http://schemas.openxmlformats.org/drawingml/2006/main">
               <a:ext uri="{FF2B5EF4-FFF2-40B4-BE49-F238E27FC236}">
-                <a16:creationId xmlns:a16="http://schemas.microsoft.com/office/drawing/2014/main" id="{C118C9B2-C0E4-40C2-AA0A-3EE8A439D214}"/>
+                <a16:creationId xmlns:a16="http://schemas.microsoft.com/office/drawing/2014/main" id="{F6AD17F8-2A44-45FB-B542-FF2546294D7C}"/>
               </a:ext>
             </a:extLst>
           </p:cNvPr>
@@ -4320,7 +4421,7 @@
           <p:cNvPr id="19" name="">
             <a:extLst xmlns:a="http://schemas.openxmlformats.org/drawingml/2006/main">
               <a:ext uri="{FF2B5EF4-FFF2-40B4-BE49-F238E27FC236}">
-                <a16:creationId xmlns:a16="http://schemas.microsoft.com/office/drawing/2014/main" id="{026AECFC-0261-41BE-99FD-B8E88F1DDBB9}"/>
+                <a16:creationId xmlns:a16="http://schemas.microsoft.com/office/drawing/2014/main" id="{37FC81F8-820F-46A1-AA4C-860C0D34AB7E}"/>
               </a:ext>
             </a:extLst>
           </p:cNvPr>
@@ -4353,7 +4454,7 @@
           <p:cNvPr id="20" name="">
             <a:extLst xmlns:a="http://schemas.openxmlformats.org/drawingml/2006/main">
               <a:ext uri="{FF2B5EF4-FFF2-40B4-BE49-F238E27FC236}">
-                <a16:creationId xmlns:a16="http://schemas.microsoft.com/office/drawing/2014/main" id="{0509E15C-AD33-441A-9D05-B81B028960C1}"/>
+                <a16:creationId xmlns:a16="http://schemas.microsoft.com/office/drawing/2014/main" id="{B1970E27-9528-451E-95E4-599B631BE747}"/>
               </a:ext>
             </a:extLst>
           </p:cNvPr>
@@ -4386,7 +4487,7 @@
           <p:cNvPr id="21" name="">
             <a:extLst xmlns:a="http://schemas.openxmlformats.org/drawingml/2006/main">
               <a:ext uri="{FF2B5EF4-FFF2-40B4-BE49-F238E27FC236}">
-                <a16:creationId xmlns:a16="http://schemas.microsoft.com/office/drawing/2014/main" id="{EA6328E6-5F3D-4ADC-AEC4-452AC0081D75}"/>
+                <a16:creationId xmlns:a16="http://schemas.microsoft.com/office/drawing/2014/main" id="{9BE6F160-97E7-491D-8E35-A9163AEF6A33}"/>
               </a:ext>
             </a:extLst>
           </p:cNvPr>
@@ -4419,7 +4520,7 @@
           <p:cNvPr id="22" name="">
             <a:extLst xmlns:a="http://schemas.openxmlformats.org/drawingml/2006/main">
               <a:ext uri="{FF2B5EF4-FFF2-40B4-BE49-F238E27FC236}">
-                <a16:creationId xmlns:a16="http://schemas.microsoft.com/office/drawing/2014/main" id="{97D036DA-A7E1-4090-A14E-D06881337EA6}"/>
+                <a16:creationId xmlns:a16="http://schemas.microsoft.com/office/drawing/2014/main" id="{6FB9A61B-A193-4612-8298-DE326452EB5F}"/>
               </a:ext>
             </a:extLst>
           </p:cNvPr>
@@ -4452,7 +4553,7 @@
           <p:cNvPr id="23" name="">
             <a:extLst xmlns:a="http://schemas.openxmlformats.org/drawingml/2006/main">
               <a:ext uri="{FF2B5EF4-FFF2-40B4-BE49-F238E27FC236}">
-                <a16:creationId xmlns:a16="http://schemas.microsoft.com/office/drawing/2014/main" id="{89A2CB34-8069-438C-92D8-CE4E1985AFCA}"/>
+                <a16:creationId xmlns:a16="http://schemas.microsoft.com/office/drawing/2014/main" id="{9F94654F-9DDE-40FF-A4F7-B23399A9A8D5}"/>
               </a:ext>
             </a:extLst>
           </p:cNvPr>
@@ -4508,7 +4609,7 @@
           <p:cNvPr id="24" name="">
             <a:extLst xmlns:a="http://schemas.openxmlformats.org/drawingml/2006/main">
               <a:ext uri="{FF2B5EF4-FFF2-40B4-BE49-F238E27FC236}">
-                <a16:creationId xmlns:a16="http://schemas.microsoft.com/office/drawing/2014/main" id="{B428004E-043B-4D99-B211-43C4C732E163}"/>
+                <a16:creationId xmlns:a16="http://schemas.microsoft.com/office/drawing/2014/main" id="{FAABE0E0-BCD2-4AC1-B552-F7D583DD6122}"/>
               </a:ext>
             </a:extLst>
           </p:cNvPr>
@@ -4562,7 +4663,7 @@
     </p:spTree>
     <p:extLst>
       <p:ext uri="{BB962C8B-B14F-4D97-AF65-F5344CB8AC3E}">
-        <p14:creationId xmlns:p14="http://schemas.microsoft.com/office/powerpoint/2010/main" val="1582086195"/>
+        <p14:creationId xmlns:p14="http://schemas.microsoft.com/office/powerpoint/2010/main" val="1226016918"/>
       </p:ext>
     </p:extLst>
   </p:cSld>
@@ -4593,7 +4694,7 @@
           <p:cNvPr id="22" name="">
             <a:extLst xmlns:a="http://schemas.openxmlformats.org/drawingml/2006/main">
               <a:ext uri="{FF2B5EF4-FFF2-40B4-BE49-F238E27FC236}">
-                <a16:creationId xmlns:a16="http://schemas.microsoft.com/office/drawing/2014/main" id="{DA2DFDCA-63CD-45C7-AB60-FFC38C4EEFA4}"/>
+                <a16:creationId xmlns:a16="http://schemas.microsoft.com/office/drawing/2014/main" id="{6752B15D-0C3A-43A5-80F3-DF7F7F885220}"/>
               </a:ext>
             </a:extLst>
           </p:cNvPr>
@@ -4649,7 +4750,7 @@
           <p:cNvPr id="2" name="">
             <a:extLst xmlns:a="http://schemas.openxmlformats.org/drawingml/2006/main">
               <a:ext uri="{FF2B5EF4-FFF2-40B4-BE49-F238E27FC236}">
-                <a16:creationId xmlns:a16="http://schemas.microsoft.com/office/drawing/2014/main" id="{F90F80F5-8E58-4BF9-8F96-E730D438B662}"/>
+                <a16:creationId xmlns:a16="http://schemas.microsoft.com/office/drawing/2014/main" id="{C73B220C-5668-4A1D-A5F7-FAD26E4AFDE0}"/>
               </a:ext>
             </a:extLst>
           </p:cNvPr>
@@ -4705,7 +4806,7 @@
           <p:cNvPr id="3" name="">
             <a:extLst xmlns:a="http://schemas.openxmlformats.org/drawingml/2006/main">
               <a:ext uri="{FF2B5EF4-FFF2-40B4-BE49-F238E27FC236}">
-                <a16:creationId xmlns:a16="http://schemas.microsoft.com/office/drawing/2014/main" id="{4D5EEE45-21C9-4705-A55D-8830623BC534}"/>
+                <a16:creationId xmlns:a16="http://schemas.microsoft.com/office/drawing/2014/main" id="{BB139B94-A46B-45AE-AB96-FD7EFC57BB21}"/>
               </a:ext>
             </a:extLst>
           </p:cNvPr>
@@ -4738,7 +4839,7 @@
           <p:cNvPr id="4" name="">
             <a:extLst xmlns:a="http://schemas.openxmlformats.org/drawingml/2006/main">
               <a:ext uri="{FF2B5EF4-FFF2-40B4-BE49-F238E27FC236}">
-                <a16:creationId xmlns:a16="http://schemas.microsoft.com/office/drawing/2014/main" id="{75A3F216-811B-414E-84C9-22409A318887}"/>
+                <a16:creationId xmlns:a16="http://schemas.microsoft.com/office/drawing/2014/main" id="{41191C4F-160B-4302-88CF-5994BDDEE49F}"/>
               </a:ext>
             </a:extLst>
           </p:cNvPr>
@@ -4794,7 +4895,7 @@
           <p:cNvPr id="5" name="">
             <a:extLst xmlns:a="http://schemas.openxmlformats.org/drawingml/2006/main">
               <a:ext uri="{FF2B5EF4-FFF2-40B4-BE49-F238E27FC236}">
-                <a16:creationId xmlns:a16="http://schemas.microsoft.com/office/drawing/2014/main" id="{71505D36-8113-4780-A539-845390F1332D}"/>
+                <a16:creationId xmlns:a16="http://schemas.microsoft.com/office/drawing/2014/main" id="{002E7C5C-C901-438E-93B1-D33807922752}"/>
               </a:ext>
             </a:extLst>
           </p:cNvPr>
@@ -4919,7 +5020,7 @@
           <p:cNvPr id="6" name="">
             <a:extLst xmlns:a="http://schemas.openxmlformats.org/drawingml/2006/main">
               <a:ext uri="{FF2B5EF4-FFF2-40B4-BE49-F238E27FC236}">
-                <a16:creationId xmlns:a16="http://schemas.microsoft.com/office/drawing/2014/main" id="{BBBAC342-6CF9-42E6-B387-1A33D66D448B}"/>
+                <a16:creationId xmlns:a16="http://schemas.microsoft.com/office/drawing/2014/main" id="{C9BB0956-B237-4A39-BB45-DDBBFD11EBFD}"/>
               </a:ext>
             </a:extLst>
           </p:cNvPr>
@@ -4952,7 +5053,7 @@
           <p:cNvPr id="7" name="">
             <a:extLst xmlns:a="http://schemas.openxmlformats.org/drawingml/2006/main">
               <a:ext uri="{FF2B5EF4-FFF2-40B4-BE49-F238E27FC236}">
-                <a16:creationId xmlns:a16="http://schemas.microsoft.com/office/drawing/2014/main" id="{9D2A189D-9DAA-4D4D-B254-857028AE9F96}"/>
+                <a16:creationId xmlns:a16="http://schemas.microsoft.com/office/drawing/2014/main" id="{BB15A55F-F8FC-487F-B8C0-7A561BE2FEFB}"/>
               </a:ext>
             </a:extLst>
           </p:cNvPr>
@@ -5008,7 +5109,7 @@
           <p:cNvPr id="8" name="">
             <a:extLst xmlns:a="http://schemas.openxmlformats.org/drawingml/2006/main">
               <a:ext uri="{FF2B5EF4-FFF2-40B4-BE49-F238E27FC236}">
-                <a16:creationId xmlns:a16="http://schemas.microsoft.com/office/drawing/2014/main" id="{80B3CBB7-072D-4FD1-A763-B96E54408C9D}"/>
+                <a16:creationId xmlns:a16="http://schemas.microsoft.com/office/drawing/2014/main" id="{C3F46467-9CD4-44B5-99B3-FD16CAF3342D}"/>
               </a:ext>
             </a:extLst>
           </p:cNvPr>
@@ -5133,7 +5234,7 @@
           <p:cNvPr id="9" name="">
             <a:extLst xmlns:a="http://schemas.openxmlformats.org/drawingml/2006/main">
               <a:ext uri="{FF2B5EF4-FFF2-40B4-BE49-F238E27FC236}">
-                <a16:creationId xmlns:a16="http://schemas.microsoft.com/office/drawing/2014/main" id="{1E1ABFD9-40EF-4869-B7B0-48F9515521C8}"/>
+                <a16:creationId xmlns:a16="http://schemas.microsoft.com/office/drawing/2014/main" id="{09A213F8-3A60-4B4C-A032-F5DBA401F5EE}"/>
               </a:ext>
             </a:extLst>
           </p:cNvPr>
@@ -5166,7 +5267,7 @@
           <p:cNvPr id="10" name="">
             <a:extLst xmlns:a="http://schemas.openxmlformats.org/drawingml/2006/main">
               <a:ext uri="{FF2B5EF4-FFF2-40B4-BE49-F238E27FC236}">
-                <a16:creationId xmlns:a16="http://schemas.microsoft.com/office/drawing/2014/main" id="{DE96E7AC-7BE4-428D-BF5C-521BA8C2ADAE}"/>
+                <a16:creationId xmlns:a16="http://schemas.microsoft.com/office/drawing/2014/main" id="{19728E0E-E508-498F-B47D-3198B45566AF}"/>
               </a:ext>
             </a:extLst>
           </p:cNvPr>
@@ -5222,7 +5323,7 @@
           <p:cNvPr id="11" name="">
             <a:extLst xmlns:a="http://schemas.openxmlformats.org/drawingml/2006/main">
               <a:ext uri="{FF2B5EF4-FFF2-40B4-BE49-F238E27FC236}">
-                <a16:creationId xmlns:a16="http://schemas.microsoft.com/office/drawing/2014/main" id="{FF38D8D5-256A-4F3A-B403-735A84D955DF}"/>
+                <a16:creationId xmlns:a16="http://schemas.microsoft.com/office/drawing/2014/main" id="{1B137F28-166B-4F8B-BBD1-05932056130A}"/>
               </a:ext>
             </a:extLst>
           </p:cNvPr>
@@ -5347,7 +5448,7 @@
           <p:cNvPr id="12" name="">
             <a:extLst xmlns:a="http://schemas.openxmlformats.org/drawingml/2006/main">
               <a:ext uri="{FF2B5EF4-FFF2-40B4-BE49-F238E27FC236}">
-                <a16:creationId xmlns:a16="http://schemas.microsoft.com/office/drawing/2014/main" id="{A135AEC0-8C90-4B6C-83E5-FF1F47A0492B}"/>
+                <a16:creationId xmlns:a16="http://schemas.microsoft.com/office/drawing/2014/main" id="{DA1A82B7-34EC-4CB2-A54F-B73D9F55CBCA}"/>
               </a:ext>
             </a:extLst>
           </p:cNvPr>
@@ -5380,7 +5481,7 @@
           <p:cNvPr id="13" name="">
             <a:extLst xmlns:a="http://schemas.openxmlformats.org/drawingml/2006/main">
               <a:ext uri="{FF2B5EF4-FFF2-40B4-BE49-F238E27FC236}">
-                <a16:creationId xmlns:a16="http://schemas.microsoft.com/office/drawing/2014/main" id="{54C5F8F0-5FB5-4B5E-AC65-3265C85C068D}"/>
+                <a16:creationId xmlns:a16="http://schemas.microsoft.com/office/drawing/2014/main" id="{D86B7AA6-F8BA-4F50-A4A2-F860F0668DCE}"/>
               </a:ext>
             </a:extLst>
           </p:cNvPr>
@@ -5436,7 +5537,7 @@
           <p:cNvPr id="14" name="">
             <a:extLst xmlns:a="http://schemas.openxmlformats.org/drawingml/2006/main">
               <a:ext uri="{FF2B5EF4-FFF2-40B4-BE49-F238E27FC236}">
-                <a16:creationId xmlns:a16="http://schemas.microsoft.com/office/drawing/2014/main" id="{F334A69C-091E-4C6C-AF18-BCF41CB91C39}"/>
+                <a16:creationId xmlns:a16="http://schemas.microsoft.com/office/drawing/2014/main" id="{9B488797-0FE5-498C-8F76-9D817549AF7E}"/>
               </a:ext>
             </a:extLst>
           </p:cNvPr>
@@ -5561,7 +5662,7 @@
           <p:cNvPr id="15" name="">
             <a:extLst xmlns:a="http://schemas.openxmlformats.org/drawingml/2006/main">
               <a:ext uri="{FF2B5EF4-FFF2-40B4-BE49-F238E27FC236}">
-                <a16:creationId xmlns:a16="http://schemas.microsoft.com/office/drawing/2014/main" id="{1C1C80EE-1813-40B6-B0FA-16E80B68D659}"/>
+                <a16:creationId xmlns:a16="http://schemas.microsoft.com/office/drawing/2014/main" id="{0DEDDADE-899B-45B7-9415-2D58E4313F75}"/>
               </a:ext>
             </a:extLst>
           </p:cNvPr>
@@ -5594,7 +5695,7 @@
           <p:cNvPr id="16" name="">
             <a:extLst xmlns:a="http://schemas.openxmlformats.org/drawingml/2006/main">
               <a:ext uri="{FF2B5EF4-FFF2-40B4-BE49-F238E27FC236}">
-                <a16:creationId xmlns:a16="http://schemas.microsoft.com/office/drawing/2014/main" id="{08BCC705-55AD-412F-9077-11DB0EE9BE72}"/>
+                <a16:creationId xmlns:a16="http://schemas.microsoft.com/office/drawing/2014/main" id="{E832D598-8A0C-4EC4-9731-F41613E267F5}"/>
               </a:ext>
             </a:extLst>
           </p:cNvPr>
@@ -5627,7 +5728,7 @@
           <p:cNvPr id="17" name="">
             <a:extLst xmlns:a="http://schemas.openxmlformats.org/drawingml/2006/main">
               <a:ext uri="{FF2B5EF4-FFF2-40B4-BE49-F238E27FC236}">
-                <a16:creationId xmlns:a16="http://schemas.microsoft.com/office/drawing/2014/main" id="{991660C7-5096-4BB1-B1F5-2B1CD11101CD}"/>
+                <a16:creationId xmlns:a16="http://schemas.microsoft.com/office/drawing/2014/main" id="{9BBA4B7E-BBDE-4AAE-B2F4-360A26CBDD59}"/>
               </a:ext>
             </a:extLst>
           </p:cNvPr>
@@ -5660,7 +5761,7 @@
           <p:cNvPr id="18" name="">
             <a:extLst xmlns:a="http://schemas.openxmlformats.org/drawingml/2006/main">
               <a:ext uri="{FF2B5EF4-FFF2-40B4-BE49-F238E27FC236}">
-                <a16:creationId xmlns:a16="http://schemas.microsoft.com/office/drawing/2014/main" id="{A9663411-BC23-4A0E-B990-BE1248303F20}"/>
+                <a16:creationId xmlns:a16="http://schemas.microsoft.com/office/drawing/2014/main" id="{978A393F-4EDD-4E3C-A5F1-8E4FF0A7BC6A}"/>
               </a:ext>
             </a:extLst>
           </p:cNvPr>
@@ -5693,7 +5794,7 @@
           <p:cNvPr id="19" name="">
             <a:extLst xmlns:a="http://schemas.openxmlformats.org/drawingml/2006/main">
               <a:ext uri="{FF2B5EF4-FFF2-40B4-BE49-F238E27FC236}">
-                <a16:creationId xmlns:a16="http://schemas.microsoft.com/office/drawing/2014/main" id="{58322E3B-F284-45D0-8DED-9F7B065C7CF3}"/>
+                <a16:creationId xmlns:a16="http://schemas.microsoft.com/office/drawing/2014/main" id="{90F642EA-617A-46ED-B1CA-D45D2E6780E0}"/>
               </a:ext>
             </a:extLst>
           </p:cNvPr>
@@ -5749,7 +5850,7 @@
           <p:cNvPr id="20" name="">
             <a:extLst xmlns:a="http://schemas.openxmlformats.org/drawingml/2006/main">
               <a:ext uri="{FF2B5EF4-FFF2-40B4-BE49-F238E27FC236}">
-                <a16:creationId xmlns:a16="http://schemas.microsoft.com/office/drawing/2014/main" id="{0570CD0A-781F-4382-862A-8D5A92BCF2AB}"/>
+                <a16:creationId xmlns:a16="http://schemas.microsoft.com/office/drawing/2014/main" id="{9CE18412-4390-4E8D-866A-6BCB9857B560}"/>
               </a:ext>
             </a:extLst>
           </p:cNvPr>
@@ -5782,7 +5883,7 @@
           <p:cNvPr id="21" name="">
             <a:extLst xmlns:a="http://schemas.openxmlformats.org/drawingml/2006/main">
               <a:ext uri="{FF2B5EF4-FFF2-40B4-BE49-F238E27FC236}">
-                <a16:creationId xmlns:a16="http://schemas.microsoft.com/office/drawing/2014/main" id="{8539D3E8-B7D4-4AF5-A913-3D2C7CD8B227}"/>
+                <a16:creationId xmlns:a16="http://schemas.microsoft.com/office/drawing/2014/main" id="{46F0A40D-9392-46CB-B458-B95E968EFFEB}"/>
               </a:ext>
             </a:extLst>
           </p:cNvPr>
@@ -5836,7 +5937,7 @@
     </p:spTree>
     <p:extLst>
       <p:ext uri="{BB962C8B-B14F-4D97-AF65-F5344CB8AC3E}">
-        <p14:creationId xmlns:p14="http://schemas.microsoft.com/office/powerpoint/2010/main" val="540760415"/>
+        <p14:creationId xmlns:p14="http://schemas.microsoft.com/office/powerpoint/2010/main" val="1045364498"/>
       </p:ext>
     </p:extLst>
   </p:cSld>
@@ -5864,10 +5965,10 @@
       </p:grpSpPr>
       <p:sp>
         <p:nvSpPr>
-          <p:cNvPr id="44" name="">
-            <a:extLst xmlns:a="http://schemas.openxmlformats.org/drawingml/2006/main">
-              <a:ext uri="{FF2B5EF4-FFF2-40B4-BE49-F238E27FC236}">
-                <a16:creationId xmlns:a16="http://schemas.microsoft.com/office/drawing/2014/main" id="{FDF302E9-1A95-4570-AE52-76E4D1ED3E25}"/>
+          <p:cNvPr id="15" name="">
+            <a:extLst xmlns:a="http://schemas.openxmlformats.org/drawingml/2006/main">
+              <a:ext uri="{FF2B5EF4-FFF2-40B4-BE49-F238E27FC236}">
+                <a16:creationId xmlns:a16="http://schemas.microsoft.com/office/drawing/2014/main" id="{FFF5272D-8D04-4D54-9449-3A3D61382E5F}"/>
               </a:ext>
             </a:extLst>
           </p:cNvPr>
@@ -5913,7 +6014,7 @@
                 <a:ea typeface="Helvetica Neue"/>
                 <a:cs typeface="Helvetica Neue"/>
               </a:rPr>
-              <a:t>In CI, Ansible becomes the promotion contract</a:t>
+              <a:t>The deployment console makes Ansible delivery visible</a:t>
             </a:r>
           </a:p>
         </p:txBody>
@@ -5923,7 +6024,7 @@
           <p:cNvPr id="2" name="">
             <a:extLst xmlns:a="http://schemas.openxmlformats.org/drawingml/2006/main">
               <a:ext uri="{FF2B5EF4-FFF2-40B4-BE49-F238E27FC236}">
-                <a16:creationId xmlns:a16="http://schemas.microsoft.com/office/drawing/2014/main" id="{9EB0EED5-C4F2-4990-8331-18815FFF4A14}"/>
+                <a16:creationId xmlns:a16="http://schemas.microsoft.com/office/drawing/2014/main" id="{DF70E529-74DD-4C1C-9145-10FC4A65DF05}"/>
               </a:ext>
             </a:extLst>
           </p:cNvPr>
@@ -5935,7 +6036,7 @@
         <p:spPr>
           <a:xfrm xmlns:a="http://schemas.openxmlformats.org/drawingml/2006/main">
             <a:off x="390525" y="1162050"/>
-            <a:ext cx="9334500" cy="438150"/>
+            <a:ext cx="8763000" cy="438150"/>
           </a:xfrm>
           <a:prstGeom xmlns:a="http://schemas.openxmlformats.org/drawingml/2006/main" prst="rect">
             <a:avLst/>
@@ -5969,7 +6070,7 @@
                 <a:ea typeface="Helvetica Neue"/>
                 <a:cs typeface="Helvetica Neue"/>
               </a:rPr>
-              <a:t>AIDL improves the work entering the pipeline; Ansible standardizes what the pipeline actually does.</a:t>
+              <a:t>Teams can choose the bastion and environment, trigger the playbook, and watch stages and logs in one place.</a:t>
             </a:r>
           </a:p>
         </p:txBody>
@@ -5979,19 +6080,74 @@
           <p:cNvPr id="3" name="">
             <a:extLst xmlns:a="http://schemas.openxmlformats.org/drawingml/2006/main">
               <a:ext uri="{FF2B5EF4-FFF2-40B4-BE49-F238E27FC236}">
-                <a16:creationId xmlns:a16="http://schemas.microsoft.com/office/drawing/2014/main" id="{B3676B9B-0133-4301-B0E5-882B76FD0E67}"/>
-              </a:ext>
-            </a:extLst>
-          </p:cNvPr>
-          <p:cNvSpPr>
-            <a:spLocks xmlns:a="http://schemas.openxmlformats.org/drawingml/2006/main" noGrp="1"/>
-          </p:cNvSpPr>
-          <p:nvPr/>
-        </p:nvSpPr>
-        <p:spPr>
-          <a:xfrm xmlns:a="http://schemas.openxmlformats.org/drawingml/2006/main">
-            <a:off x="514350" y="1885950"/>
-            <a:ext cx="1809750" cy="742950"/>
+                <a16:creationId xmlns:a16="http://schemas.microsoft.com/office/drawing/2014/main" id="{CD83EA6D-EB3C-4EE1-B248-F7368245855F}"/>
+              </a:ext>
+            </a:extLst>
+          </p:cNvPr>
+          <p:cNvSpPr>
+            <a:spLocks xmlns:a="http://schemas.openxmlformats.org/drawingml/2006/main" noGrp="1"/>
+          </p:cNvSpPr>
+          <p:nvPr/>
+        </p:nvSpPr>
+        <p:spPr>
+          <a:xfrm xmlns:a="http://schemas.openxmlformats.org/drawingml/2006/main">
+            <a:off x="476250" y="1828800"/>
+            <a:ext cx="7239000" cy="5029200"/>
+          </a:xfrm>
+          <a:prstGeom xmlns:a="http://schemas.openxmlformats.org/drawingml/2006/main" prst="rect">
+            <a:avLst/>
+          </a:prstGeom>
+          <a:solidFill xmlns:a="http://schemas.openxmlformats.org/drawingml/2006/main">
+            <a:srgbClr val="F6F7F9"/>
+          </a:solidFill>
+          <a:ln xmlns:a="http://schemas.openxmlformats.org/drawingml/2006/main" w="9525">
+            <a:solidFill>
+              <a:srgbClr val="B8BCC4"/>
+            </a:solidFill>
+            <a:prstDash val="solid"/>
+          </a:ln>
+        </p:spPr>
+      </p:sp>
+      <p:pic>
+        <p:nvPicPr>
+          <p:cNvPr id="18" name=""/>
+          <p:cNvPicPr>
+            <a:picLocks xmlns:a="http://schemas.openxmlformats.org/drawingml/2006/main" noChangeAspect="1"/>
+          </p:cNvPicPr>
+          <p:nvPr/>
+        </p:nvPicPr>
+        <p:blipFill>
+          <a:blip xmlns:r="http://schemas.openxmlformats.org/officeDocument/2006/relationships" xmlns:a="http://schemas.openxmlformats.org/drawingml/2006/main" r:embed="Ra4ba6d71254b40db"/>
+          <a:stretch xmlns:a="http://schemas.openxmlformats.org/drawingml/2006/main"/>
+        </p:blipFill>
+        <p:spPr>
+          <a:xfrm xmlns:a="http://schemas.openxmlformats.org/drawingml/2006/main">
+            <a:off x="584454" y="1905000"/>
+            <a:ext cx="7022592" cy="4876800"/>
+          </a:xfrm>
+          <a:prstGeom xmlns:a="http://schemas.openxmlformats.org/drawingml/2006/main" prst="rect">
+            <a:avLst/>
+          </a:prstGeom>
+        </p:spPr>
+      </p:pic>
+      <p:sp>
+        <p:nvSpPr>
+          <p:cNvPr id="5" name="">
+            <a:extLst xmlns:a="http://schemas.openxmlformats.org/drawingml/2006/main">
+              <a:ext uri="{FF2B5EF4-FFF2-40B4-BE49-F238E27FC236}">
+                <a16:creationId xmlns:a16="http://schemas.microsoft.com/office/drawing/2014/main" id="{9B3CEE18-C369-4BD2-BAA2-6DCA3D8694EF}"/>
+              </a:ext>
+            </a:extLst>
+          </p:cNvPr>
+          <p:cNvSpPr>
+            <a:spLocks xmlns:a="http://schemas.openxmlformats.org/drawingml/2006/main" noGrp="1"/>
+          </p:cNvSpPr>
+          <p:nvPr/>
+        </p:nvSpPr>
+        <p:spPr>
+          <a:xfrm xmlns:a="http://schemas.openxmlformats.org/drawingml/2006/main">
+            <a:off x="8096250" y="1828800"/>
+            <a:ext cx="3219450" cy="3581400"/>
           </a:xfrm>
           <a:prstGeom xmlns:a="http://schemas.openxmlformats.org/drawingml/2006/main" prst="rect">
             <a:avLst/>
@@ -6009,22 +6165,22 @@
       </p:sp>
       <p:sp>
         <p:nvSpPr>
-          <p:cNvPr id="4" name="">
-            <a:extLst xmlns:a="http://schemas.openxmlformats.org/drawingml/2006/main">
-              <a:ext uri="{FF2B5EF4-FFF2-40B4-BE49-F238E27FC236}">
-                <a16:creationId xmlns:a16="http://schemas.microsoft.com/office/drawing/2014/main" id="{1848D19E-2745-4E6B-9212-A5EF55515B65}"/>
-              </a:ext>
-            </a:extLst>
-          </p:cNvPr>
-          <p:cNvSpPr>
-            <a:spLocks xmlns:a="http://schemas.openxmlformats.org/drawingml/2006/main" noGrp="1"/>
-          </p:cNvSpPr>
-          <p:nvPr/>
-        </p:nvSpPr>
-        <p:spPr>
-          <a:xfrm xmlns:a="http://schemas.openxmlformats.org/drawingml/2006/main">
-            <a:off x="647700" y="2019300"/>
-            <a:ext cx="1543050" cy="457200"/>
+          <p:cNvPr id="6" name="">
+            <a:extLst xmlns:a="http://schemas.openxmlformats.org/drawingml/2006/main">
+              <a:ext uri="{FF2B5EF4-FFF2-40B4-BE49-F238E27FC236}">
+                <a16:creationId xmlns:a16="http://schemas.microsoft.com/office/drawing/2014/main" id="{07BAED82-A710-4C69-835E-AD9048F18548}"/>
+              </a:ext>
+            </a:extLst>
+          </p:cNvPr>
+          <p:cNvSpPr>
+            <a:spLocks xmlns:a="http://schemas.openxmlformats.org/drawingml/2006/main" noGrp="1"/>
+          </p:cNvSpPr>
+          <p:nvPr/>
+        </p:nvSpPr>
+        <p:spPr>
+          <a:xfrm xmlns:a="http://schemas.openxmlformats.org/drawingml/2006/main">
+            <a:off x="8362950" y="2114550"/>
+            <a:ext cx="2667000" cy="323850"/>
           </a:xfrm>
           <a:prstGeom xmlns:a="http://schemas.openxmlformats.org/drawingml/2006/main" prst="rect">
             <a:avLst/>
@@ -6040,57 +6196,57 @@
           <a:lstStyle xmlns:a="http://schemas.openxmlformats.org/drawingml/2006/main"/>
           <a:p xmlns:a="http://schemas.openxmlformats.org/drawingml/2006/main">
             <a:pPr>
-              <a:defRPr sz="1350" b="1">
-                <a:solidFill>
-                  <a:srgbClr val="000000"/>
-                </a:solidFill>
-                <a:latin typeface="Helvetica Neue"/>
-                <a:ea typeface="Helvetica Neue"/>
-                <a:cs typeface="Helvetica Neue"/>
-              </a:defRPr>
-            </a:pPr>
-            <a:r>
-              <a:rPr sz="1350" b="1">
-                <a:solidFill>
-                  <a:srgbClr val="000000"/>
-                </a:solidFill>
-                <a:latin typeface="Helvetica Neue"/>
-                <a:ea typeface="Helvetica Neue"/>
-                <a:cs typeface="Helvetica Neue"/>
-              </a:rPr>
-              <a:t>CI moment</a:t>
-            </a:r>
-          </a:p>
-        </p:txBody>
-      </p:sp>
-      <p:sp>
-        <p:nvSpPr>
-          <p:cNvPr id="5" name="">
-            <a:extLst xmlns:a="http://schemas.openxmlformats.org/drawingml/2006/main">
-              <a:ext uri="{FF2B5EF4-FFF2-40B4-BE49-F238E27FC236}">
-                <a16:creationId xmlns:a16="http://schemas.microsoft.com/office/drawing/2014/main" id="{DD3D447A-DDCA-42E5-9FDC-C95A672CD86C}"/>
-              </a:ext>
-            </a:extLst>
-          </p:cNvPr>
-          <p:cNvSpPr>
-            <a:spLocks xmlns:a="http://schemas.openxmlformats.org/drawingml/2006/main" noGrp="1"/>
-          </p:cNvSpPr>
-          <p:nvPr/>
-        </p:nvSpPr>
-        <p:spPr>
-          <a:xfrm xmlns:a="http://schemas.openxmlformats.org/drawingml/2006/main">
-            <a:off x="2324100" y="1885950"/>
-            <a:ext cx="3238500" cy="742950"/>
-          </a:xfrm>
-          <a:prstGeom xmlns:a="http://schemas.openxmlformats.org/drawingml/2006/main" prst="rect">
+              <a:defRPr sz="2100" b="1">
+                <a:solidFill>
+                  <a:srgbClr val="000000"/>
+                </a:solidFill>
+                <a:latin typeface="Helvetica Neue"/>
+                <a:ea typeface="Helvetica Neue"/>
+                <a:cs typeface="Helvetica Neue"/>
+              </a:defRPr>
+            </a:pPr>
+            <a:r>
+              <a:rPr sz="2100" b="1">
+                <a:solidFill>
+                  <a:srgbClr val="000000"/>
+                </a:solidFill>
+                <a:latin typeface="Helvetica Neue"/>
+                <a:ea typeface="Helvetica Neue"/>
+                <a:cs typeface="Helvetica Neue"/>
+              </a:rPr>
+              <a:t>What the UI adds</a:t>
+            </a:r>
+          </a:p>
+        </p:txBody>
+      </p:sp>
+      <p:sp>
+        <p:nvSpPr>
+          <p:cNvPr id="7" name="">
+            <a:extLst xmlns:a="http://schemas.openxmlformats.org/drawingml/2006/main">
+              <a:ext uri="{FF2B5EF4-FFF2-40B4-BE49-F238E27FC236}">
+                <a16:creationId xmlns:a16="http://schemas.microsoft.com/office/drawing/2014/main" id="{C5F88FA1-EB63-4328-9729-96BA5CCCD31B}"/>
+              </a:ext>
+            </a:extLst>
+          </p:cNvPr>
+          <p:cNvSpPr>
+            <a:spLocks xmlns:a="http://schemas.openxmlformats.org/drawingml/2006/main" noGrp="1"/>
+          </p:cNvSpPr>
+          <p:nvPr/>
+        </p:nvSpPr>
+        <p:spPr>
+          <a:xfrm xmlns:a="http://schemas.openxmlformats.org/drawingml/2006/main">
+            <a:off x="8382000" y="2790825"/>
+            <a:ext cx="95250" cy="95250"/>
+          </a:xfrm>
+          <a:prstGeom xmlns:a="http://schemas.openxmlformats.org/drawingml/2006/main" prst="ellipse">
             <a:avLst/>
           </a:prstGeom>
           <a:solidFill xmlns:a="http://schemas.openxmlformats.org/drawingml/2006/main">
-            <a:srgbClr val="EAF5FB"/>
+            <a:srgbClr val="3D8DFF"/>
           </a:solidFill>
-          <a:ln xmlns:a="http://schemas.openxmlformats.org/drawingml/2006/main" w="9525">
+          <a:ln xmlns:a="http://schemas.openxmlformats.org/drawingml/2006/main" w="0">
             <a:solidFill>
-              <a:srgbClr val="B8BCC4"/>
+              <a:srgbClr val="3D8DFF"/>
             </a:solidFill>
             <a:prstDash val="solid"/>
           </a:ln>
@@ -6098,22 +6254,22 @@
       </p:sp>
       <p:sp>
         <p:nvSpPr>
-          <p:cNvPr id="6" name="">
-            <a:extLst xmlns:a="http://schemas.openxmlformats.org/drawingml/2006/main">
-              <a:ext uri="{FF2B5EF4-FFF2-40B4-BE49-F238E27FC236}">
-                <a16:creationId xmlns:a16="http://schemas.microsoft.com/office/drawing/2014/main" id="{2963C0ED-7AF3-4DCB-A00C-50CB7748835C}"/>
-              </a:ext>
-            </a:extLst>
-          </p:cNvPr>
-          <p:cNvSpPr>
-            <a:spLocks xmlns:a="http://schemas.openxmlformats.org/drawingml/2006/main" noGrp="1"/>
-          </p:cNvSpPr>
-          <p:nvPr/>
-        </p:nvSpPr>
-        <p:spPr>
-          <a:xfrm xmlns:a="http://schemas.openxmlformats.org/drawingml/2006/main">
-            <a:off x="2457450" y="2019300"/>
-            <a:ext cx="2971800" cy="457200"/>
+          <p:cNvPr id="8" name="">
+            <a:extLst xmlns:a="http://schemas.openxmlformats.org/drawingml/2006/main">
+              <a:ext uri="{FF2B5EF4-FFF2-40B4-BE49-F238E27FC236}">
+                <a16:creationId xmlns:a16="http://schemas.microsoft.com/office/drawing/2014/main" id="{4CB817B6-4533-4E70-8656-BD1871C10CB9}"/>
+              </a:ext>
+            </a:extLst>
+          </p:cNvPr>
+          <p:cNvSpPr>
+            <a:spLocks xmlns:a="http://schemas.openxmlformats.org/drawingml/2006/main" noGrp="1"/>
+          </p:cNvSpPr>
+          <p:nvPr/>
+        </p:nvSpPr>
+        <p:spPr>
+          <a:xfrm xmlns:a="http://schemas.openxmlformats.org/drawingml/2006/main">
+            <a:off x="8629650" y="2724150"/>
+            <a:ext cx="2362200" cy="685800"/>
           </a:xfrm>
           <a:prstGeom xmlns:a="http://schemas.openxmlformats.org/drawingml/2006/main" prst="rect">
             <a:avLst/>
@@ -6129,57 +6285,57 @@
           <a:lstStyle xmlns:a="http://schemas.openxmlformats.org/drawingml/2006/main"/>
           <a:p xmlns:a="http://schemas.openxmlformats.org/drawingml/2006/main">
             <a:pPr>
-              <a:defRPr sz="1200" b="0">
-                <a:solidFill>
-                  <a:srgbClr val="4B5563"/>
-                </a:solidFill>
-                <a:latin typeface="Helvetica Neue"/>
-                <a:ea typeface="Helvetica Neue"/>
-                <a:cs typeface="Helvetica Neue"/>
-              </a:defRPr>
-            </a:pPr>
-            <a:r>
-              <a:rPr sz="1200" b="0">
-                <a:solidFill>
-                  <a:srgbClr val="4B5563"/>
-                </a:solidFill>
-                <a:latin typeface="Helvetica Neue"/>
-                <a:ea typeface="Helvetica Neue"/>
-                <a:cs typeface="Helvetica Neue"/>
-              </a:rPr>
-              <a:t>AIDL contribution</a:t>
-            </a:r>
-          </a:p>
-        </p:txBody>
-      </p:sp>
-      <p:sp>
-        <p:nvSpPr>
-          <p:cNvPr id="7" name="">
-            <a:extLst xmlns:a="http://schemas.openxmlformats.org/drawingml/2006/main">
-              <a:ext uri="{FF2B5EF4-FFF2-40B4-BE49-F238E27FC236}">
-                <a16:creationId xmlns:a16="http://schemas.microsoft.com/office/drawing/2014/main" id="{FF1C16D3-96B3-40D6-81D9-9B1EAC4FC5CD}"/>
-              </a:ext>
-            </a:extLst>
-          </p:cNvPr>
-          <p:cNvSpPr>
-            <a:spLocks xmlns:a="http://schemas.openxmlformats.org/drawingml/2006/main" noGrp="1"/>
-          </p:cNvSpPr>
-          <p:nvPr/>
-        </p:nvSpPr>
-        <p:spPr>
-          <a:xfrm xmlns:a="http://schemas.openxmlformats.org/drawingml/2006/main">
-            <a:off x="5562600" y="1885950"/>
-            <a:ext cx="3429000" cy="742950"/>
-          </a:xfrm>
-          <a:prstGeom xmlns:a="http://schemas.openxmlformats.org/drawingml/2006/main" prst="rect">
+              <a:defRPr sz="1575">
+                <a:solidFill>
+                  <a:srgbClr val="000000"/>
+                </a:solidFill>
+                <a:latin typeface="Helvetica Neue"/>
+                <a:ea typeface="Helvetica Neue"/>
+                <a:cs typeface="Helvetica Neue"/>
+              </a:defRPr>
+            </a:pPr>
+            <a:r>
+              <a:rPr sz="1575">
+                <a:solidFill>
+                  <a:srgbClr val="000000"/>
+                </a:solidFill>
+                <a:latin typeface="Helvetica Neue"/>
+                <a:ea typeface="Helvetica Neue"/>
+                <a:cs typeface="Helvetica Neue"/>
+              </a:rPr>
+              <a:t>Bastion dropdown for local, dev, or staging control points.</a:t>
+            </a:r>
+          </a:p>
+        </p:txBody>
+      </p:sp>
+      <p:sp>
+        <p:nvSpPr>
+          <p:cNvPr id="9" name="">
+            <a:extLst xmlns:a="http://schemas.openxmlformats.org/drawingml/2006/main">
+              <a:ext uri="{FF2B5EF4-FFF2-40B4-BE49-F238E27FC236}">
+                <a16:creationId xmlns:a16="http://schemas.microsoft.com/office/drawing/2014/main" id="{680429CE-1A90-45B9-BE65-78608AB861EA}"/>
+              </a:ext>
+            </a:extLst>
+          </p:cNvPr>
+          <p:cNvSpPr>
+            <a:spLocks xmlns:a="http://schemas.openxmlformats.org/drawingml/2006/main" noGrp="1"/>
+          </p:cNvSpPr>
+          <p:nvPr/>
+        </p:nvSpPr>
+        <p:spPr>
+          <a:xfrm xmlns:a="http://schemas.openxmlformats.org/drawingml/2006/main">
+            <a:off x="8382000" y="3571875"/>
+            <a:ext cx="95250" cy="95250"/>
+          </a:xfrm>
+          <a:prstGeom xmlns:a="http://schemas.openxmlformats.org/drawingml/2006/main" prst="ellipse">
             <a:avLst/>
           </a:prstGeom>
           <a:solidFill xmlns:a="http://schemas.openxmlformats.org/drawingml/2006/main">
-            <a:srgbClr val="EAF5FB"/>
+            <a:srgbClr val="3D8DFF"/>
           </a:solidFill>
-          <a:ln xmlns:a="http://schemas.openxmlformats.org/drawingml/2006/main" w="9525">
+          <a:ln xmlns:a="http://schemas.openxmlformats.org/drawingml/2006/main" w="0">
             <a:solidFill>
-              <a:srgbClr val="B8BCC4"/>
+              <a:srgbClr val="3D8DFF"/>
             </a:solidFill>
             <a:prstDash val="solid"/>
           </a:ln>
@@ -6187,22 +6343,22 @@
       </p:sp>
       <p:sp>
         <p:nvSpPr>
-          <p:cNvPr id="8" name="">
-            <a:extLst xmlns:a="http://schemas.openxmlformats.org/drawingml/2006/main">
-              <a:ext uri="{FF2B5EF4-FFF2-40B4-BE49-F238E27FC236}">
-                <a16:creationId xmlns:a16="http://schemas.microsoft.com/office/drawing/2014/main" id="{C24725FF-D4FF-4182-9B06-9A34362D49D7}"/>
-              </a:ext>
-            </a:extLst>
-          </p:cNvPr>
-          <p:cNvSpPr>
-            <a:spLocks xmlns:a="http://schemas.openxmlformats.org/drawingml/2006/main" noGrp="1"/>
-          </p:cNvSpPr>
-          <p:nvPr/>
-        </p:nvSpPr>
-        <p:spPr>
-          <a:xfrm xmlns:a="http://schemas.openxmlformats.org/drawingml/2006/main">
-            <a:off x="5695950" y="2019300"/>
-            <a:ext cx="3162300" cy="457200"/>
+          <p:cNvPr id="10" name="">
+            <a:extLst xmlns:a="http://schemas.openxmlformats.org/drawingml/2006/main">
+              <a:ext uri="{FF2B5EF4-FFF2-40B4-BE49-F238E27FC236}">
+                <a16:creationId xmlns:a16="http://schemas.microsoft.com/office/drawing/2014/main" id="{BD6D7D97-F9C7-40DB-9713-ABCE82E7E88C}"/>
+              </a:ext>
+            </a:extLst>
+          </p:cNvPr>
+          <p:cNvSpPr>
+            <a:spLocks xmlns:a="http://schemas.openxmlformats.org/drawingml/2006/main" noGrp="1"/>
+          </p:cNvSpPr>
+          <p:nvPr/>
+        </p:nvSpPr>
+        <p:spPr>
+          <a:xfrm xmlns:a="http://schemas.openxmlformats.org/drawingml/2006/main">
+            <a:off x="8629650" y="3505200"/>
+            <a:ext cx="2362200" cy="685800"/>
           </a:xfrm>
           <a:prstGeom xmlns:a="http://schemas.openxmlformats.org/drawingml/2006/main" prst="rect">
             <a:avLst/>
@@ -6218,57 +6374,57 @@
           <a:lstStyle xmlns:a="http://schemas.openxmlformats.org/drawingml/2006/main"/>
           <a:p xmlns:a="http://schemas.openxmlformats.org/drawingml/2006/main">
             <a:pPr>
-              <a:defRPr sz="1200" b="0">
-                <a:solidFill>
-                  <a:srgbClr val="4B5563"/>
-                </a:solidFill>
-                <a:latin typeface="Helvetica Neue"/>
-                <a:ea typeface="Helvetica Neue"/>
-                <a:cs typeface="Helvetica Neue"/>
-              </a:defRPr>
-            </a:pPr>
-            <a:r>
-              <a:rPr sz="1200" b="0">
-                <a:solidFill>
-                  <a:srgbClr val="4B5563"/>
-                </a:solidFill>
-                <a:latin typeface="Helvetica Neue"/>
-                <a:ea typeface="Helvetica Neue"/>
-                <a:cs typeface="Helvetica Neue"/>
-              </a:rPr>
-              <a:t>Ansible control</a:t>
-            </a:r>
-          </a:p>
-        </p:txBody>
-      </p:sp>
-      <p:sp>
-        <p:nvSpPr>
-          <p:cNvPr id="9" name="">
-            <a:extLst xmlns:a="http://schemas.openxmlformats.org/drawingml/2006/main">
-              <a:ext uri="{FF2B5EF4-FFF2-40B4-BE49-F238E27FC236}">
-                <a16:creationId xmlns:a16="http://schemas.microsoft.com/office/drawing/2014/main" id="{D661F4A5-B67B-4C55-B45F-557795F6F218}"/>
-              </a:ext>
-            </a:extLst>
-          </p:cNvPr>
-          <p:cNvSpPr>
-            <a:spLocks xmlns:a="http://schemas.openxmlformats.org/drawingml/2006/main" noGrp="1"/>
-          </p:cNvSpPr>
-          <p:nvPr/>
-        </p:nvSpPr>
-        <p:spPr>
-          <a:xfrm xmlns:a="http://schemas.openxmlformats.org/drawingml/2006/main">
-            <a:off x="8991600" y="1885950"/>
-            <a:ext cx="2381250" cy="742950"/>
-          </a:xfrm>
-          <a:prstGeom xmlns:a="http://schemas.openxmlformats.org/drawingml/2006/main" prst="rect">
+              <a:defRPr sz="1575">
+                <a:solidFill>
+                  <a:srgbClr val="000000"/>
+                </a:solidFill>
+                <a:latin typeface="Helvetica Neue"/>
+                <a:ea typeface="Helvetica Neue"/>
+                <a:cs typeface="Helvetica Neue"/>
+              </a:defRPr>
+            </a:pPr>
+            <a:r>
+              <a:rPr sz="1575">
+                <a:solidFill>
+                  <a:srgbClr val="000000"/>
+                </a:solidFill>
+                <a:latin typeface="Helvetica Neue"/>
+                <a:ea typeface="Helvetica Neue"/>
+                <a:cs typeface="Helvetica Neue"/>
+              </a:rPr>
+              <a:t>Environment files become selectable release inputs.</a:t>
+            </a:r>
+          </a:p>
+        </p:txBody>
+      </p:sp>
+      <p:sp>
+        <p:nvSpPr>
+          <p:cNvPr id="11" name="">
+            <a:extLst xmlns:a="http://schemas.openxmlformats.org/drawingml/2006/main">
+              <a:ext uri="{FF2B5EF4-FFF2-40B4-BE49-F238E27FC236}">
+                <a16:creationId xmlns:a16="http://schemas.microsoft.com/office/drawing/2014/main" id="{7D179B3C-10BD-4D28-9B0B-DBE07F03CA9A}"/>
+              </a:ext>
+            </a:extLst>
+          </p:cNvPr>
+          <p:cNvSpPr>
+            <a:spLocks xmlns:a="http://schemas.openxmlformats.org/drawingml/2006/main" noGrp="1"/>
+          </p:cNvSpPr>
+          <p:nvPr/>
+        </p:nvSpPr>
+        <p:spPr>
+          <a:xfrm xmlns:a="http://schemas.openxmlformats.org/drawingml/2006/main">
+            <a:off x="8382000" y="4352925"/>
+            <a:ext cx="95250" cy="95250"/>
+          </a:xfrm>
+          <a:prstGeom xmlns:a="http://schemas.openxmlformats.org/drawingml/2006/main" prst="ellipse">
             <a:avLst/>
           </a:prstGeom>
           <a:solidFill xmlns:a="http://schemas.openxmlformats.org/drawingml/2006/main">
-            <a:srgbClr val="EAF5FB"/>
+            <a:srgbClr val="3D8DFF"/>
           </a:solidFill>
-          <a:ln xmlns:a="http://schemas.openxmlformats.org/drawingml/2006/main" w="9525">
+          <a:ln xmlns:a="http://schemas.openxmlformats.org/drawingml/2006/main" w="0">
             <a:solidFill>
-              <a:srgbClr val="B8BCC4"/>
+              <a:srgbClr val="3D8DFF"/>
             </a:solidFill>
             <a:prstDash val="solid"/>
           </a:ln>
@@ -6276,22 +6432,22 @@
       </p:sp>
       <p:sp>
         <p:nvSpPr>
-          <p:cNvPr id="10" name="">
-            <a:extLst xmlns:a="http://schemas.openxmlformats.org/drawingml/2006/main">
-              <a:ext uri="{FF2B5EF4-FFF2-40B4-BE49-F238E27FC236}">
-                <a16:creationId xmlns:a16="http://schemas.microsoft.com/office/drawing/2014/main" id="{2B88DC70-7B2E-4C5F-83FD-58755AA0C169}"/>
-              </a:ext>
-            </a:extLst>
-          </p:cNvPr>
-          <p:cNvSpPr>
-            <a:spLocks xmlns:a="http://schemas.openxmlformats.org/drawingml/2006/main" noGrp="1"/>
-          </p:cNvSpPr>
-          <p:nvPr/>
-        </p:nvSpPr>
-        <p:spPr>
-          <a:xfrm xmlns:a="http://schemas.openxmlformats.org/drawingml/2006/main">
-            <a:off x="9124950" y="2019300"/>
-            <a:ext cx="2114550" cy="457200"/>
+          <p:cNvPr id="12" name="">
+            <a:extLst xmlns:a="http://schemas.openxmlformats.org/drawingml/2006/main">
+              <a:ext uri="{FF2B5EF4-FFF2-40B4-BE49-F238E27FC236}">
+                <a16:creationId xmlns:a16="http://schemas.microsoft.com/office/drawing/2014/main" id="{E97F941E-71A7-4B4F-AD2D-1EFE901C138A}"/>
+              </a:ext>
+            </a:extLst>
+          </p:cNvPr>
+          <p:cNvSpPr>
+            <a:spLocks xmlns:a="http://schemas.openxmlformats.org/drawingml/2006/main" noGrp="1"/>
+          </p:cNvSpPr>
+          <p:nvPr/>
+        </p:nvSpPr>
+        <p:spPr>
+          <a:xfrm xmlns:a="http://schemas.openxmlformats.org/drawingml/2006/main">
+            <a:off x="8629650" y="4286250"/>
+            <a:ext cx="2362200" cy="685800"/>
           </a:xfrm>
           <a:prstGeom xmlns:a="http://schemas.openxmlformats.org/drawingml/2006/main" prst="rect">
             <a:avLst/>
@@ -6307,80 +6463,47 @@
           <a:lstStyle xmlns:a="http://schemas.openxmlformats.org/drawingml/2006/main"/>
           <a:p xmlns:a="http://schemas.openxmlformats.org/drawingml/2006/main">
             <a:pPr>
-              <a:defRPr sz="1200" b="0">
-                <a:solidFill>
-                  <a:srgbClr val="4B5563"/>
-                </a:solidFill>
-                <a:latin typeface="Helvetica Neue"/>
-                <a:ea typeface="Helvetica Neue"/>
-                <a:cs typeface="Helvetica Neue"/>
-              </a:defRPr>
-            </a:pPr>
-            <a:r>
-              <a:rPr sz="1200" b="0">
-                <a:solidFill>
-                  <a:srgbClr val="4B5563"/>
-                </a:solidFill>
-                <a:latin typeface="Helvetica Neue"/>
-                <a:ea typeface="Helvetica Neue"/>
-                <a:cs typeface="Helvetica Neue"/>
-              </a:rPr>
-              <a:t>Delivery outcome</a:t>
-            </a:r>
-          </a:p>
-        </p:txBody>
-      </p:sp>
-      <p:sp>
-        <p:nvSpPr>
-          <p:cNvPr id="11" name="">
-            <a:extLst xmlns:a="http://schemas.openxmlformats.org/drawingml/2006/main">
-              <a:ext uri="{FF2B5EF4-FFF2-40B4-BE49-F238E27FC236}">
-                <a16:creationId xmlns:a16="http://schemas.microsoft.com/office/drawing/2014/main" id="{994A526C-0EF5-4E01-953C-4EB74B2A49A4}"/>
-              </a:ext>
-            </a:extLst>
-          </p:cNvPr>
-          <p:cNvSpPr>
-            <a:spLocks xmlns:a="http://schemas.openxmlformats.org/drawingml/2006/main" noGrp="1"/>
-          </p:cNvSpPr>
-          <p:nvPr/>
-        </p:nvSpPr>
-        <p:spPr>
-          <a:xfrm xmlns:a="http://schemas.openxmlformats.org/drawingml/2006/main">
-            <a:off x="514350" y="2628900"/>
-            <a:ext cx="1809750" cy="742950"/>
-          </a:xfrm>
-          <a:prstGeom xmlns:a="http://schemas.openxmlformats.org/drawingml/2006/main" prst="rect">
-            <a:avLst/>
-          </a:prstGeom>
-          <a:solidFill xmlns:a="http://schemas.openxmlformats.org/drawingml/2006/main">
-            <a:srgbClr val="FFFFFF"/>
-          </a:solidFill>
-          <a:ln xmlns:a="http://schemas.openxmlformats.org/drawingml/2006/main" w="9525">
-            <a:solidFill>
-              <a:srgbClr val="B8BCC4"/>
-            </a:solidFill>
-            <a:prstDash val="solid"/>
-          </a:ln>
-        </p:spPr>
-      </p:sp>
-      <p:sp>
-        <p:nvSpPr>
-          <p:cNvPr id="12" name="">
-            <a:extLst xmlns:a="http://schemas.openxmlformats.org/drawingml/2006/main">
-              <a:ext uri="{FF2B5EF4-FFF2-40B4-BE49-F238E27FC236}">
-                <a16:creationId xmlns:a16="http://schemas.microsoft.com/office/drawing/2014/main" id="{30A31C9E-3A5F-4966-9AA5-764840AB95F1}"/>
-              </a:ext>
-            </a:extLst>
-          </p:cNvPr>
-          <p:cNvSpPr>
-            <a:spLocks xmlns:a="http://schemas.openxmlformats.org/drawingml/2006/main" noGrp="1"/>
-          </p:cNvSpPr>
-          <p:nvPr/>
-        </p:nvSpPr>
-        <p:spPr>
-          <a:xfrm xmlns:a="http://schemas.openxmlformats.org/drawingml/2006/main">
-            <a:off x="647700" y="2762250"/>
-            <a:ext cx="1543050" cy="457200"/>
+              <a:defRPr sz="1575">
+                <a:solidFill>
+                  <a:srgbClr val="000000"/>
+                </a:solidFill>
+                <a:latin typeface="Helvetica Neue"/>
+                <a:ea typeface="Helvetica Neue"/>
+                <a:cs typeface="Helvetica Neue"/>
+              </a:defRPr>
+            </a:pPr>
+            <a:r>
+              <a:rPr sz="1575">
+                <a:solidFill>
+                  <a:srgbClr val="000000"/>
+                </a:solidFill>
+                <a:latin typeface="Helvetica Neue"/>
+                <a:ea typeface="Helvetica Neue"/>
+                <a:cs typeface="Helvetica Neue"/>
+              </a:rPr>
+              <a:t>Stage status and live logs expose deployment progress.</a:t>
+            </a:r>
+          </a:p>
+        </p:txBody>
+      </p:sp>
+      <p:sp>
+        <p:nvSpPr>
+          <p:cNvPr id="13" name="">
+            <a:extLst xmlns:a="http://schemas.openxmlformats.org/drawingml/2006/main">
+              <a:ext uri="{FF2B5EF4-FFF2-40B4-BE49-F238E27FC236}">
+                <a16:creationId xmlns:a16="http://schemas.microsoft.com/office/drawing/2014/main" id="{B7C873DF-FCB1-4647-A182-543ED1FB57C7}"/>
+              </a:ext>
+            </a:extLst>
+          </p:cNvPr>
+          <p:cNvSpPr>
+            <a:spLocks xmlns:a="http://schemas.openxmlformats.org/drawingml/2006/main" noGrp="1"/>
+          </p:cNvSpPr>
+          <p:nvPr/>
+        </p:nvSpPr>
+        <p:spPr>
+          <a:xfrm xmlns:a="http://schemas.openxmlformats.org/drawingml/2006/main">
+            <a:off x="8096250" y="5715000"/>
+            <a:ext cx="3219450" cy="685800"/>
           </a:xfrm>
           <a:prstGeom xmlns:a="http://schemas.openxmlformats.org/drawingml/2006/main" prst="rect">
             <a:avLst/>
@@ -6396,1370 +6519,35 @@
           <a:lstStyle xmlns:a="http://schemas.openxmlformats.org/drawingml/2006/main"/>
           <a:p xmlns:a="http://schemas.openxmlformats.org/drawingml/2006/main">
             <a:pPr>
-              <a:defRPr sz="1350" b="1">
-                <a:solidFill>
-                  <a:srgbClr val="000000"/>
-                </a:solidFill>
-                <a:latin typeface="Helvetica Neue"/>
-                <a:ea typeface="Helvetica Neue"/>
-                <a:cs typeface="Helvetica Neue"/>
-              </a:defRPr>
-            </a:pPr>
-            <a:r>
-              <a:rPr sz="1350" b="1">
-                <a:solidFill>
-                  <a:srgbClr val="000000"/>
-                </a:solidFill>
-                <a:latin typeface="Helvetica Neue"/>
-                <a:ea typeface="Helvetica Neue"/>
-                <a:cs typeface="Helvetica Neue"/>
-              </a:rPr>
-              <a:t>Pull request</a:t>
-            </a:r>
-          </a:p>
-        </p:txBody>
-      </p:sp>
-      <p:sp>
-        <p:nvSpPr>
-          <p:cNvPr id="13" name="">
-            <a:extLst xmlns:a="http://schemas.openxmlformats.org/drawingml/2006/main">
-              <a:ext uri="{FF2B5EF4-FFF2-40B4-BE49-F238E27FC236}">
-                <a16:creationId xmlns:a16="http://schemas.microsoft.com/office/drawing/2014/main" id="{9A00B1CF-221A-45F7-BFEE-A6A80BCFCC5C}"/>
-              </a:ext>
-            </a:extLst>
-          </p:cNvPr>
-          <p:cNvSpPr>
-            <a:spLocks xmlns:a="http://schemas.openxmlformats.org/drawingml/2006/main" noGrp="1"/>
-          </p:cNvSpPr>
-          <p:nvPr/>
-        </p:nvSpPr>
-        <p:spPr>
-          <a:xfrm xmlns:a="http://schemas.openxmlformats.org/drawingml/2006/main">
-            <a:off x="2324100" y="2628900"/>
-            <a:ext cx="3238500" cy="742950"/>
-          </a:xfrm>
-          <a:prstGeom xmlns:a="http://schemas.openxmlformats.org/drawingml/2006/main" prst="rect">
-            <a:avLst/>
-          </a:prstGeom>
-          <a:solidFill xmlns:a="http://schemas.openxmlformats.org/drawingml/2006/main">
-            <a:srgbClr val="FFFFFF"/>
-          </a:solidFill>
-          <a:ln xmlns:a="http://schemas.openxmlformats.org/drawingml/2006/main" w="9525">
-            <a:solidFill>
-              <a:srgbClr val="B8BCC4"/>
-            </a:solidFill>
-            <a:prstDash val="solid"/>
-          </a:ln>
-        </p:spPr>
+              <a:defRPr sz="1500" b="1">
+                <a:solidFill>
+                  <a:srgbClr val="000000"/>
+                </a:solidFill>
+                <a:latin typeface="Helvetica Neue"/>
+                <a:ea typeface="Helvetica Neue"/>
+                <a:cs typeface="Helvetica Neue"/>
+              </a:defRPr>
+            </a:pPr>
+            <a:r>
+              <a:rPr sz="1500" b="1">
+                <a:solidFill>
+                  <a:srgbClr val="000000"/>
+                </a:solidFill>
+                <a:latin typeface="Helvetica Neue"/>
+                <a:ea typeface="Helvetica Neue"/>
+                <a:cs typeface="Helvetica Neue"/>
+              </a:rPr>
+              <a:t>This turns a command-line playbook into a delivery cockpit without changing the underlying Ansible contract.</a:t>
+            </a:r>
+          </a:p>
+        </p:txBody>
       </p:sp>
       <p:sp>
         <p:nvSpPr>
           <p:cNvPr id="14" name="">
             <a:extLst xmlns:a="http://schemas.openxmlformats.org/drawingml/2006/main">
               <a:ext uri="{FF2B5EF4-FFF2-40B4-BE49-F238E27FC236}">
-                <a16:creationId xmlns:a16="http://schemas.microsoft.com/office/drawing/2014/main" id="{68670EDA-079B-46D6-A714-32B2BDDF90A6}"/>
-              </a:ext>
-            </a:extLst>
-          </p:cNvPr>
-          <p:cNvSpPr>
-            <a:spLocks xmlns:a="http://schemas.openxmlformats.org/drawingml/2006/main" noGrp="1"/>
-          </p:cNvSpPr>
-          <p:nvPr/>
-        </p:nvSpPr>
-        <p:spPr>
-          <a:xfrm xmlns:a="http://schemas.openxmlformats.org/drawingml/2006/main">
-            <a:off x="2457450" y="2762250"/>
-            <a:ext cx="2971800" cy="457200"/>
-          </a:xfrm>
-          <a:prstGeom xmlns:a="http://schemas.openxmlformats.org/drawingml/2006/main" prst="rect">
-            <a:avLst/>
-          </a:prstGeom>
-          <a:noFill xmlns:a="http://schemas.openxmlformats.org/drawingml/2006/main"/>
-          <a:ln xmlns:a="http://schemas.openxmlformats.org/drawingml/2006/main" w="0">
-            <a:noFill/>
-            <a:prstDash val="solid"/>
-          </a:ln>
-        </p:spPr>
-        <p:txBody>
-          <a:bodyPr xmlns:a="http://schemas.openxmlformats.org/drawingml/2006/main"/>
-          <a:lstStyle xmlns:a="http://schemas.openxmlformats.org/drawingml/2006/main"/>
-          <a:p xmlns:a="http://schemas.openxmlformats.org/drawingml/2006/main">
-            <a:pPr>
-              <a:defRPr sz="1200" b="0">
-                <a:solidFill>
-                  <a:srgbClr val="4B5563"/>
-                </a:solidFill>
-                <a:latin typeface="Helvetica Neue"/>
-                <a:ea typeface="Helvetica Neue"/>
-                <a:cs typeface="Helvetica Neue"/>
-              </a:defRPr>
-            </a:pPr>
-            <a:r>
-              <a:rPr sz="1200" b="0">
-                <a:solidFill>
-                  <a:srgbClr val="4B5563"/>
-                </a:solidFill>
-                <a:latin typeface="Helvetica Neue"/>
-                <a:ea typeface="Helvetica Neue"/>
-                <a:cs typeface="Helvetica Neue"/>
-              </a:rPr>
-              <a:t>Generate criteria, risks, and test ideas.</a:t>
-            </a:r>
-          </a:p>
-        </p:txBody>
-      </p:sp>
-      <p:sp>
-        <p:nvSpPr>
-          <p:cNvPr id="15" name="">
-            <a:extLst xmlns:a="http://schemas.openxmlformats.org/drawingml/2006/main">
-              <a:ext uri="{FF2B5EF4-FFF2-40B4-BE49-F238E27FC236}">
-                <a16:creationId xmlns:a16="http://schemas.microsoft.com/office/drawing/2014/main" id="{787F76CB-9226-4B9A-9301-88756DFDE03A}"/>
-              </a:ext>
-            </a:extLst>
-          </p:cNvPr>
-          <p:cNvSpPr>
-            <a:spLocks xmlns:a="http://schemas.openxmlformats.org/drawingml/2006/main" noGrp="1"/>
-          </p:cNvSpPr>
-          <p:nvPr/>
-        </p:nvSpPr>
-        <p:spPr>
-          <a:xfrm xmlns:a="http://schemas.openxmlformats.org/drawingml/2006/main">
-            <a:off x="5562600" y="2628900"/>
-            <a:ext cx="3429000" cy="742950"/>
-          </a:xfrm>
-          <a:prstGeom xmlns:a="http://schemas.openxmlformats.org/drawingml/2006/main" prst="rect">
-            <a:avLst/>
-          </a:prstGeom>
-          <a:solidFill xmlns:a="http://schemas.openxmlformats.org/drawingml/2006/main">
-            <a:srgbClr val="FFFFFF"/>
-          </a:solidFill>
-          <a:ln xmlns:a="http://schemas.openxmlformats.org/drawingml/2006/main" w="9525">
-            <a:solidFill>
-              <a:srgbClr val="B8BCC4"/>
-            </a:solidFill>
-            <a:prstDash val="solid"/>
-          </a:ln>
-        </p:spPr>
-      </p:sp>
-      <p:sp>
-        <p:nvSpPr>
-          <p:cNvPr id="16" name="">
-            <a:extLst xmlns:a="http://schemas.openxmlformats.org/drawingml/2006/main">
-              <a:ext uri="{FF2B5EF4-FFF2-40B4-BE49-F238E27FC236}">
-                <a16:creationId xmlns:a16="http://schemas.microsoft.com/office/drawing/2014/main" id="{C147A221-127C-42AE-8365-B59DD737E2B5}"/>
-              </a:ext>
-            </a:extLst>
-          </p:cNvPr>
-          <p:cNvSpPr>
-            <a:spLocks xmlns:a="http://schemas.openxmlformats.org/drawingml/2006/main" noGrp="1"/>
-          </p:cNvSpPr>
-          <p:nvPr/>
-        </p:nvSpPr>
-        <p:spPr>
-          <a:xfrm xmlns:a="http://schemas.openxmlformats.org/drawingml/2006/main">
-            <a:off x="5695950" y="2762250"/>
-            <a:ext cx="3162300" cy="457200"/>
-          </a:xfrm>
-          <a:prstGeom xmlns:a="http://schemas.openxmlformats.org/drawingml/2006/main" prst="rect">
-            <a:avLst/>
-          </a:prstGeom>
-          <a:noFill xmlns:a="http://schemas.openxmlformats.org/drawingml/2006/main"/>
-          <a:ln xmlns:a="http://schemas.openxmlformats.org/drawingml/2006/main" w="0">
-            <a:noFill/>
-            <a:prstDash val="solid"/>
-          </a:ln>
-        </p:spPr>
-        <p:txBody>
-          <a:bodyPr xmlns:a="http://schemas.openxmlformats.org/drawingml/2006/main"/>
-          <a:lstStyle xmlns:a="http://schemas.openxmlformats.org/drawingml/2006/main"/>
-          <a:p xmlns:a="http://schemas.openxmlformats.org/drawingml/2006/main">
-            <a:pPr>
-              <a:defRPr sz="1200" b="0">
-                <a:solidFill>
-                  <a:srgbClr val="4B5563"/>
-                </a:solidFill>
-                <a:latin typeface="Helvetica Neue"/>
-                <a:ea typeface="Helvetica Neue"/>
-                <a:cs typeface="Helvetica Neue"/>
-              </a:defRPr>
-            </a:pPr>
-            <a:r>
-              <a:rPr sz="1200" b="0">
-                <a:solidFill>
-                  <a:srgbClr val="4B5563"/>
-                </a:solidFill>
-                <a:latin typeface="Helvetica Neue"/>
-                <a:ea typeface="Helvetica Neue"/>
-                <a:cs typeface="Helvetica Neue"/>
-              </a:rPr>
-              <a:t>Run syntax, lint, and idempotency checks.</a:t>
-            </a:r>
-          </a:p>
-        </p:txBody>
-      </p:sp>
-      <p:sp>
-        <p:nvSpPr>
-          <p:cNvPr id="17" name="">
-            <a:extLst xmlns:a="http://schemas.openxmlformats.org/drawingml/2006/main">
-              <a:ext uri="{FF2B5EF4-FFF2-40B4-BE49-F238E27FC236}">
-                <a16:creationId xmlns:a16="http://schemas.microsoft.com/office/drawing/2014/main" id="{3C4CD4DC-23F7-4AD1-9698-788F87886F01}"/>
-              </a:ext>
-            </a:extLst>
-          </p:cNvPr>
-          <p:cNvSpPr>
-            <a:spLocks xmlns:a="http://schemas.openxmlformats.org/drawingml/2006/main" noGrp="1"/>
-          </p:cNvSpPr>
-          <p:nvPr/>
-        </p:nvSpPr>
-        <p:spPr>
-          <a:xfrm xmlns:a="http://schemas.openxmlformats.org/drawingml/2006/main">
-            <a:off x="8991600" y="2628900"/>
-            <a:ext cx="2381250" cy="742950"/>
-          </a:xfrm>
-          <a:prstGeom xmlns:a="http://schemas.openxmlformats.org/drawingml/2006/main" prst="rect">
-            <a:avLst/>
-          </a:prstGeom>
-          <a:solidFill xmlns:a="http://schemas.openxmlformats.org/drawingml/2006/main">
-            <a:srgbClr val="FFFFFF"/>
-          </a:solidFill>
-          <a:ln xmlns:a="http://schemas.openxmlformats.org/drawingml/2006/main" w="9525">
-            <a:solidFill>
-              <a:srgbClr val="B8BCC4"/>
-            </a:solidFill>
-            <a:prstDash val="solid"/>
-          </a:ln>
-        </p:spPr>
-      </p:sp>
-      <p:sp>
-        <p:nvSpPr>
-          <p:cNvPr id="18" name="">
-            <a:extLst xmlns:a="http://schemas.openxmlformats.org/drawingml/2006/main">
-              <a:ext uri="{FF2B5EF4-FFF2-40B4-BE49-F238E27FC236}">
-                <a16:creationId xmlns:a16="http://schemas.microsoft.com/office/drawing/2014/main" id="{EF6E6A4E-8B9D-4AA2-A495-CD8B3A69359D}"/>
-              </a:ext>
-            </a:extLst>
-          </p:cNvPr>
-          <p:cNvSpPr>
-            <a:spLocks xmlns:a="http://schemas.openxmlformats.org/drawingml/2006/main" noGrp="1"/>
-          </p:cNvSpPr>
-          <p:nvPr/>
-        </p:nvSpPr>
-        <p:spPr>
-          <a:xfrm xmlns:a="http://schemas.openxmlformats.org/drawingml/2006/main">
-            <a:off x="9124950" y="2762250"/>
-            <a:ext cx="2114550" cy="457200"/>
-          </a:xfrm>
-          <a:prstGeom xmlns:a="http://schemas.openxmlformats.org/drawingml/2006/main" prst="rect">
-            <a:avLst/>
-          </a:prstGeom>
-          <a:noFill xmlns:a="http://schemas.openxmlformats.org/drawingml/2006/main"/>
-          <a:ln xmlns:a="http://schemas.openxmlformats.org/drawingml/2006/main" w="0">
-            <a:noFill/>
-            <a:prstDash val="solid"/>
-          </a:ln>
-        </p:spPr>
-        <p:txBody>
-          <a:bodyPr xmlns:a="http://schemas.openxmlformats.org/drawingml/2006/main"/>
-          <a:lstStyle xmlns:a="http://schemas.openxmlformats.org/drawingml/2006/main"/>
-          <a:p xmlns:a="http://schemas.openxmlformats.org/drawingml/2006/main">
-            <a:pPr>
-              <a:defRPr sz="1200" b="0">
-                <a:solidFill>
-                  <a:srgbClr val="4B5563"/>
-                </a:solidFill>
-                <a:latin typeface="Helvetica Neue"/>
-                <a:ea typeface="Helvetica Neue"/>
-                <a:cs typeface="Helvetica Neue"/>
-              </a:defRPr>
-            </a:pPr>
-            <a:r>
-              <a:rPr sz="1200" b="0">
-                <a:solidFill>
-                  <a:srgbClr val="4B5563"/>
-                </a:solidFill>
-                <a:latin typeface="Helvetica Neue"/>
-                <a:ea typeface="Helvetica Neue"/>
-                <a:cs typeface="Helvetica Neue"/>
-              </a:rPr>
-              <a:t>Automatable review gate.</a:t>
-            </a:r>
-          </a:p>
-        </p:txBody>
-      </p:sp>
-      <p:sp>
-        <p:nvSpPr>
-          <p:cNvPr id="19" name="">
-            <a:extLst xmlns:a="http://schemas.openxmlformats.org/drawingml/2006/main">
-              <a:ext uri="{FF2B5EF4-FFF2-40B4-BE49-F238E27FC236}">
-                <a16:creationId xmlns:a16="http://schemas.microsoft.com/office/drawing/2014/main" id="{1EDFA85A-D405-4274-8760-72F6EF58BDE9}"/>
-              </a:ext>
-            </a:extLst>
-          </p:cNvPr>
-          <p:cNvSpPr>
-            <a:spLocks xmlns:a="http://schemas.openxmlformats.org/drawingml/2006/main" noGrp="1"/>
-          </p:cNvSpPr>
-          <p:nvPr/>
-        </p:nvSpPr>
-        <p:spPr>
-          <a:xfrm xmlns:a="http://schemas.openxmlformats.org/drawingml/2006/main">
-            <a:off x="514350" y="3371850"/>
-            <a:ext cx="1809750" cy="742950"/>
-          </a:xfrm>
-          <a:prstGeom xmlns:a="http://schemas.openxmlformats.org/drawingml/2006/main" prst="rect">
-            <a:avLst/>
-          </a:prstGeom>
-          <a:solidFill xmlns:a="http://schemas.openxmlformats.org/drawingml/2006/main">
-            <a:srgbClr val="F6F7F9"/>
-          </a:solidFill>
-          <a:ln xmlns:a="http://schemas.openxmlformats.org/drawingml/2006/main" w="9525">
-            <a:solidFill>
-              <a:srgbClr val="B8BCC4"/>
-            </a:solidFill>
-            <a:prstDash val="solid"/>
-          </a:ln>
-        </p:spPr>
-      </p:sp>
-      <p:sp>
-        <p:nvSpPr>
-          <p:cNvPr id="20" name="">
-            <a:extLst xmlns:a="http://schemas.openxmlformats.org/drawingml/2006/main">
-              <a:ext uri="{FF2B5EF4-FFF2-40B4-BE49-F238E27FC236}">
-                <a16:creationId xmlns:a16="http://schemas.microsoft.com/office/drawing/2014/main" id="{0783902C-946D-4767-AED6-8FEC069BFABE}"/>
-              </a:ext>
-            </a:extLst>
-          </p:cNvPr>
-          <p:cNvSpPr>
-            <a:spLocks xmlns:a="http://schemas.openxmlformats.org/drawingml/2006/main" noGrp="1"/>
-          </p:cNvSpPr>
-          <p:nvPr/>
-        </p:nvSpPr>
-        <p:spPr>
-          <a:xfrm xmlns:a="http://schemas.openxmlformats.org/drawingml/2006/main">
-            <a:off x="647700" y="3505200"/>
-            <a:ext cx="1543050" cy="457200"/>
-          </a:xfrm>
-          <a:prstGeom xmlns:a="http://schemas.openxmlformats.org/drawingml/2006/main" prst="rect">
-            <a:avLst/>
-          </a:prstGeom>
-          <a:noFill xmlns:a="http://schemas.openxmlformats.org/drawingml/2006/main"/>
-          <a:ln xmlns:a="http://schemas.openxmlformats.org/drawingml/2006/main" w="0">
-            <a:noFill/>
-            <a:prstDash val="solid"/>
-          </a:ln>
-        </p:spPr>
-        <p:txBody>
-          <a:bodyPr xmlns:a="http://schemas.openxmlformats.org/drawingml/2006/main"/>
-          <a:lstStyle xmlns:a="http://schemas.openxmlformats.org/drawingml/2006/main"/>
-          <a:p xmlns:a="http://schemas.openxmlformats.org/drawingml/2006/main">
-            <a:pPr>
-              <a:defRPr sz="1350" b="1">
-                <a:solidFill>
-                  <a:srgbClr val="000000"/>
-                </a:solidFill>
-                <a:latin typeface="Helvetica Neue"/>
-                <a:ea typeface="Helvetica Neue"/>
-                <a:cs typeface="Helvetica Neue"/>
-              </a:defRPr>
-            </a:pPr>
-            <a:r>
-              <a:rPr sz="1350" b="1">
-                <a:solidFill>
-                  <a:srgbClr val="000000"/>
-                </a:solidFill>
-                <a:latin typeface="Helvetica Neue"/>
-                <a:ea typeface="Helvetica Neue"/>
-                <a:cs typeface="Helvetica Neue"/>
-              </a:rPr>
-              <a:t>Dev deploy</a:t>
-            </a:r>
-          </a:p>
-        </p:txBody>
-      </p:sp>
-      <p:sp>
-        <p:nvSpPr>
-          <p:cNvPr id="21" name="">
-            <a:extLst xmlns:a="http://schemas.openxmlformats.org/drawingml/2006/main">
-              <a:ext uri="{FF2B5EF4-FFF2-40B4-BE49-F238E27FC236}">
-                <a16:creationId xmlns:a16="http://schemas.microsoft.com/office/drawing/2014/main" id="{51D7D062-A3A6-4B3B-9051-4C529DFA9219}"/>
-              </a:ext>
-            </a:extLst>
-          </p:cNvPr>
-          <p:cNvSpPr>
-            <a:spLocks xmlns:a="http://schemas.openxmlformats.org/drawingml/2006/main" noGrp="1"/>
-          </p:cNvSpPr>
-          <p:nvPr/>
-        </p:nvSpPr>
-        <p:spPr>
-          <a:xfrm xmlns:a="http://schemas.openxmlformats.org/drawingml/2006/main">
-            <a:off x="2324100" y="3371850"/>
-            <a:ext cx="3238500" cy="742950"/>
-          </a:xfrm>
-          <a:prstGeom xmlns:a="http://schemas.openxmlformats.org/drawingml/2006/main" prst="rect">
-            <a:avLst/>
-          </a:prstGeom>
-          <a:solidFill xmlns:a="http://schemas.openxmlformats.org/drawingml/2006/main">
-            <a:srgbClr val="F6F7F9"/>
-          </a:solidFill>
-          <a:ln xmlns:a="http://schemas.openxmlformats.org/drawingml/2006/main" w="9525">
-            <a:solidFill>
-              <a:srgbClr val="B8BCC4"/>
-            </a:solidFill>
-            <a:prstDash val="solid"/>
-          </a:ln>
-        </p:spPr>
-      </p:sp>
-      <p:sp>
-        <p:nvSpPr>
-          <p:cNvPr id="22" name="">
-            <a:extLst xmlns:a="http://schemas.openxmlformats.org/drawingml/2006/main">
-              <a:ext uri="{FF2B5EF4-FFF2-40B4-BE49-F238E27FC236}">
-                <a16:creationId xmlns:a16="http://schemas.microsoft.com/office/drawing/2014/main" id="{08BFC88C-9031-4325-B37A-CD934F05FFFB}"/>
-              </a:ext>
-            </a:extLst>
-          </p:cNvPr>
-          <p:cNvSpPr>
-            <a:spLocks xmlns:a="http://schemas.openxmlformats.org/drawingml/2006/main" noGrp="1"/>
-          </p:cNvSpPr>
-          <p:nvPr/>
-        </p:nvSpPr>
-        <p:spPr>
-          <a:xfrm xmlns:a="http://schemas.openxmlformats.org/drawingml/2006/main">
-            <a:off x="2457450" y="3505200"/>
-            <a:ext cx="2971800" cy="457200"/>
-          </a:xfrm>
-          <a:prstGeom xmlns:a="http://schemas.openxmlformats.org/drawingml/2006/main" prst="rect">
-            <a:avLst/>
-          </a:prstGeom>
-          <a:noFill xmlns:a="http://schemas.openxmlformats.org/drawingml/2006/main"/>
-          <a:ln xmlns:a="http://schemas.openxmlformats.org/drawingml/2006/main" w="0">
-            <a:noFill/>
-            <a:prstDash val="solid"/>
-          </a:ln>
-        </p:spPr>
-        <p:txBody>
-          <a:bodyPr xmlns:a="http://schemas.openxmlformats.org/drawingml/2006/main"/>
-          <a:lstStyle xmlns:a="http://schemas.openxmlformats.org/drawingml/2006/main"/>
-          <a:p xmlns:a="http://schemas.openxmlformats.org/drawingml/2006/main">
-            <a:pPr>
-              <a:defRPr sz="1200" b="0">
-                <a:solidFill>
-                  <a:srgbClr val="4B5563"/>
-                </a:solidFill>
-                <a:latin typeface="Helvetica Neue"/>
-                <a:ea typeface="Helvetica Neue"/>
-                <a:cs typeface="Helvetica Neue"/>
-              </a:defRPr>
-            </a:pPr>
-            <a:r>
-              <a:rPr sz="1200" b="0">
-                <a:solidFill>
-                  <a:srgbClr val="4B5563"/>
-                </a:solidFill>
-                <a:latin typeface="Helvetica Neue"/>
-                <a:ea typeface="Helvetica Neue"/>
-                <a:cs typeface="Helvetica Neue"/>
-              </a:rPr>
-              <a:t>Translate change intent into vars and runbook updates.</a:t>
-            </a:r>
-          </a:p>
-        </p:txBody>
-      </p:sp>
-      <p:sp>
-        <p:nvSpPr>
-          <p:cNvPr id="23" name="">
-            <a:extLst xmlns:a="http://schemas.openxmlformats.org/drawingml/2006/main">
-              <a:ext uri="{FF2B5EF4-FFF2-40B4-BE49-F238E27FC236}">
-                <a16:creationId xmlns:a16="http://schemas.microsoft.com/office/drawing/2014/main" id="{2C9A111F-078C-4B36-A939-3FC3021F56F3}"/>
-              </a:ext>
-            </a:extLst>
-          </p:cNvPr>
-          <p:cNvSpPr>
-            <a:spLocks xmlns:a="http://schemas.openxmlformats.org/drawingml/2006/main" noGrp="1"/>
-          </p:cNvSpPr>
-          <p:nvPr/>
-        </p:nvSpPr>
-        <p:spPr>
-          <a:xfrm xmlns:a="http://schemas.openxmlformats.org/drawingml/2006/main">
-            <a:off x="5562600" y="3371850"/>
-            <a:ext cx="3429000" cy="742950"/>
-          </a:xfrm>
-          <a:prstGeom xmlns:a="http://schemas.openxmlformats.org/drawingml/2006/main" prst="rect">
-            <a:avLst/>
-          </a:prstGeom>
-          <a:solidFill xmlns:a="http://schemas.openxmlformats.org/drawingml/2006/main">
-            <a:srgbClr val="F6F7F9"/>
-          </a:solidFill>
-          <a:ln xmlns:a="http://schemas.openxmlformats.org/drawingml/2006/main" w="9525">
-            <a:solidFill>
-              <a:srgbClr val="B8BCC4"/>
-            </a:solidFill>
-            <a:prstDash val="solid"/>
-          </a:ln>
-        </p:spPr>
-      </p:sp>
-      <p:sp>
-        <p:nvSpPr>
-          <p:cNvPr id="24" name="">
-            <a:extLst xmlns:a="http://schemas.openxmlformats.org/drawingml/2006/main">
-              <a:ext uri="{FF2B5EF4-FFF2-40B4-BE49-F238E27FC236}">
-                <a16:creationId xmlns:a16="http://schemas.microsoft.com/office/drawing/2014/main" id="{F3D9A096-8027-4F5B-A8BF-23C1790898E0}"/>
-              </a:ext>
-            </a:extLst>
-          </p:cNvPr>
-          <p:cNvSpPr>
-            <a:spLocks xmlns:a="http://schemas.openxmlformats.org/drawingml/2006/main" noGrp="1"/>
-          </p:cNvSpPr>
-          <p:nvPr/>
-        </p:nvSpPr>
-        <p:spPr>
-          <a:xfrm xmlns:a="http://schemas.openxmlformats.org/drawingml/2006/main">
-            <a:off x="5695950" y="3505200"/>
-            <a:ext cx="3162300" cy="457200"/>
-          </a:xfrm>
-          <a:prstGeom xmlns:a="http://schemas.openxmlformats.org/drawingml/2006/main" prst="rect">
-            <a:avLst/>
-          </a:prstGeom>
-          <a:noFill xmlns:a="http://schemas.openxmlformats.org/drawingml/2006/main"/>
-          <a:ln xmlns:a="http://schemas.openxmlformats.org/drawingml/2006/main" w="0">
-            <a:noFill/>
-            <a:prstDash val="solid"/>
-          </a:ln>
-        </p:spPr>
-        <p:txBody>
-          <a:bodyPr xmlns:a="http://schemas.openxmlformats.org/drawingml/2006/main"/>
-          <a:lstStyle xmlns:a="http://schemas.openxmlformats.org/drawingml/2006/main"/>
-          <a:p xmlns:a="http://schemas.openxmlformats.org/drawingml/2006/main">
-            <a:pPr>
-              <a:defRPr sz="1200" b="0">
-                <a:solidFill>
-                  <a:srgbClr val="4B5563"/>
-                </a:solidFill>
-                <a:latin typeface="Helvetica Neue"/>
-                <a:ea typeface="Helvetica Neue"/>
-                <a:cs typeface="Helvetica Neue"/>
-              </a:defRPr>
-            </a:pPr>
-            <a:r>
-              <a:rPr sz="1200" b="0">
-                <a:solidFill>
-                  <a:srgbClr val="4B5563"/>
-                </a:solidFill>
-                <a:latin typeface="Helvetica Neue"/>
-                <a:ea typeface="Helvetica Neue"/>
-                <a:cs typeface="Helvetica Neue"/>
-              </a:rPr>
-              <a:t>Run playbook against dev bastion and dev env file.</a:t>
-            </a:r>
-          </a:p>
-        </p:txBody>
-      </p:sp>
-      <p:sp>
-        <p:nvSpPr>
-          <p:cNvPr id="25" name="">
-            <a:extLst xmlns:a="http://schemas.openxmlformats.org/drawingml/2006/main">
-              <a:ext uri="{FF2B5EF4-FFF2-40B4-BE49-F238E27FC236}">
-                <a16:creationId xmlns:a16="http://schemas.microsoft.com/office/drawing/2014/main" id="{592699A3-A7A4-412F-B33E-B7F709717252}"/>
-              </a:ext>
-            </a:extLst>
-          </p:cNvPr>
-          <p:cNvSpPr>
-            <a:spLocks xmlns:a="http://schemas.openxmlformats.org/drawingml/2006/main" noGrp="1"/>
-          </p:cNvSpPr>
-          <p:nvPr/>
-        </p:nvSpPr>
-        <p:spPr>
-          <a:xfrm xmlns:a="http://schemas.openxmlformats.org/drawingml/2006/main">
-            <a:off x="8991600" y="3371850"/>
-            <a:ext cx="2381250" cy="742950"/>
-          </a:xfrm>
-          <a:prstGeom xmlns:a="http://schemas.openxmlformats.org/drawingml/2006/main" prst="rect">
-            <a:avLst/>
-          </a:prstGeom>
-          <a:solidFill xmlns:a="http://schemas.openxmlformats.org/drawingml/2006/main">
-            <a:srgbClr val="F6F7F9"/>
-          </a:solidFill>
-          <a:ln xmlns:a="http://schemas.openxmlformats.org/drawingml/2006/main" w="9525">
-            <a:solidFill>
-              <a:srgbClr val="B8BCC4"/>
-            </a:solidFill>
-            <a:prstDash val="solid"/>
-          </a:ln>
-        </p:spPr>
-      </p:sp>
-      <p:sp>
-        <p:nvSpPr>
-          <p:cNvPr id="26" name="">
-            <a:extLst xmlns:a="http://schemas.openxmlformats.org/drawingml/2006/main">
-              <a:ext uri="{FF2B5EF4-FFF2-40B4-BE49-F238E27FC236}">
-                <a16:creationId xmlns:a16="http://schemas.microsoft.com/office/drawing/2014/main" id="{9AB303EC-424B-4D1A-8AE3-ACB80D7C59CE}"/>
-              </a:ext>
-            </a:extLst>
-          </p:cNvPr>
-          <p:cNvSpPr>
-            <a:spLocks xmlns:a="http://schemas.openxmlformats.org/drawingml/2006/main" noGrp="1"/>
-          </p:cNvSpPr>
-          <p:nvPr/>
-        </p:nvSpPr>
-        <p:spPr>
-          <a:xfrm xmlns:a="http://schemas.openxmlformats.org/drawingml/2006/main">
-            <a:off x="9124950" y="3505200"/>
-            <a:ext cx="2114550" cy="457200"/>
-          </a:xfrm>
-          <a:prstGeom xmlns:a="http://schemas.openxmlformats.org/drawingml/2006/main" prst="rect">
-            <a:avLst/>
-          </a:prstGeom>
-          <a:noFill xmlns:a="http://schemas.openxmlformats.org/drawingml/2006/main"/>
-          <a:ln xmlns:a="http://schemas.openxmlformats.org/drawingml/2006/main" w="0">
-            <a:noFill/>
-            <a:prstDash val="solid"/>
-          </a:ln>
-        </p:spPr>
-        <p:txBody>
-          <a:bodyPr xmlns:a="http://schemas.openxmlformats.org/drawingml/2006/main"/>
-          <a:lstStyle xmlns:a="http://schemas.openxmlformats.org/drawingml/2006/main"/>
-          <a:p xmlns:a="http://schemas.openxmlformats.org/drawingml/2006/main">
-            <a:pPr>
-              <a:defRPr sz="1200" b="0">
-                <a:solidFill>
-                  <a:srgbClr val="4B5563"/>
-                </a:solidFill>
-                <a:latin typeface="Helvetica Neue"/>
-                <a:ea typeface="Helvetica Neue"/>
-                <a:cs typeface="Helvetica Neue"/>
-              </a:defRPr>
-            </a:pPr>
-            <a:r>
-              <a:rPr sz="1200" b="0">
-                <a:solidFill>
-                  <a:srgbClr val="4B5563"/>
-                </a:solidFill>
-                <a:latin typeface="Helvetica Neue"/>
-                <a:ea typeface="Helvetica Neue"/>
-                <a:cs typeface="Helvetica Neue"/>
-              </a:rPr>
-              <a:t>Fast, repeatable validation.</a:t>
-            </a:r>
-          </a:p>
-        </p:txBody>
-      </p:sp>
-      <p:sp>
-        <p:nvSpPr>
-          <p:cNvPr id="27" name="">
-            <a:extLst xmlns:a="http://schemas.openxmlformats.org/drawingml/2006/main">
-              <a:ext uri="{FF2B5EF4-FFF2-40B4-BE49-F238E27FC236}">
-                <a16:creationId xmlns:a16="http://schemas.microsoft.com/office/drawing/2014/main" id="{94AA5624-6C24-4344-8EFA-0BCDDD9EB7D7}"/>
-              </a:ext>
-            </a:extLst>
-          </p:cNvPr>
-          <p:cNvSpPr>
-            <a:spLocks xmlns:a="http://schemas.openxmlformats.org/drawingml/2006/main" noGrp="1"/>
-          </p:cNvSpPr>
-          <p:nvPr/>
-        </p:nvSpPr>
-        <p:spPr>
-          <a:xfrm xmlns:a="http://schemas.openxmlformats.org/drawingml/2006/main">
-            <a:off x="514350" y="4114800"/>
-            <a:ext cx="1809750" cy="742950"/>
-          </a:xfrm>
-          <a:prstGeom xmlns:a="http://schemas.openxmlformats.org/drawingml/2006/main" prst="rect">
-            <a:avLst/>
-          </a:prstGeom>
-          <a:solidFill xmlns:a="http://schemas.openxmlformats.org/drawingml/2006/main">
-            <a:srgbClr val="FFFFFF"/>
-          </a:solidFill>
-          <a:ln xmlns:a="http://schemas.openxmlformats.org/drawingml/2006/main" w="9525">
-            <a:solidFill>
-              <a:srgbClr val="B8BCC4"/>
-            </a:solidFill>
-            <a:prstDash val="solid"/>
-          </a:ln>
-        </p:spPr>
-      </p:sp>
-      <p:sp>
-        <p:nvSpPr>
-          <p:cNvPr id="28" name="">
-            <a:extLst xmlns:a="http://schemas.openxmlformats.org/drawingml/2006/main">
-              <a:ext uri="{FF2B5EF4-FFF2-40B4-BE49-F238E27FC236}">
-                <a16:creationId xmlns:a16="http://schemas.microsoft.com/office/drawing/2014/main" id="{F3023F72-0400-4D04-83A0-237B95019038}"/>
-              </a:ext>
-            </a:extLst>
-          </p:cNvPr>
-          <p:cNvSpPr>
-            <a:spLocks xmlns:a="http://schemas.openxmlformats.org/drawingml/2006/main" noGrp="1"/>
-          </p:cNvSpPr>
-          <p:nvPr/>
-        </p:nvSpPr>
-        <p:spPr>
-          <a:xfrm xmlns:a="http://schemas.openxmlformats.org/drawingml/2006/main">
-            <a:off x="647700" y="4248150"/>
-            <a:ext cx="1543050" cy="457200"/>
-          </a:xfrm>
-          <a:prstGeom xmlns:a="http://schemas.openxmlformats.org/drawingml/2006/main" prst="rect">
-            <a:avLst/>
-          </a:prstGeom>
-          <a:noFill xmlns:a="http://schemas.openxmlformats.org/drawingml/2006/main"/>
-          <a:ln xmlns:a="http://schemas.openxmlformats.org/drawingml/2006/main" w="0">
-            <a:noFill/>
-            <a:prstDash val="solid"/>
-          </a:ln>
-        </p:spPr>
-        <p:txBody>
-          <a:bodyPr xmlns:a="http://schemas.openxmlformats.org/drawingml/2006/main"/>
-          <a:lstStyle xmlns:a="http://schemas.openxmlformats.org/drawingml/2006/main"/>
-          <a:p xmlns:a="http://schemas.openxmlformats.org/drawingml/2006/main">
-            <a:pPr>
-              <a:defRPr sz="1350" b="1">
-                <a:solidFill>
-                  <a:srgbClr val="000000"/>
-                </a:solidFill>
-                <a:latin typeface="Helvetica Neue"/>
-                <a:ea typeface="Helvetica Neue"/>
-                <a:cs typeface="Helvetica Neue"/>
-              </a:defRPr>
-            </a:pPr>
-            <a:r>
-              <a:rPr sz="1350" b="1">
-                <a:solidFill>
-                  <a:srgbClr val="000000"/>
-                </a:solidFill>
-                <a:latin typeface="Helvetica Neue"/>
-                <a:ea typeface="Helvetica Neue"/>
-                <a:cs typeface="Helvetica Neue"/>
-              </a:rPr>
-              <a:t>Stage promote</a:t>
-            </a:r>
-          </a:p>
-        </p:txBody>
-      </p:sp>
-      <p:sp>
-        <p:nvSpPr>
-          <p:cNvPr id="29" name="">
-            <a:extLst xmlns:a="http://schemas.openxmlformats.org/drawingml/2006/main">
-              <a:ext uri="{FF2B5EF4-FFF2-40B4-BE49-F238E27FC236}">
-                <a16:creationId xmlns:a16="http://schemas.microsoft.com/office/drawing/2014/main" id="{69CB8376-EEE1-4B51-915A-53165F17A8A9}"/>
-              </a:ext>
-            </a:extLst>
-          </p:cNvPr>
-          <p:cNvSpPr>
-            <a:spLocks xmlns:a="http://schemas.openxmlformats.org/drawingml/2006/main" noGrp="1"/>
-          </p:cNvSpPr>
-          <p:nvPr/>
-        </p:nvSpPr>
-        <p:spPr>
-          <a:xfrm xmlns:a="http://schemas.openxmlformats.org/drawingml/2006/main">
-            <a:off x="2324100" y="4114800"/>
-            <a:ext cx="3238500" cy="742950"/>
-          </a:xfrm>
-          <a:prstGeom xmlns:a="http://schemas.openxmlformats.org/drawingml/2006/main" prst="rect">
-            <a:avLst/>
-          </a:prstGeom>
-          <a:solidFill xmlns:a="http://schemas.openxmlformats.org/drawingml/2006/main">
-            <a:srgbClr val="FFFFFF"/>
-          </a:solidFill>
-          <a:ln xmlns:a="http://schemas.openxmlformats.org/drawingml/2006/main" w="9525">
-            <a:solidFill>
-              <a:srgbClr val="B8BCC4"/>
-            </a:solidFill>
-            <a:prstDash val="solid"/>
-          </a:ln>
-        </p:spPr>
-      </p:sp>
-      <p:sp>
-        <p:nvSpPr>
-          <p:cNvPr id="30" name="">
-            <a:extLst xmlns:a="http://schemas.openxmlformats.org/drawingml/2006/main">
-              <a:ext uri="{FF2B5EF4-FFF2-40B4-BE49-F238E27FC236}">
-                <a16:creationId xmlns:a16="http://schemas.microsoft.com/office/drawing/2014/main" id="{D05BC57E-D067-41F9-AA54-D605F81944E7}"/>
-              </a:ext>
-            </a:extLst>
-          </p:cNvPr>
-          <p:cNvSpPr>
-            <a:spLocks xmlns:a="http://schemas.openxmlformats.org/drawingml/2006/main" noGrp="1"/>
-          </p:cNvSpPr>
-          <p:nvPr/>
-        </p:nvSpPr>
-        <p:spPr>
-          <a:xfrm xmlns:a="http://schemas.openxmlformats.org/drawingml/2006/main">
-            <a:off x="2457450" y="4248150"/>
-            <a:ext cx="2971800" cy="457200"/>
-          </a:xfrm>
-          <a:prstGeom xmlns:a="http://schemas.openxmlformats.org/drawingml/2006/main" prst="rect">
-            <a:avLst/>
-          </a:prstGeom>
-          <a:noFill xmlns:a="http://schemas.openxmlformats.org/drawingml/2006/main"/>
-          <a:ln xmlns:a="http://schemas.openxmlformats.org/drawingml/2006/main" w="0">
-            <a:noFill/>
-            <a:prstDash val="solid"/>
-          </a:ln>
-        </p:spPr>
-        <p:txBody>
-          <a:bodyPr xmlns:a="http://schemas.openxmlformats.org/drawingml/2006/main"/>
-          <a:lstStyle xmlns:a="http://schemas.openxmlformats.org/drawingml/2006/main"/>
-          <a:p xmlns:a="http://schemas.openxmlformats.org/drawingml/2006/main">
-            <a:pPr>
-              <a:defRPr sz="1200" b="0">
-                <a:solidFill>
-                  <a:srgbClr val="4B5563"/>
-                </a:solidFill>
-                <a:latin typeface="Helvetica Neue"/>
-                <a:ea typeface="Helvetica Neue"/>
-                <a:cs typeface="Helvetica Neue"/>
-              </a:defRPr>
-            </a:pPr>
-            <a:r>
-              <a:rPr sz="1200" b="0">
-                <a:solidFill>
-                  <a:srgbClr val="4B5563"/>
-                </a:solidFill>
-                <a:latin typeface="Helvetica Neue"/>
-                <a:ea typeface="Helvetica Neue"/>
-                <a:cs typeface="Helvetica Neue"/>
-              </a:rPr>
-              <a:t>Summarize changes and unresolved risks.</a:t>
-            </a:r>
-          </a:p>
-        </p:txBody>
-      </p:sp>
-      <p:sp>
-        <p:nvSpPr>
-          <p:cNvPr id="31" name="">
-            <a:extLst xmlns:a="http://schemas.openxmlformats.org/drawingml/2006/main">
-              <a:ext uri="{FF2B5EF4-FFF2-40B4-BE49-F238E27FC236}">
-                <a16:creationId xmlns:a16="http://schemas.microsoft.com/office/drawing/2014/main" id="{F9A068B2-9605-4A18-BA29-BC709EB15746}"/>
-              </a:ext>
-            </a:extLst>
-          </p:cNvPr>
-          <p:cNvSpPr>
-            <a:spLocks xmlns:a="http://schemas.openxmlformats.org/drawingml/2006/main" noGrp="1"/>
-          </p:cNvSpPr>
-          <p:nvPr/>
-        </p:nvSpPr>
-        <p:spPr>
-          <a:xfrm xmlns:a="http://schemas.openxmlformats.org/drawingml/2006/main">
-            <a:off x="5562600" y="4114800"/>
-            <a:ext cx="3429000" cy="742950"/>
-          </a:xfrm>
-          <a:prstGeom xmlns:a="http://schemas.openxmlformats.org/drawingml/2006/main" prst="rect">
-            <a:avLst/>
-          </a:prstGeom>
-          <a:solidFill xmlns:a="http://schemas.openxmlformats.org/drawingml/2006/main">
-            <a:srgbClr val="FFFFFF"/>
-          </a:solidFill>
-          <a:ln xmlns:a="http://schemas.openxmlformats.org/drawingml/2006/main" w="9525">
-            <a:solidFill>
-              <a:srgbClr val="B8BCC4"/>
-            </a:solidFill>
-            <a:prstDash val="solid"/>
-          </a:ln>
-        </p:spPr>
-      </p:sp>
-      <p:sp>
-        <p:nvSpPr>
-          <p:cNvPr id="32" name="">
-            <a:extLst xmlns:a="http://schemas.openxmlformats.org/drawingml/2006/main">
-              <a:ext uri="{FF2B5EF4-FFF2-40B4-BE49-F238E27FC236}">
-                <a16:creationId xmlns:a16="http://schemas.microsoft.com/office/drawing/2014/main" id="{B0218049-BF02-4D4E-819C-F0E9A2EA7EDE}"/>
-              </a:ext>
-            </a:extLst>
-          </p:cNvPr>
-          <p:cNvSpPr>
-            <a:spLocks xmlns:a="http://schemas.openxmlformats.org/drawingml/2006/main" noGrp="1"/>
-          </p:cNvSpPr>
-          <p:nvPr/>
-        </p:nvSpPr>
-        <p:spPr>
-          <a:xfrm xmlns:a="http://schemas.openxmlformats.org/drawingml/2006/main">
-            <a:off x="5695950" y="4248150"/>
-            <a:ext cx="3162300" cy="457200"/>
-          </a:xfrm>
-          <a:prstGeom xmlns:a="http://schemas.openxmlformats.org/drawingml/2006/main" prst="rect">
-            <a:avLst/>
-          </a:prstGeom>
-          <a:noFill xmlns:a="http://schemas.openxmlformats.org/drawingml/2006/main"/>
-          <a:ln xmlns:a="http://schemas.openxmlformats.org/drawingml/2006/main" w="0">
-            <a:noFill/>
-            <a:prstDash val="solid"/>
-          </a:ln>
-        </p:spPr>
-        <p:txBody>
-          <a:bodyPr xmlns:a="http://schemas.openxmlformats.org/drawingml/2006/main"/>
-          <a:lstStyle xmlns:a="http://schemas.openxmlformats.org/drawingml/2006/main"/>
-          <a:p xmlns:a="http://schemas.openxmlformats.org/drawingml/2006/main">
-            <a:pPr>
-              <a:defRPr sz="1200" b="0">
-                <a:solidFill>
-                  <a:srgbClr val="4B5563"/>
-                </a:solidFill>
-                <a:latin typeface="Helvetica Neue"/>
-                <a:ea typeface="Helvetica Neue"/>
-                <a:cs typeface="Helvetica Neue"/>
-              </a:defRPr>
-            </a:pPr>
-            <a:r>
-              <a:rPr sz="1200" b="0">
-                <a:solidFill>
-                  <a:srgbClr val="4B5563"/>
-                </a:solidFill>
-                <a:latin typeface="Helvetica Neue"/>
-                <a:ea typeface="Helvetica Neue"/>
-                <a:cs typeface="Helvetica Neue"/>
-              </a:rPr>
-              <a:t>Reuse same playbook with staging variables.</a:t>
-            </a:r>
-          </a:p>
-        </p:txBody>
-      </p:sp>
-      <p:sp>
-        <p:nvSpPr>
-          <p:cNvPr id="33" name="">
-            <a:extLst xmlns:a="http://schemas.openxmlformats.org/drawingml/2006/main">
-              <a:ext uri="{FF2B5EF4-FFF2-40B4-BE49-F238E27FC236}">
-                <a16:creationId xmlns:a16="http://schemas.microsoft.com/office/drawing/2014/main" id="{2A9E9EA4-7D0E-4AF0-81DB-50D9B1D83CAA}"/>
-              </a:ext>
-            </a:extLst>
-          </p:cNvPr>
-          <p:cNvSpPr>
-            <a:spLocks xmlns:a="http://schemas.openxmlformats.org/drawingml/2006/main" noGrp="1"/>
-          </p:cNvSpPr>
-          <p:nvPr/>
-        </p:nvSpPr>
-        <p:spPr>
-          <a:xfrm xmlns:a="http://schemas.openxmlformats.org/drawingml/2006/main">
-            <a:off x="8991600" y="4114800"/>
-            <a:ext cx="2381250" cy="742950"/>
-          </a:xfrm>
-          <a:prstGeom xmlns:a="http://schemas.openxmlformats.org/drawingml/2006/main" prst="rect">
-            <a:avLst/>
-          </a:prstGeom>
-          <a:solidFill xmlns:a="http://schemas.openxmlformats.org/drawingml/2006/main">
-            <a:srgbClr val="FFFFFF"/>
-          </a:solidFill>
-          <a:ln xmlns:a="http://schemas.openxmlformats.org/drawingml/2006/main" w="9525">
-            <a:solidFill>
-              <a:srgbClr val="B8BCC4"/>
-            </a:solidFill>
-            <a:prstDash val="solid"/>
-          </a:ln>
-        </p:spPr>
-      </p:sp>
-      <p:sp>
-        <p:nvSpPr>
-          <p:cNvPr id="34" name="">
-            <a:extLst xmlns:a="http://schemas.openxmlformats.org/drawingml/2006/main">
-              <a:ext uri="{FF2B5EF4-FFF2-40B4-BE49-F238E27FC236}">
-                <a16:creationId xmlns:a16="http://schemas.microsoft.com/office/drawing/2014/main" id="{3D763E54-CA92-4E3C-BBE8-F439008ECABF}"/>
-              </a:ext>
-            </a:extLst>
-          </p:cNvPr>
-          <p:cNvSpPr>
-            <a:spLocks xmlns:a="http://schemas.openxmlformats.org/drawingml/2006/main" noGrp="1"/>
-          </p:cNvSpPr>
-          <p:nvPr/>
-        </p:nvSpPr>
-        <p:spPr>
-          <a:xfrm xmlns:a="http://schemas.openxmlformats.org/drawingml/2006/main">
-            <a:off x="9124950" y="4248150"/>
-            <a:ext cx="2114550" cy="457200"/>
-          </a:xfrm>
-          <a:prstGeom xmlns:a="http://schemas.openxmlformats.org/drawingml/2006/main" prst="rect">
-            <a:avLst/>
-          </a:prstGeom>
-          <a:noFill xmlns:a="http://schemas.openxmlformats.org/drawingml/2006/main"/>
-          <a:ln xmlns:a="http://schemas.openxmlformats.org/drawingml/2006/main" w="0">
-            <a:noFill/>
-            <a:prstDash val="solid"/>
-          </a:ln>
-        </p:spPr>
-        <p:txBody>
-          <a:bodyPr xmlns:a="http://schemas.openxmlformats.org/drawingml/2006/main"/>
-          <a:lstStyle xmlns:a="http://schemas.openxmlformats.org/drawingml/2006/main"/>
-          <a:p xmlns:a="http://schemas.openxmlformats.org/drawingml/2006/main">
-            <a:pPr>
-              <a:defRPr sz="1200" b="0">
-                <a:solidFill>
-                  <a:srgbClr val="4B5563"/>
-                </a:solidFill>
-                <a:latin typeface="Helvetica Neue"/>
-                <a:ea typeface="Helvetica Neue"/>
-                <a:cs typeface="Helvetica Neue"/>
-              </a:defRPr>
-            </a:pPr>
-            <a:r>
-              <a:rPr sz="1200" b="0">
-                <a:solidFill>
-                  <a:srgbClr val="4B5563"/>
-                </a:solidFill>
-                <a:latin typeface="Helvetica Neue"/>
-                <a:ea typeface="Helvetica Neue"/>
-                <a:cs typeface="Helvetica Neue"/>
-              </a:rPr>
-              <a:t>Same logic, new target.</a:t>
-            </a:r>
-          </a:p>
-        </p:txBody>
-      </p:sp>
-      <p:sp>
-        <p:nvSpPr>
-          <p:cNvPr id="35" name="">
-            <a:extLst xmlns:a="http://schemas.openxmlformats.org/drawingml/2006/main">
-              <a:ext uri="{FF2B5EF4-FFF2-40B4-BE49-F238E27FC236}">
-                <a16:creationId xmlns:a16="http://schemas.microsoft.com/office/drawing/2014/main" id="{44E6E708-CF7D-4BF8-B77D-C2695A782502}"/>
-              </a:ext>
-            </a:extLst>
-          </p:cNvPr>
-          <p:cNvSpPr>
-            <a:spLocks xmlns:a="http://schemas.openxmlformats.org/drawingml/2006/main" noGrp="1"/>
-          </p:cNvSpPr>
-          <p:nvPr/>
-        </p:nvSpPr>
-        <p:spPr>
-          <a:xfrm xmlns:a="http://schemas.openxmlformats.org/drawingml/2006/main">
-            <a:off x="514350" y="4857750"/>
-            <a:ext cx="1809750" cy="742950"/>
-          </a:xfrm>
-          <a:prstGeom xmlns:a="http://schemas.openxmlformats.org/drawingml/2006/main" prst="rect">
-            <a:avLst/>
-          </a:prstGeom>
-          <a:solidFill xmlns:a="http://schemas.openxmlformats.org/drawingml/2006/main">
-            <a:srgbClr val="F6F7F9"/>
-          </a:solidFill>
-          <a:ln xmlns:a="http://schemas.openxmlformats.org/drawingml/2006/main" w="9525">
-            <a:solidFill>
-              <a:srgbClr val="B8BCC4"/>
-            </a:solidFill>
-            <a:prstDash val="solid"/>
-          </a:ln>
-        </p:spPr>
-      </p:sp>
-      <p:sp>
-        <p:nvSpPr>
-          <p:cNvPr id="36" name="">
-            <a:extLst xmlns:a="http://schemas.openxmlformats.org/drawingml/2006/main">
-              <a:ext uri="{FF2B5EF4-FFF2-40B4-BE49-F238E27FC236}">
-                <a16:creationId xmlns:a16="http://schemas.microsoft.com/office/drawing/2014/main" id="{0E5C9514-01B7-442F-906C-03A4176292C8}"/>
-              </a:ext>
-            </a:extLst>
-          </p:cNvPr>
-          <p:cNvSpPr>
-            <a:spLocks xmlns:a="http://schemas.openxmlformats.org/drawingml/2006/main" noGrp="1"/>
-          </p:cNvSpPr>
-          <p:nvPr/>
-        </p:nvSpPr>
-        <p:spPr>
-          <a:xfrm xmlns:a="http://schemas.openxmlformats.org/drawingml/2006/main">
-            <a:off x="647700" y="4991100"/>
-            <a:ext cx="1543050" cy="457200"/>
-          </a:xfrm>
-          <a:prstGeom xmlns:a="http://schemas.openxmlformats.org/drawingml/2006/main" prst="rect">
-            <a:avLst/>
-          </a:prstGeom>
-          <a:noFill xmlns:a="http://schemas.openxmlformats.org/drawingml/2006/main"/>
-          <a:ln xmlns:a="http://schemas.openxmlformats.org/drawingml/2006/main" w="0">
-            <a:noFill/>
-            <a:prstDash val="solid"/>
-          </a:ln>
-        </p:spPr>
-        <p:txBody>
-          <a:bodyPr xmlns:a="http://schemas.openxmlformats.org/drawingml/2006/main"/>
-          <a:lstStyle xmlns:a="http://schemas.openxmlformats.org/drawingml/2006/main"/>
-          <a:p xmlns:a="http://schemas.openxmlformats.org/drawingml/2006/main">
-            <a:pPr>
-              <a:defRPr sz="1350" b="1">
-                <a:solidFill>
-                  <a:srgbClr val="000000"/>
-                </a:solidFill>
-                <a:latin typeface="Helvetica Neue"/>
-                <a:ea typeface="Helvetica Neue"/>
-                <a:cs typeface="Helvetica Neue"/>
-              </a:defRPr>
-            </a:pPr>
-            <a:r>
-              <a:rPr sz="1350" b="1">
-                <a:solidFill>
-                  <a:srgbClr val="000000"/>
-                </a:solidFill>
-                <a:latin typeface="Helvetica Neue"/>
-                <a:ea typeface="Helvetica Neue"/>
-                <a:cs typeface="Helvetica Neue"/>
-              </a:rPr>
-              <a:t>Release gate</a:t>
-            </a:r>
-          </a:p>
-        </p:txBody>
-      </p:sp>
-      <p:sp>
-        <p:nvSpPr>
-          <p:cNvPr id="37" name="">
-            <a:extLst xmlns:a="http://schemas.openxmlformats.org/drawingml/2006/main">
-              <a:ext uri="{FF2B5EF4-FFF2-40B4-BE49-F238E27FC236}">
-                <a16:creationId xmlns:a16="http://schemas.microsoft.com/office/drawing/2014/main" id="{5BFC8CCA-F670-451E-B104-F18B206F1599}"/>
-              </a:ext>
-            </a:extLst>
-          </p:cNvPr>
-          <p:cNvSpPr>
-            <a:spLocks xmlns:a="http://schemas.openxmlformats.org/drawingml/2006/main" noGrp="1"/>
-          </p:cNvSpPr>
-          <p:nvPr/>
-        </p:nvSpPr>
-        <p:spPr>
-          <a:xfrm xmlns:a="http://schemas.openxmlformats.org/drawingml/2006/main">
-            <a:off x="2324100" y="4857750"/>
-            <a:ext cx="3238500" cy="742950"/>
-          </a:xfrm>
-          <a:prstGeom xmlns:a="http://schemas.openxmlformats.org/drawingml/2006/main" prst="rect">
-            <a:avLst/>
-          </a:prstGeom>
-          <a:solidFill xmlns:a="http://schemas.openxmlformats.org/drawingml/2006/main">
-            <a:srgbClr val="F6F7F9"/>
-          </a:solidFill>
-          <a:ln xmlns:a="http://schemas.openxmlformats.org/drawingml/2006/main" w="9525">
-            <a:solidFill>
-              <a:srgbClr val="B8BCC4"/>
-            </a:solidFill>
-            <a:prstDash val="solid"/>
-          </a:ln>
-        </p:spPr>
-      </p:sp>
-      <p:sp>
-        <p:nvSpPr>
-          <p:cNvPr id="38" name="">
-            <a:extLst xmlns:a="http://schemas.openxmlformats.org/drawingml/2006/main">
-              <a:ext uri="{FF2B5EF4-FFF2-40B4-BE49-F238E27FC236}">
-                <a16:creationId xmlns:a16="http://schemas.microsoft.com/office/drawing/2014/main" id="{EA20B70B-267D-4982-A52A-0B1D0FE1A053}"/>
-              </a:ext>
-            </a:extLst>
-          </p:cNvPr>
-          <p:cNvSpPr>
-            <a:spLocks xmlns:a="http://schemas.openxmlformats.org/drawingml/2006/main" noGrp="1"/>
-          </p:cNvSpPr>
-          <p:nvPr/>
-        </p:nvSpPr>
-        <p:spPr>
-          <a:xfrm xmlns:a="http://schemas.openxmlformats.org/drawingml/2006/main">
-            <a:off x="2457450" y="4991100"/>
-            <a:ext cx="2971800" cy="457200"/>
-          </a:xfrm>
-          <a:prstGeom xmlns:a="http://schemas.openxmlformats.org/drawingml/2006/main" prst="rect">
-            <a:avLst/>
-          </a:prstGeom>
-          <a:noFill xmlns:a="http://schemas.openxmlformats.org/drawingml/2006/main"/>
-          <a:ln xmlns:a="http://schemas.openxmlformats.org/drawingml/2006/main" w="0">
-            <a:noFill/>
-            <a:prstDash val="solid"/>
-          </a:ln>
-        </p:spPr>
-        <p:txBody>
-          <a:bodyPr xmlns:a="http://schemas.openxmlformats.org/drawingml/2006/main"/>
-          <a:lstStyle xmlns:a="http://schemas.openxmlformats.org/drawingml/2006/main"/>
-          <a:p xmlns:a="http://schemas.openxmlformats.org/drawingml/2006/main">
-            <a:pPr>
-              <a:defRPr sz="1200" b="0">
-                <a:solidFill>
-                  <a:srgbClr val="4B5563"/>
-                </a:solidFill>
-                <a:latin typeface="Helvetica Neue"/>
-                <a:ea typeface="Helvetica Neue"/>
-                <a:cs typeface="Helvetica Neue"/>
-              </a:defRPr>
-            </a:pPr>
-            <a:r>
-              <a:rPr sz="1200" b="0">
-                <a:solidFill>
-                  <a:srgbClr val="4B5563"/>
-                </a:solidFill>
-                <a:latin typeface="Helvetica Neue"/>
-                <a:ea typeface="Helvetica Neue"/>
-                <a:cs typeface="Helvetica Neue"/>
-              </a:rPr>
-              <a:t>Explain failure signals and next fixes.</a:t>
-            </a:r>
-          </a:p>
-        </p:txBody>
-      </p:sp>
-      <p:sp>
-        <p:nvSpPr>
-          <p:cNvPr id="39" name="">
-            <a:extLst xmlns:a="http://schemas.openxmlformats.org/drawingml/2006/main">
-              <a:ext uri="{FF2B5EF4-FFF2-40B4-BE49-F238E27FC236}">
-                <a16:creationId xmlns:a16="http://schemas.microsoft.com/office/drawing/2014/main" id="{8C8D7813-D3B5-4384-8AD7-32AF8D79F7F4}"/>
-              </a:ext>
-            </a:extLst>
-          </p:cNvPr>
-          <p:cNvSpPr>
-            <a:spLocks xmlns:a="http://schemas.openxmlformats.org/drawingml/2006/main" noGrp="1"/>
-          </p:cNvSpPr>
-          <p:nvPr/>
-        </p:nvSpPr>
-        <p:spPr>
-          <a:xfrm xmlns:a="http://schemas.openxmlformats.org/drawingml/2006/main">
-            <a:off x="5562600" y="4857750"/>
-            <a:ext cx="3429000" cy="742950"/>
-          </a:xfrm>
-          <a:prstGeom xmlns:a="http://schemas.openxmlformats.org/drawingml/2006/main" prst="rect">
-            <a:avLst/>
-          </a:prstGeom>
-          <a:solidFill xmlns:a="http://schemas.openxmlformats.org/drawingml/2006/main">
-            <a:srgbClr val="F6F7F9"/>
-          </a:solidFill>
-          <a:ln xmlns:a="http://schemas.openxmlformats.org/drawingml/2006/main" w="9525">
-            <a:solidFill>
-              <a:srgbClr val="B8BCC4"/>
-            </a:solidFill>
-            <a:prstDash val="solid"/>
-          </a:ln>
-        </p:spPr>
-      </p:sp>
-      <p:sp>
-        <p:nvSpPr>
-          <p:cNvPr id="40" name="">
-            <a:extLst xmlns:a="http://schemas.openxmlformats.org/drawingml/2006/main">
-              <a:ext uri="{FF2B5EF4-FFF2-40B4-BE49-F238E27FC236}">
-                <a16:creationId xmlns:a16="http://schemas.microsoft.com/office/drawing/2014/main" id="{D90D92B4-62C1-4CF7-BC87-6921074176B2}"/>
-              </a:ext>
-            </a:extLst>
-          </p:cNvPr>
-          <p:cNvSpPr>
-            <a:spLocks xmlns:a="http://schemas.openxmlformats.org/drawingml/2006/main" noGrp="1"/>
-          </p:cNvSpPr>
-          <p:nvPr/>
-        </p:nvSpPr>
-        <p:spPr>
-          <a:xfrm xmlns:a="http://schemas.openxmlformats.org/drawingml/2006/main">
-            <a:off x="5695950" y="4991100"/>
-            <a:ext cx="3162300" cy="457200"/>
-          </a:xfrm>
-          <a:prstGeom xmlns:a="http://schemas.openxmlformats.org/drawingml/2006/main" prst="rect">
-            <a:avLst/>
-          </a:prstGeom>
-          <a:noFill xmlns:a="http://schemas.openxmlformats.org/drawingml/2006/main"/>
-          <a:ln xmlns:a="http://schemas.openxmlformats.org/drawingml/2006/main" w="0">
-            <a:noFill/>
-            <a:prstDash val="solid"/>
-          </a:ln>
-        </p:spPr>
-        <p:txBody>
-          <a:bodyPr xmlns:a="http://schemas.openxmlformats.org/drawingml/2006/main"/>
-          <a:lstStyle xmlns:a="http://schemas.openxmlformats.org/drawingml/2006/main"/>
-          <a:p xmlns:a="http://schemas.openxmlformats.org/drawingml/2006/main">
-            <a:pPr>
-              <a:defRPr sz="1200" b="0">
-                <a:solidFill>
-                  <a:srgbClr val="4B5563"/>
-                </a:solidFill>
-                <a:latin typeface="Helvetica Neue"/>
-                <a:ea typeface="Helvetica Neue"/>
-                <a:cs typeface="Helvetica Neue"/>
-              </a:defRPr>
-            </a:pPr>
-            <a:r>
-              <a:rPr sz="1200" b="0">
-                <a:solidFill>
-                  <a:srgbClr val="4B5563"/>
-                </a:solidFill>
-                <a:latin typeface="Helvetica Neue"/>
-                <a:ea typeface="Helvetica Neue"/>
-                <a:cs typeface="Helvetica Neue"/>
-              </a:rPr>
-              <a:t>Verify endpoints and Container App revision health.</a:t>
-            </a:r>
-          </a:p>
-        </p:txBody>
-      </p:sp>
-      <p:sp>
-        <p:nvSpPr>
-          <p:cNvPr id="41" name="">
-            <a:extLst xmlns:a="http://schemas.openxmlformats.org/drawingml/2006/main">
-              <a:ext uri="{FF2B5EF4-FFF2-40B4-BE49-F238E27FC236}">
-                <a16:creationId xmlns:a16="http://schemas.microsoft.com/office/drawing/2014/main" id="{08E8D289-9BA3-47D5-8E08-3A0B2409A332}"/>
-              </a:ext>
-            </a:extLst>
-          </p:cNvPr>
-          <p:cNvSpPr>
-            <a:spLocks xmlns:a="http://schemas.openxmlformats.org/drawingml/2006/main" noGrp="1"/>
-          </p:cNvSpPr>
-          <p:nvPr/>
-        </p:nvSpPr>
-        <p:spPr>
-          <a:xfrm xmlns:a="http://schemas.openxmlformats.org/drawingml/2006/main">
-            <a:off x="8991600" y="4857750"/>
-            <a:ext cx="2381250" cy="742950"/>
-          </a:xfrm>
-          <a:prstGeom xmlns:a="http://schemas.openxmlformats.org/drawingml/2006/main" prst="rect">
-            <a:avLst/>
-          </a:prstGeom>
-          <a:solidFill xmlns:a="http://schemas.openxmlformats.org/drawingml/2006/main">
-            <a:srgbClr val="F6F7F9"/>
-          </a:solidFill>
-          <a:ln xmlns:a="http://schemas.openxmlformats.org/drawingml/2006/main" w="9525">
-            <a:solidFill>
-              <a:srgbClr val="B8BCC4"/>
-            </a:solidFill>
-            <a:prstDash val="solid"/>
-          </a:ln>
-        </p:spPr>
-      </p:sp>
-      <p:sp>
-        <p:nvSpPr>
-          <p:cNvPr id="42" name="">
-            <a:extLst xmlns:a="http://schemas.openxmlformats.org/drawingml/2006/main">
-              <a:ext uri="{FF2B5EF4-FFF2-40B4-BE49-F238E27FC236}">
-                <a16:creationId xmlns:a16="http://schemas.microsoft.com/office/drawing/2014/main" id="{F2066F18-BFF2-4152-BC2A-935AFA07B2A3}"/>
-              </a:ext>
-            </a:extLst>
-          </p:cNvPr>
-          <p:cNvSpPr>
-            <a:spLocks xmlns:a="http://schemas.openxmlformats.org/drawingml/2006/main" noGrp="1"/>
-          </p:cNvSpPr>
-          <p:nvPr/>
-        </p:nvSpPr>
-        <p:spPr>
-          <a:xfrm xmlns:a="http://schemas.openxmlformats.org/drawingml/2006/main">
-            <a:off x="9124950" y="4991100"/>
-            <a:ext cx="2114550" cy="457200"/>
-          </a:xfrm>
-          <a:prstGeom xmlns:a="http://schemas.openxmlformats.org/drawingml/2006/main" prst="rect">
-            <a:avLst/>
-          </a:prstGeom>
-          <a:noFill xmlns:a="http://schemas.openxmlformats.org/drawingml/2006/main"/>
-          <a:ln xmlns:a="http://schemas.openxmlformats.org/drawingml/2006/main" w="0">
-            <a:noFill/>
-            <a:prstDash val="solid"/>
-          </a:ln>
-        </p:spPr>
-        <p:txBody>
-          <a:bodyPr xmlns:a="http://schemas.openxmlformats.org/drawingml/2006/main"/>
-          <a:lstStyle xmlns:a="http://schemas.openxmlformats.org/drawingml/2006/main"/>
-          <a:p xmlns:a="http://schemas.openxmlformats.org/drawingml/2006/main">
-            <a:pPr>
-              <a:defRPr sz="1200" b="0">
-                <a:solidFill>
-                  <a:srgbClr val="4B5563"/>
-                </a:solidFill>
-                <a:latin typeface="Helvetica Neue"/>
-                <a:ea typeface="Helvetica Neue"/>
-                <a:cs typeface="Helvetica Neue"/>
-              </a:defRPr>
-            </a:pPr>
-            <a:r>
-              <a:rPr sz="1200" b="0">
-                <a:solidFill>
-                  <a:srgbClr val="4B5563"/>
-                </a:solidFill>
-                <a:latin typeface="Helvetica Neue"/>
-                <a:ea typeface="Helvetica Neue"/>
-                <a:cs typeface="Helvetica Neue"/>
-              </a:rPr>
-              <a:t>Evidence-backed approval.</a:t>
-            </a:r>
-          </a:p>
-        </p:txBody>
-      </p:sp>
-      <p:sp>
-        <p:nvSpPr>
-          <p:cNvPr id="43" name="">
-            <a:extLst xmlns:a="http://schemas.openxmlformats.org/drawingml/2006/main">
-              <a:ext uri="{FF2B5EF4-FFF2-40B4-BE49-F238E27FC236}">
-                <a16:creationId xmlns:a16="http://schemas.microsoft.com/office/drawing/2014/main" id="{625A5021-8B20-4F59-BFD0-CE9CA05EEC95}"/>
+                <a16:creationId xmlns:a16="http://schemas.microsoft.com/office/drawing/2014/main" id="{43CFF6F4-33B3-4A12-9BBB-E4BF68352150}"/>
               </a:ext>
             </a:extLst>
           </p:cNvPr>
@@ -7813,7 +6601,7 @@
     </p:spTree>
     <p:extLst>
       <p:ext uri="{BB962C8B-B14F-4D97-AF65-F5344CB8AC3E}">
-        <p14:creationId xmlns:p14="http://schemas.microsoft.com/office/powerpoint/2010/main" val="122361586"/>
+        <p14:creationId xmlns:p14="http://schemas.microsoft.com/office/powerpoint/2010/main" val="2029856798"/>
       </p:ext>
     </p:extLst>
   </p:cSld>
@@ -7841,10 +6629,10 @@
       </p:grpSpPr>
       <p:sp>
         <p:nvSpPr>
-          <p:cNvPr id="28" name="">
-            <a:extLst xmlns:a="http://schemas.openxmlformats.org/drawingml/2006/main">
-              <a:ext uri="{FF2B5EF4-FFF2-40B4-BE49-F238E27FC236}">
-                <a16:creationId xmlns:a16="http://schemas.microsoft.com/office/drawing/2014/main" id="{20CA6F54-1CAF-44DB-A2B4-D6F7043BD24F}"/>
+          <p:cNvPr id="44" name="">
+            <a:extLst xmlns:a="http://schemas.openxmlformats.org/drawingml/2006/main">
+              <a:ext uri="{FF2B5EF4-FFF2-40B4-BE49-F238E27FC236}">
+                <a16:creationId xmlns:a16="http://schemas.microsoft.com/office/drawing/2014/main" id="{9A94FBA0-CAB7-4217-B4FB-027EC4709B77}"/>
               </a:ext>
             </a:extLst>
           </p:cNvPr>
@@ -7890,7 +6678,7 @@
                 <a:ea typeface="Helvetica Neue"/>
                 <a:cs typeface="Helvetica Neue"/>
               </a:rPr>
-              <a:t>Use the pattern as a delivery operating model</a:t>
+              <a:t>In CI, Ansible becomes the promotion contract</a:t>
             </a:r>
           </a:p>
         </p:txBody>
@@ -7900,19 +6688,787 @@
           <p:cNvPr id="2" name="">
             <a:extLst xmlns:a="http://schemas.openxmlformats.org/drawingml/2006/main">
               <a:ext uri="{FF2B5EF4-FFF2-40B4-BE49-F238E27FC236}">
-                <a16:creationId xmlns:a16="http://schemas.microsoft.com/office/drawing/2014/main" id="{3CF2F39F-3041-45C6-A580-65F90DDB3497}"/>
-              </a:ext>
-            </a:extLst>
-          </p:cNvPr>
-          <p:cNvSpPr>
-            <a:spLocks xmlns:a="http://schemas.openxmlformats.org/drawingml/2006/main" noGrp="1"/>
-          </p:cNvSpPr>
-          <p:nvPr/>
-        </p:nvSpPr>
-        <p:spPr>
-          <a:xfrm xmlns:a="http://schemas.openxmlformats.org/drawingml/2006/main">
-            <a:off x="666750" y="1571625"/>
-            <a:ext cx="3429000" cy="3381375"/>
+                <a16:creationId xmlns:a16="http://schemas.microsoft.com/office/drawing/2014/main" id="{DDA30B60-4F95-4708-BD2E-2683DA732492}"/>
+              </a:ext>
+            </a:extLst>
+          </p:cNvPr>
+          <p:cNvSpPr>
+            <a:spLocks xmlns:a="http://schemas.openxmlformats.org/drawingml/2006/main" noGrp="1"/>
+          </p:cNvSpPr>
+          <p:nvPr/>
+        </p:nvSpPr>
+        <p:spPr>
+          <a:xfrm xmlns:a="http://schemas.openxmlformats.org/drawingml/2006/main">
+            <a:off x="390525" y="1162050"/>
+            <a:ext cx="9334500" cy="438150"/>
+          </a:xfrm>
+          <a:prstGeom xmlns:a="http://schemas.openxmlformats.org/drawingml/2006/main" prst="rect">
+            <a:avLst/>
+          </a:prstGeom>
+          <a:noFill xmlns:a="http://schemas.openxmlformats.org/drawingml/2006/main"/>
+          <a:ln xmlns:a="http://schemas.openxmlformats.org/drawingml/2006/main" w="0">
+            <a:noFill/>
+            <a:prstDash val="solid"/>
+          </a:ln>
+        </p:spPr>
+        <p:txBody>
+          <a:bodyPr xmlns:a="http://schemas.openxmlformats.org/drawingml/2006/main"/>
+          <a:lstStyle xmlns:a="http://schemas.openxmlformats.org/drawingml/2006/main"/>
+          <a:p xmlns:a="http://schemas.openxmlformats.org/drawingml/2006/main">
+            <a:pPr>
+              <a:defRPr sz="1725">
+                <a:solidFill>
+                  <a:srgbClr val="4B5563"/>
+                </a:solidFill>
+                <a:latin typeface="Helvetica Neue"/>
+                <a:ea typeface="Helvetica Neue"/>
+                <a:cs typeface="Helvetica Neue"/>
+              </a:defRPr>
+            </a:pPr>
+            <a:r>
+              <a:rPr sz="1725">
+                <a:solidFill>
+                  <a:srgbClr val="4B5563"/>
+                </a:solidFill>
+                <a:latin typeface="Helvetica Neue"/>
+                <a:ea typeface="Helvetica Neue"/>
+                <a:cs typeface="Helvetica Neue"/>
+              </a:rPr>
+              <a:t>AIDL improves the work entering the pipeline; Ansible standardizes what the pipeline actually does.</a:t>
+            </a:r>
+          </a:p>
+        </p:txBody>
+      </p:sp>
+      <p:sp>
+        <p:nvSpPr>
+          <p:cNvPr id="3" name="">
+            <a:extLst xmlns:a="http://schemas.openxmlformats.org/drawingml/2006/main">
+              <a:ext uri="{FF2B5EF4-FFF2-40B4-BE49-F238E27FC236}">
+                <a16:creationId xmlns:a16="http://schemas.microsoft.com/office/drawing/2014/main" id="{052B364C-32D2-4E97-A63F-D4B76BBDABCA}"/>
+              </a:ext>
+            </a:extLst>
+          </p:cNvPr>
+          <p:cNvSpPr>
+            <a:spLocks xmlns:a="http://schemas.openxmlformats.org/drawingml/2006/main" noGrp="1"/>
+          </p:cNvSpPr>
+          <p:nvPr/>
+        </p:nvSpPr>
+        <p:spPr>
+          <a:xfrm xmlns:a="http://schemas.openxmlformats.org/drawingml/2006/main">
+            <a:off x="514350" y="1885950"/>
+            <a:ext cx="1809750" cy="742950"/>
+          </a:xfrm>
+          <a:prstGeom xmlns:a="http://schemas.openxmlformats.org/drawingml/2006/main" prst="rect">
+            <a:avLst/>
+          </a:prstGeom>
+          <a:solidFill xmlns:a="http://schemas.openxmlformats.org/drawingml/2006/main">
+            <a:srgbClr val="EAF5FB"/>
+          </a:solidFill>
+          <a:ln xmlns:a="http://schemas.openxmlformats.org/drawingml/2006/main" w="9525">
+            <a:solidFill>
+              <a:srgbClr val="B8BCC4"/>
+            </a:solidFill>
+            <a:prstDash val="solid"/>
+          </a:ln>
+        </p:spPr>
+      </p:sp>
+      <p:sp>
+        <p:nvSpPr>
+          <p:cNvPr id="4" name="">
+            <a:extLst xmlns:a="http://schemas.openxmlformats.org/drawingml/2006/main">
+              <a:ext uri="{FF2B5EF4-FFF2-40B4-BE49-F238E27FC236}">
+                <a16:creationId xmlns:a16="http://schemas.microsoft.com/office/drawing/2014/main" id="{17CF53CA-B352-4EB8-A2E1-E50432D8951E}"/>
+              </a:ext>
+            </a:extLst>
+          </p:cNvPr>
+          <p:cNvSpPr>
+            <a:spLocks xmlns:a="http://schemas.openxmlformats.org/drawingml/2006/main" noGrp="1"/>
+          </p:cNvSpPr>
+          <p:nvPr/>
+        </p:nvSpPr>
+        <p:spPr>
+          <a:xfrm xmlns:a="http://schemas.openxmlformats.org/drawingml/2006/main">
+            <a:off x="647700" y="2019300"/>
+            <a:ext cx="1543050" cy="457200"/>
+          </a:xfrm>
+          <a:prstGeom xmlns:a="http://schemas.openxmlformats.org/drawingml/2006/main" prst="rect">
+            <a:avLst/>
+          </a:prstGeom>
+          <a:noFill xmlns:a="http://schemas.openxmlformats.org/drawingml/2006/main"/>
+          <a:ln xmlns:a="http://schemas.openxmlformats.org/drawingml/2006/main" w="0">
+            <a:noFill/>
+            <a:prstDash val="solid"/>
+          </a:ln>
+        </p:spPr>
+        <p:txBody>
+          <a:bodyPr xmlns:a="http://schemas.openxmlformats.org/drawingml/2006/main"/>
+          <a:lstStyle xmlns:a="http://schemas.openxmlformats.org/drawingml/2006/main"/>
+          <a:p xmlns:a="http://schemas.openxmlformats.org/drawingml/2006/main">
+            <a:pPr>
+              <a:defRPr sz="1350" b="1">
+                <a:solidFill>
+                  <a:srgbClr val="000000"/>
+                </a:solidFill>
+                <a:latin typeface="Helvetica Neue"/>
+                <a:ea typeface="Helvetica Neue"/>
+                <a:cs typeface="Helvetica Neue"/>
+              </a:defRPr>
+            </a:pPr>
+            <a:r>
+              <a:rPr sz="1350" b="1">
+                <a:solidFill>
+                  <a:srgbClr val="000000"/>
+                </a:solidFill>
+                <a:latin typeface="Helvetica Neue"/>
+                <a:ea typeface="Helvetica Neue"/>
+                <a:cs typeface="Helvetica Neue"/>
+              </a:rPr>
+              <a:t>CI moment</a:t>
+            </a:r>
+          </a:p>
+        </p:txBody>
+      </p:sp>
+      <p:sp>
+        <p:nvSpPr>
+          <p:cNvPr id="5" name="">
+            <a:extLst xmlns:a="http://schemas.openxmlformats.org/drawingml/2006/main">
+              <a:ext uri="{FF2B5EF4-FFF2-40B4-BE49-F238E27FC236}">
+                <a16:creationId xmlns:a16="http://schemas.microsoft.com/office/drawing/2014/main" id="{A9BC950A-E739-4A6D-B3F2-80B7290DB80C}"/>
+              </a:ext>
+            </a:extLst>
+          </p:cNvPr>
+          <p:cNvSpPr>
+            <a:spLocks xmlns:a="http://schemas.openxmlformats.org/drawingml/2006/main" noGrp="1"/>
+          </p:cNvSpPr>
+          <p:nvPr/>
+        </p:nvSpPr>
+        <p:spPr>
+          <a:xfrm xmlns:a="http://schemas.openxmlformats.org/drawingml/2006/main">
+            <a:off x="2324100" y="1885950"/>
+            <a:ext cx="3238500" cy="742950"/>
+          </a:xfrm>
+          <a:prstGeom xmlns:a="http://schemas.openxmlformats.org/drawingml/2006/main" prst="rect">
+            <a:avLst/>
+          </a:prstGeom>
+          <a:solidFill xmlns:a="http://schemas.openxmlformats.org/drawingml/2006/main">
+            <a:srgbClr val="EAF5FB"/>
+          </a:solidFill>
+          <a:ln xmlns:a="http://schemas.openxmlformats.org/drawingml/2006/main" w="9525">
+            <a:solidFill>
+              <a:srgbClr val="B8BCC4"/>
+            </a:solidFill>
+            <a:prstDash val="solid"/>
+          </a:ln>
+        </p:spPr>
+      </p:sp>
+      <p:sp>
+        <p:nvSpPr>
+          <p:cNvPr id="6" name="">
+            <a:extLst xmlns:a="http://schemas.openxmlformats.org/drawingml/2006/main">
+              <a:ext uri="{FF2B5EF4-FFF2-40B4-BE49-F238E27FC236}">
+                <a16:creationId xmlns:a16="http://schemas.microsoft.com/office/drawing/2014/main" id="{66039962-C211-44A9-B417-437E22775055}"/>
+              </a:ext>
+            </a:extLst>
+          </p:cNvPr>
+          <p:cNvSpPr>
+            <a:spLocks xmlns:a="http://schemas.openxmlformats.org/drawingml/2006/main" noGrp="1"/>
+          </p:cNvSpPr>
+          <p:nvPr/>
+        </p:nvSpPr>
+        <p:spPr>
+          <a:xfrm xmlns:a="http://schemas.openxmlformats.org/drawingml/2006/main">
+            <a:off x="2457450" y="2019300"/>
+            <a:ext cx="2971800" cy="457200"/>
+          </a:xfrm>
+          <a:prstGeom xmlns:a="http://schemas.openxmlformats.org/drawingml/2006/main" prst="rect">
+            <a:avLst/>
+          </a:prstGeom>
+          <a:noFill xmlns:a="http://schemas.openxmlformats.org/drawingml/2006/main"/>
+          <a:ln xmlns:a="http://schemas.openxmlformats.org/drawingml/2006/main" w="0">
+            <a:noFill/>
+            <a:prstDash val="solid"/>
+          </a:ln>
+        </p:spPr>
+        <p:txBody>
+          <a:bodyPr xmlns:a="http://schemas.openxmlformats.org/drawingml/2006/main"/>
+          <a:lstStyle xmlns:a="http://schemas.openxmlformats.org/drawingml/2006/main"/>
+          <a:p xmlns:a="http://schemas.openxmlformats.org/drawingml/2006/main">
+            <a:pPr>
+              <a:defRPr sz="1200" b="0">
+                <a:solidFill>
+                  <a:srgbClr val="4B5563"/>
+                </a:solidFill>
+                <a:latin typeface="Helvetica Neue"/>
+                <a:ea typeface="Helvetica Neue"/>
+                <a:cs typeface="Helvetica Neue"/>
+              </a:defRPr>
+            </a:pPr>
+            <a:r>
+              <a:rPr sz="1200" b="0">
+                <a:solidFill>
+                  <a:srgbClr val="4B5563"/>
+                </a:solidFill>
+                <a:latin typeface="Helvetica Neue"/>
+                <a:ea typeface="Helvetica Neue"/>
+                <a:cs typeface="Helvetica Neue"/>
+              </a:rPr>
+              <a:t>AIDL contribution</a:t>
+            </a:r>
+          </a:p>
+        </p:txBody>
+      </p:sp>
+      <p:sp>
+        <p:nvSpPr>
+          <p:cNvPr id="7" name="">
+            <a:extLst xmlns:a="http://schemas.openxmlformats.org/drawingml/2006/main">
+              <a:ext uri="{FF2B5EF4-FFF2-40B4-BE49-F238E27FC236}">
+                <a16:creationId xmlns:a16="http://schemas.microsoft.com/office/drawing/2014/main" id="{9B5F2CE8-4E11-4D30-A673-0C9F8B0B6E7C}"/>
+              </a:ext>
+            </a:extLst>
+          </p:cNvPr>
+          <p:cNvSpPr>
+            <a:spLocks xmlns:a="http://schemas.openxmlformats.org/drawingml/2006/main" noGrp="1"/>
+          </p:cNvSpPr>
+          <p:nvPr/>
+        </p:nvSpPr>
+        <p:spPr>
+          <a:xfrm xmlns:a="http://schemas.openxmlformats.org/drawingml/2006/main">
+            <a:off x="5562600" y="1885950"/>
+            <a:ext cx="3429000" cy="742950"/>
+          </a:xfrm>
+          <a:prstGeom xmlns:a="http://schemas.openxmlformats.org/drawingml/2006/main" prst="rect">
+            <a:avLst/>
+          </a:prstGeom>
+          <a:solidFill xmlns:a="http://schemas.openxmlformats.org/drawingml/2006/main">
+            <a:srgbClr val="EAF5FB"/>
+          </a:solidFill>
+          <a:ln xmlns:a="http://schemas.openxmlformats.org/drawingml/2006/main" w="9525">
+            <a:solidFill>
+              <a:srgbClr val="B8BCC4"/>
+            </a:solidFill>
+            <a:prstDash val="solid"/>
+          </a:ln>
+        </p:spPr>
+      </p:sp>
+      <p:sp>
+        <p:nvSpPr>
+          <p:cNvPr id="8" name="">
+            <a:extLst xmlns:a="http://schemas.openxmlformats.org/drawingml/2006/main">
+              <a:ext uri="{FF2B5EF4-FFF2-40B4-BE49-F238E27FC236}">
+                <a16:creationId xmlns:a16="http://schemas.microsoft.com/office/drawing/2014/main" id="{7908FA96-E591-4909-A85D-CB526B91458B}"/>
+              </a:ext>
+            </a:extLst>
+          </p:cNvPr>
+          <p:cNvSpPr>
+            <a:spLocks xmlns:a="http://schemas.openxmlformats.org/drawingml/2006/main" noGrp="1"/>
+          </p:cNvSpPr>
+          <p:nvPr/>
+        </p:nvSpPr>
+        <p:spPr>
+          <a:xfrm xmlns:a="http://schemas.openxmlformats.org/drawingml/2006/main">
+            <a:off x="5695950" y="2019300"/>
+            <a:ext cx="3162300" cy="457200"/>
+          </a:xfrm>
+          <a:prstGeom xmlns:a="http://schemas.openxmlformats.org/drawingml/2006/main" prst="rect">
+            <a:avLst/>
+          </a:prstGeom>
+          <a:noFill xmlns:a="http://schemas.openxmlformats.org/drawingml/2006/main"/>
+          <a:ln xmlns:a="http://schemas.openxmlformats.org/drawingml/2006/main" w="0">
+            <a:noFill/>
+            <a:prstDash val="solid"/>
+          </a:ln>
+        </p:spPr>
+        <p:txBody>
+          <a:bodyPr xmlns:a="http://schemas.openxmlformats.org/drawingml/2006/main"/>
+          <a:lstStyle xmlns:a="http://schemas.openxmlformats.org/drawingml/2006/main"/>
+          <a:p xmlns:a="http://schemas.openxmlformats.org/drawingml/2006/main">
+            <a:pPr>
+              <a:defRPr sz="1200" b="0">
+                <a:solidFill>
+                  <a:srgbClr val="4B5563"/>
+                </a:solidFill>
+                <a:latin typeface="Helvetica Neue"/>
+                <a:ea typeface="Helvetica Neue"/>
+                <a:cs typeface="Helvetica Neue"/>
+              </a:defRPr>
+            </a:pPr>
+            <a:r>
+              <a:rPr sz="1200" b="0">
+                <a:solidFill>
+                  <a:srgbClr val="4B5563"/>
+                </a:solidFill>
+                <a:latin typeface="Helvetica Neue"/>
+                <a:ea typeface="Helvetica Neue"/>
+                <a:cs typeface="Helvetica Neue"/>
+              </a:rPr>
+              <a:t>Ansible control</a:t>
+            </a:r>
+          </a:p>
+        </p:txBody>
+      </p:sp>
+      <p:sp>
+        <p:nvSpPr>
+          <p:cNvPr id="9" name="">
+            <a:extLst xmlns:a="http://schemas.openxmlformats.org/drawingml/2006/main">
+              <a:ext uri="{FF2B5EF4-FFF2-40B4-BE49-F238E27FC236}">
+                <a16:creationId xmlns:a16="http://schemas.microsoft.com/office/drawing/2014/main" id="{044DCAAF-BE24-49C2-86AE-DD8B06B3FECC}"/>
+              </a:ext>
+            </a:extLst>
+          </p:cNvPr>
+          <p:cNvSpPr>
+            <a:spLocks xmlns:a="http://schemas.openxmlformats.org/drawingml/2006/main" noGrp="1"/>
+          </p:cNvSpPr>
+          <p:nvPr/>
+        </p:nvSpPr>
+        <p:spPr>
+          <a:xfrm xmlns:a="http://schemas.openxmlformats.org/drawingml/2006/main">
+            <a:off x="8991600" y="1885950"/>
+            <a:ext cx="2381250" cy="742950"/>
+          </a:xfrm>
+          <a:prstGeom xmlns:a="http://schemas.openxmlformats.org/drawingml/2006/main" prst="rect">
+            <a:avLst/>
+          </a:prstGeom>
+          <a:solidFill xmlns:a="http://schemas.openxmlformats.org/drawingml/2006/main">
+            <a:srgbClr val="EAF5FB"/>
+          </a:solidFill>
+          <a:ln xmlns:a="http://schemas.openxmlformats.org/drawingml/2006/main" w="9525">
+            <a:solidFill>
+              <a:srgbClr val="B8BCC4"/>
+            </a:solidFill>
+            <a:prstDash val="solid"/>
+          </a:ln>
+        </p:spPr>
+      </p:sp>
+      <p:sp>
+        <p:nvSpPr>
+          <p:cNvPr id="10" name="">
+            <a:extLst xmlns:a="http://schemas.openxmlformats.org/drawingml/2006/main">
+              <a:ext uri="{FF2B5EF4-FFF2-40B4-BE49-F238E27FC236}">
+                <a16:creationId xmlns:a16="http://schemas.microsoft.com/office/drawing/2014/main" id="{95066C01-60D2-4CE4-A0A5-7B592488B6D2}"/>
+              </a:ext>
+            </a:extLst>
+          </p:cNvPr>
+          <p:cNvSpPr>
+            <a:spLocks xmlns:a="http://schemas.openxmlformats.org/drawingml/2006/main" noGrp="1"/>
+          </p:cNvSpPr>
+          <p:nvPr/>
+        </p:nvSpPr>
+        <p:spPr>
+          <a:xfrm xmlns:a="http://schemas.openxmlformats.org/drawingml/2006/main">
+            <a:off x="9124950" y="2019300"/>
+            <a:ext cx="2114550" cy="457200"/>
+          </a:xfrm>
+          <a:prstGeom xmlns:a="http://schemas.openxmlformats.org/drawingml/2006/main" prst="rect">
+            <a:avLst/>
+          </a:prstGeom>
+          <a:noFill xmlns:a="http://schemas.openxmlformats.org/drawingml/2006/main"/>
+          <a:ln xmlns:a="http://schemas.openxmlformats.org/drawingml/2006/main" w="0">
+            <a:noFill/>
+            <a:prstDash val="solid"/>
+          </a:ln>
+        </p:spPr>
+        <p:txBody>
+          <a:bodyPr xmlns:a="http://schemas.openxmlformats.org/drawingml/2006/main"/>
+          <a:lstStyle xmlns:a="http://schemas.openxmlformats.org/drawingml/2006/main"/>
+          <a:p xmlns:a="http://schemas.openxmlformats.org/drawingml/2006/main">
+            <a:pPr>
+              <a:defRPr sz="1200" b="0">
+                <a:solidFill>
+                  <a:srgbClr val="4B5563"/>
+                </a:solidFill>
+                <a:latin typeface="Helvetica Neue"/>
+                <a:ea typeface="Helvetica Neue"/>
+                <a:cs typeface="Helvetica Neue"/>
+              </a:defRPr>
+            </a:pPr>
+            <a:r>
+              <a:rPr sz="1200" b="0">
+                <a:solidFill>
+                  <a:srgbClr val="4B5563"/>
+                </a:solidFill>
+                <a:latin typeface="Helvetica Neue"/>
+                <a:ea typeface="Helvetica Neue"/>
+                <a:cs typeface="Helvetica Neue"/>
+              </a:rPr>
+              <a:t>Delivery outcome</a:t>
+            </a:r>
+          </a:p>
+        </p:txBody>
+      </p:sp>
+      <p:sp>
+        <p:nvSpPr>
+          <p:cNvPr id="11" name="">
+            <a:extLst xmlns:a="http://schemas.openxmlformats.org/drawingml/2006/main">
+              <a:ext uri="{FF2B5EF4-FFF2-40B4-BE49-F238E27FC236}">
+                <a16:creationId xmlns:a16="http://schemas.microsoft.com/office/drawing/2014/main" id="{A51602AE-B1B2-4FAC-AB02-13F50EB909D2}"/>
+              </a:ext>
+            </a:extLst>
+          </p:cNvPr>
+          <p:cNvSpPr>
+            <a:spLocks xmlns:a="http://schemas.openxmlformats.org/drawingml/2006/main" noGrp="1"/>
+          </p:cNvSpPr>
+          <p:nvPr/>
+        </p:nvSpPr>
+        <p:spPr>
+          <a:xfrm xmlns:a="http://schemas.openxmlformats.org/drawingml/2006/main">
+            <a:off x="514350" y="2628900"/>
+            <a:ext cx="1809750" cy="742950"/>
+          </a:xfrm>
+          <a:prstGeom xmlns:a="http://schemas.openxmlformats.org/drawingml/2006/main" prst="rect">
+            <a:avLst/>
+          </a:prstGeom>
+          <a:solidFill xmlns:a="http://schemas.openxmlformats.org/drawingml/2006/main">
+            <a:srgbClr val="FFFFFF"/>
+          </a:solidFill>
+          <a:ln xmlns:a="http://schemas.openxmlformats.org/drawingml/2006/main" w="9525">
+            <a:solidFill>
+              <a:srgbClr val="B8BCC4"/>
+            </a:solidFill>
+            <a:prstDash val="solid"/>
+          </a:ln>
+        </p:spPr>
+      </p:sp>
+      <p:sp>
+        <p:nvSpPr>
+          <p:cNvPr id="12" name="">
+            <a:extLst xmlns:a="http://schemas.openxmlformats.org/drawingml/2006/main">
+              <a:ext uri="{FF2B5EF4-FFF2-40B4-BE49-F238E27FC236}">
+                <a16:creationId xmlns:a16="http://schemas.microsoft.com/office/drawing/2014/main" id="{B551230F-F025-45E7-980F-6FA077E9EFB2}"/>
+              </a:ext>
+            </a:extLst>
+          </p:cNvPr>
+          <p:cNvSpPr>
+            <a:spLocks xmlns:a="http://schemas.openxmlformats.org/drawingml/2006/main" noGrp="1"/>
+          </p:cNvSpPr>
+          <p:nvPr/>
+        </p:nvSpPr>
+        <p:spPr>
+          <a:xfrm xmlns:a="http://schemas.openxmlformats.org/drawingml/2006/main">
+            <a:off x="647700" y="2762250"/>
+            <a:ext cx="1543050" cy="457200"/>
+          </a:xfrm>
+          <a:prstGeom xmlns:a="http://schemas.openxmlformats.org/drawingml/2006/main" prst="rect">
+            <a:avLst/>
+          </a:prstGeom>
+          <a:noFill xmlns:a="http://schemas.openxmlformats.org/drawingml/2006/main"/>
+          <a:ln xmlns:a="http://schemas.openxmlformats.org/drawingml/2006/main" w="0">
+            <a:noFill/>
+            <a:prstDash val="solid"/>
+          </a:ln>
+        </p:spPr>
+        <p:txBody>
+          <a:bodyPr xmlns:a="http://schemas.openxmlformats.org/drawingml/2006/main"/>
+          <a:lstStyle xmlns:a="http://schemas.openxmlformats.org/drawingml/2006/main"/>
+          <a:p xmlns:a="http://schemas.openxmlformats.org/drawingml/2006/main">
+            <a:pPr>
+              <a:defRPr sz="1350" b="1">
+                <a:solidFill>
+                  <a:srgbClr val="000000"/>
+                </a:solidFill>
+                <a:latin typeface="Helvetica Neue"/>
+                <a:ea typeface="Helvetica Neue"/>
+                <a:cs typeface="Helvetica Neue"/>
+              </a:defRPr>
+            </a:pPr>
+            <a:r>
+              <a:rPr sz="1350" b="1">
+                <a:solidFill>
+                  <a:srgbClr val="000000"/>
+                </a:solidFill>
+                <a:latin typeface="Helvetica Neue"/>
+                <a:ea typeface="Helvetica Neue"/>
+                <a:cs typeface="Helvetica Neue"/>
+              </a:rPr>
+              <a:t>Pull request</a:t>
+            </a:r>
+          </a:p>
+        </p:txBody>
+      </p:sp>
+      <p:sp>
+        <p:nvSpPr>
+          <p:cNvPr id="13" name="">
+            <a:extLst xmlns:a="http://schemas.openxmlformats.org/drawingml/2006/main">
+              <a:ext uri="{FF2B5EF4-FFF2-40B4-BE49-F238E27FC236}">
+                <a16:creationId xmlns:a16="http://schemas.microsoft.com/office/drawing/2014/main" id="{F85A90C1-0541-4220-929F-D9FE980601E6}"/>
+              </a:ext>
+            </a:extLst>
+          </p:cNvPr>
+          <p:cNvSpPr>
+            <a:spLocks xmlns:a="http://schemas.openxmlformats.org/drawingml/2006/main" noGrp="1"/>
+          </p:cNvSpPr>
+          <p:nvPr/>
+        </p:nvSpPr>
+        <p:spPr>
+          <a:xfrm xmlns:a="http://schemas.openxmlformats.org/drawingml/2006/main">
+            <a:off x="2324100" y="2628900"/>
+            <a:ext cx="3238500" cy="742950"/>
+          </a:xfrm>
+          <a:prstGeom xmlns:a="http://schemas.openxmlformats.org/drawingml/2006/main" prst="rect">
+            <a:avLst/>
+          </a:prstGeom>
+          <a:solidFill xmlns:a="http://schemas.openxmlformats.org/drawingml/2006/main">
+            <a:srgbClr val="FFFFFF"/>
+          </a:solidFill>
+          <a:ln xmlns:a="http://schemas.openxmlformats.org/drawingml/2006/main" w="9525">
+            <a:solidFill>
+              <a:srgbClr val="B8BCC4"/>
+            </a:solidFill>
+            <a:prstDash val="solid"/>
+          </a:ln>
+        </p:spPr>
+      </p:sp>
+      <p:sp>
+        <p:nvSpPr>
+          <p:cNvPr id="14" name="">
+            <a:extLst xmlns:a="http://schemas.openxmlformats.org/drawingml/2006/main">
+              <a:ext uri="{FF2B5EF4-FFF2-40B4-BE49-F238E27FC236}">
+                <a16:creationId xmlns:a16="http://schemas.microsoft.com/office/drawing/2014/main" id="{B3332AB1-102E-4E6F-AA39-320292F4182E}"/>
+              </a:ext>
+            </a:extLst>
+          </p:cNvPr>
+          <p:cNvSpPr>
+            <a:spLocks xmlns:a="http://schemas.openxmlformats.org/drawingml/2006/main" noGrp="1"/>
+          </p:cNvSpPr>
+          <p:nvPr/>
+        </p:nvSpPr>
+        <p:spPr>
+          <a:xfrm xmlns:a="http://schemas.openxmlformats.org/drawingml/2006/main">
+            <a:off x="2457450" y="2762250"/>
+            <a:ext cx="2971800" cy="457200"/>
+          </a:xfrm>
+          <a:prstGeom xmlns:a="http://schemas.openxmlformats.org/drawingml/2006/main" prst="rect">
+            <a:avLst/>
+          </a:prstGeom>
+          <a:noFill xmlns:a="http://schemas.openxmlformats.org/drawingml/2006/main"/>
+          <a:ln xmlns:a="http://schemas.openxmlformats.org/drawingml/2006/main" w="0">
+            <a:noFill/>
+            <a:prstDash val="solid"/>
+          </a:ln>
+        </p:spPr>
+        <p:txBody>
+          <a:bodyPr xmlns:a="http://schemas.openxmlformats.org/drawingml/2006/main"/>
+          <a:lstStyle xmlns:a="http://schemas.openxmlformats.org/drawingml/2006/main"/>
+          <a:p xmlns:a="http://schemas.openxmlformats.org/drawingml/2006/main">
+            <a:pPr>
+              <a:defRPr sz="1200" b="0">
+                <a:solidFill>
+                  <a:srgbClr val="4B5563"/>
+                </a:solidFill>
+                <a:latin typeface="Helvetica Neue"/>
+                <a:ea typeface="Helvetica Neue"/>
+                <a:cs typeface="Helvetica Neue"/>
+              </a:defRPr>
+            </a:pPr>
+            <a:r>
+              <a:rPr sz="1200" b="0">
+                <a:solidFill>
+                  <a:srgbClr val="4B5563"/>
+                </a:solidFill>
+                <a:latin typeface="Helvetica Neue"/>
+                <a:ea typeface="Helvetica Neue"/>
+                <a:cs typeface="Helvetica Neue"/>
+              </a:rPr>
+              <a:t>Generate criteria, risks, and test ideas.</a:t>
+            </a:r>
+          </a:p>
+        </p:txBody>
+      </p:sp>
+      <p:sp>
+        <p:nvSpPr>
+          <p:cNvPr id="15" name="">
+            <a:extLst xmlns:a="http://schemas.openxmlformats.org/drawingml/2006/main">
+              <a:ext uri="{FF2B5EF4-FFF2-40B4-BE49-F238E27FC236}">
+                <a16:creationId xmlns:a16="http://schemas.microsoft.com/office/drawing/2014/main" id="{9E2C7574-A17A-416B-A3B2-F6E61F5AE3FC}"/>
+              </a:ext>
+            </a:extLst>
+          </p:cNvPr>
+          <p:cNvSpPr>
+            <a:spLocks xmlns:a="http://schemas.openxmlformats.org/drawingml/2006/main" noGrp="1"/>
+          </p:cNvSpPr>
+          <p:nvPr/>
+        </p:nvSpPr>
+        <p:spPr>
+          <a:xfrm xmlns:a="http://schemas.openxmlformats.org/drawingml/2006/main">
+            <a:off x="5562600" y="2628900"/>
+            <a:ext cx="3429000" cy="742950"/>
+          </a:xfrm>
+          <a:prstGeom xmlns:a="http://schemas.openxmlformats.org/drawingml/2006/main" prst="rect">
+            <a:avLst/>
+          </a:prstGeom>
+          <a:solidFill xmlns:a="http://schemas.openxmlformats.org/drawingml/2006/main">
+            <a:srgbClr val="FFFFFF"/>
+          </a:solidFill>
+          <a:ln xmlns:a="http://schemas.openxmlformats.org/drawingml/2006/main" w="9525">
+            <a:solidFill>
+              <a:srgbClr val="B8BCC4"/>
+            </a:solidFill>
+            <a:prstDash val="solid"/>
+          </a:ln>
+        </p:spPr>
+      </p:sp>
+      <p:sp>
+        <p:nvSpPr>
+          <p:cNvPr id="16" name="">
+            <a:extLst xmlns:a="http://schemas.openxmlformats.org/drawingml/2006/main">
+              <a:ext uri="{FF2B5EF4-FFF2-40B4-BE49-F238E27FC236}">
+                <a16:creationId xmlns:a16="http://schemas.microsoft.com/office/drawing/2014/main" id="{178C26C8-EC8D-4E42-B4C4-17555CA6AF78}"/>
+              </a:ext>
+            </a:extLst>
+          </p:cNvPr>
+          <p:cNvSpPr>
+            <a:spLocks xmlns:a="http://schemas.openxmlformats.org/drawingml/2006/main" noGrp="1"/>
+          </p:cNvSpPr>
+          <p:nvPr/>
+        </p:nvSpPr>
+        <p:spPr>
+          <a:xfrm xmlns:a="http://schemas.openxmlformats.org/drawingml/2006/main">
+            <a:off x="5695950" y="2762250"/>
+            <a:ext cx="3162300" cy="457200"/>
+          </a:xfrm>
+          <a:prstGeom xmlns:a="http://schemas.openxmlformats.org/drawingml/2006/main" prst="rect">
+            <a:avLst/>
+          </a:prstGeom>
+          <a:noFill xmlns:a="http://schemas.openxmlformats.org/drawingml/2006/main"/>
+          <a:ln xmlns:a="http://schemas.openxmlformats.org/drawingml/2006/main" w="0">
+            <a:noFill/>
+            <a:prstDash val="solid"/>
+          </a:ln>
+        </p:spPr>
+        <p:txBody>
+          <a:bodyPr xmlns:a="http://schemas.openxmlformats.org/drawingml/2006/main"/>
+          <a:lstStyle xmlns:a="http://schemas.openxmlformats.org/drawingml/2006/main"/>
+          <a:p xmlns:a="http://schemas.openxmlformats.org/drawingml/2006/main">
+            <a:pPr>
+              <a:defRPr sz="1200" b="0">
+                <a:solidFill>
+                  <a:srgbClr val="4B5563"/>
+                </a:solidFill>
+                <a:latin typeface="Helvetica Neue"/>
+                <a:ea typeface="Helvetica Neue"/>
+                <a:cs typeface="Helvetica Neue"/>
+              </a:defRPr>
+            </a:pPr>
+            <a:r>
+              <a:rPr sz="1200" b="0">
+                <a:solidFill>
+                  <a:srgbClr val="4B5563"/>
+                </a:solidFill>
+                <a:latin typeface="Helvetica Neue"/>
+                <a:ea typeface="Helvetica Neue"/>
+                <a:cs typeface="Helvetica Neue"/>
+              </a:rPr>
+              <a:t>Run syntax, lint, and idempotency checks.</a:t>
+            </a:r>
+          </a:p>
+        </p:txBody>
+      </p:sp>
+      <p:sp>
+        <p:nvSpPr>
+          <p:cNvPr id="17" name="">
+            <a:extLst xmlns:a="http://schemas.openxmlformats.org/drawingml/2006/main">
+              <a:ext uri="{FF2B5EF4-FFF2-40B4-BE49-F238E27FC236}">
+                <a16:creationId xmlns:a16="http://schemas.microsoft.com/office/drawing/2014/main" id="{3BC0BB0D-5420-419F-8D4D-84FBE35BAD0D}"/>
+              </a:ext>
+            </a:extLst>
+          </p:cNvPr>
+          <p:cNvSpPr>
+            <a:spLocks xmlns:a="http://schemas.openxmlformats.org/drawingml/2006/main" noGrp="1"/>
+          </p:cNvSpPr>
+          <p:nvPr/>
+        </p:nvSpPr>
+        <p:spPr>
+          <a:xfrm xmlns:a="http://schemas.openxmlformats.org/drawingml/2006/main">
+            <a:off x="8991600" y="2628900"/>
+            <a:ext cx="2381250" cy="742950"/>
+          </a:xfrm>
+          <a:prstGeom xmlns:a="http://schemas.openxmlformats.org/drawingml/2006/main" prst="rect">
+            <a:avLst/>
+          </a:prstGeom>
+          <a:solidFill xmlns:a="http://schemas.openxmlformats.org/drawingml/2006/main">
+            <a:srgbClr val="FFFFFF"/>
+          </a:solidFill>
+          <a:ln xmlns:a="http://schemas.openxmlformats.org/drawingml/2006/main" w="9525">
+            <a:solidFill>
+              <a:srgbClr val="B8BCC4"/>
+            </a:solidFill>
+            <a:prstDash val="solid"/>
+          </a:ln>
+        </p:spPr>
+      </p:sp>
+      <p:sp>
+        <p:nvSpPr>
+          <p:cNvPr id="18" name="">
+            <a:extLst xmlns:a="http://schemas.openxmlformats.org/drawingml/2006/main">
+              <a:ext uri="{FF2B5EF4-FFF2-40B4-BE49-F238E27FC236}">
+                <a16:creationId xmlns:a16="http://schemas.microsoft.com/office/drawing/2014/main" id="{71F6C024-53D1-4E5D-9F7D-81D8BDAA25DC}"/>
+              </a:ext>
+            </a:extLst>
+          </p:cNvPr>
+          <p:cNvSpPr>
+            <a:spLocks xmlns:a="http://schemas.openxmlformats.org/drawingml/2006/main" noGrp="1"/>
+          </p:cNvSpPr>
+          <p:nvPr/>
+        </p:nvSpPr>
+        <p:spPr>
+          <a:xfrm xmlns:a="http://schemas.openxmlformats.org/drawingml/2006/main">
+            <a:off x="9124950" y="2762250"/>
+            <a:ext cx="2114550" cy="457200"/>
+          </a:xfrm>
+          <a:prstGeom xmlns:a="http://schemas.openxmlformats.org/drawingml/2006/main" prst="rect">
+            <a:avLst/>
+          </a:prstGeom>
+          <a:noFill xmlns:a="http://schemas.openxmlformats.org/drawingml/2006/main"/>
+          <a:ln xmlns:a="http://schemas.openxmlformats.org/drawingml/2006/main" w="0">
+            <a:noFill/>
+            <a:prstDash val="solid"/>
+          </a:ln>
+        </p:spPr>
+        <p:txBody>
+          <a:bodyPr xmlns:a="http://schemas.openxmlformats.org/drawingml/2006/main"/>
+          <a:lstStyle xmlns:a="http://schemas.openxmlformats.org/drawingml/2006/main"/>
+          <a:p xmlns:a="http://schemas.openxmlformats.org/drawingml/2006/main">
+            <a:pPr>
+              <a:defRPr sz="1200" b="0">
+                <a:solidFill>
+                  <a:srgbClr val="4B5563"/>
+                </a:solidFill>
+                <a:latin typeface="Helvetica Neue"/>
+                <a:ea typeface="Helvetica Neue"/>
+                <a:cs typeface="Helvetica Neue"/>
+              </a:defRPr>
+            </a:pPr>
+            <a:r>
+              <a:rPr sz="1200" b="0">
+                <a:solidFill>
+                  <a:srgbClr val="4B5563"/>
+                </a:solidFill>
+                <a:latin typeface="Helvetica Neue"/>
+                <a:ea typeface="Helvetica Neue"/>
+                <a:cs typeface="Helvetica Neue"/>
+              </a:rPr>
+              <a:t>Automatable review gate.</a:t>
+            </a:r>
+          </a:p>
+        </p:txBody>
+      </p:sp>
+      <p:sp>
+        <p:nvSpPr>
+          <p:cNvPr id="19" name="">
+            <a:extLst xmlns:a="http://schemas.openxmlformats.org/drawingml/2006/main">
+              <a:ext uri="{FF2B5EF4-FFF2-40B4-BE49-F238E27FC236}">
+                <a16:creationId xmlns:a16="http://schemas.microsoft.com/office/drawing/2014/main" id="{F7B7CAC1-272E-4320-B121-5CF5F009E8C4}"/>
+              </a:ext>
+            </a:extLst>
+          </p:cNvPr>
+          <p:cNvSpPr>
+            <a:spLocks xmlns:a="http://schemas.openxmlformats.org/drawingml/2006/main" noGrp="1"/>
+          </p:cNvSpPr>
+          <p:nvPr/>
+        </p:nvSpPr>
+        <p:spPr>
+          <a:xfrm xmlns:a="http://schemas.openxmlformats.org/drawingml/2006/main">
+            <a:off x="514350" y="3371850"/>
+            <a:ext cx="1809750" cy="742950"/>
           </a:xfrm>
           <a:prstGeom xmlns:a="http://schemas.openxmlformats.org/drawingml/2006/main" prst="rect">
             <a:avLst/>
@@ -7930,22 +7486,22 @@
       </p:sp>
       <p:sp>
         <p:nvSpPr>
-          <p:cNvPr id="3" name="">
-            <a:extLst xmlns:a="http://schemas.openxmlformats.org/drawingml/2006/main">
-              <a:ext uri="{FF2B5EF4-FFF2-40B4-BE49-F238E27FC236}">
-                <a16:creationId xmlns:a16="http://schemas.microsoft.com/office/drawing/2014/main" id="{025FD6E9-5B12-4E46-B602-9FD4AE765AC6}"/>
-              </a:ext>
-            </a:extLst>
-          </p:cNvPr>
-          <p:cNvSpPr>
-            <a:spLocks xmlns:a="http://schemas.openxmlformats.org/drawingml/2006/main" noGrp="1"/>
-          </p:cNvSpPr>
-          <p:nvPr/>
-        </p:nvSpPr>
-        <p:spPr>
-          <a:xfrm xmlns:a="http://schemas.openxmlformats.org/drawingml/2006/main">
-            <a:off x="933450" y="1885950"/>
-            <a:ext cx="2857500" cy="323850"/>
+          <p:cNvPr id="20" name="">
+            <a:extLst xmlns:a="http://schemas.openxmlformats.org/drawingml/2006/main">
+              <a:ext uri="{FF2B5EF4-FFF2-40B4-BE49-F238E27FC236}">
+                <a16:creationId xmlns:a16="http://schemas.microsoft.com/office/drawing/2014/main" id="{069FABB4-8C26-4418-B709-D4246DEF2BA5}"/>
+              </a:ext>
+            </a:extLst>
+          </p:cNvPr>
+          <p:cNvSpPr>
+            <a:spLocks xmlns:a="http://schemas.openxmlformats.org/drawingml/2006/main" noGrp="1"/>
+          </p:cNvSpPr>
+          <p:nvPr/>
+        </p:nvSpPr>
+        <p:spPr>
+          <a:xfrm xmlns:a="http://schemas.openxmlformats.org/drawingml/2006/main">
+            <a:off x="647700" y="3505200"/>
+            <a:ext cx="1543050" cy="457200"/>
           </a:xfrm>
           <a:prstGeom xmlns:a="http://schemas.openxmlformats.org/drawingml/2006/main" prst="rect">
             <a:avLst/>
@@ -7961,57 +7517,57 @@
           <a:lstStyle xmlns:a="http://schemas.openxmlformats.org/drawingml/2006/main"/>
           <a:p xmlns:a="http://schemas.openxmlformats.org/drawingml/2006/main">
             <a:pPr>
-              <a:defRPr sz="2175" b="1">
-                <a:solidFill>
-                  <a:srgbClr val="000000"/>
-                </a:solidFill>
-                <a:latin typeface="Helvetica Neue"/>
-                <a:ea typeface="Helvetica Neue"/>
-                <a:cs typeface="Helvetica Neue"/>
-              </a:defRPr>
-            </a:pPr>
-            <a:r>
-              <a:rPr sz="2175" b="1">
-                <a:solidFill>
-                  <a:srgbClr val="000000"/>
-                </a:solidFill>
-                <a:latin typeface="Helvetica Neue"/>
-                <a:ea typeface="Helvetica Neue"/>
-                <a:cs typeface="Helvetica Neue"/>
-              </a:rPr>
-              <a:t>Standardize</a:t>
-            </a:r>
-          </a:p>
-        </p:txBody>
-      </p:sp>
-      <p:sp>
-        <p:nvSpPr>
-          <p:cNvPr id="4" name="">
-            <a:extLst xmlns:a="http://schemas.openxmlformats.org/drawingml/2006/main">
-              <a:ext uri="{FF2B5EF4-FFF2-40B4-BE49-F238E27FC236}">
-                <a16:creationId xmlns:a16="http://schemas.microsoft.com/office/drawing/2014/main" id="{38E086CA-DBAB-4C60-A660-BAAF269FEB5B}"/>
-              </a:ext>
-            </a:extLst>
-          </p:cNvPr>
-          <p:cNvSpPr>
-            <a:spLocks xmlns:a="http://schemas.openxmlformats.org/drawingml/2006/main" noGrp="1"/>
-          </p:cNvSpPr>
-          <p:nvPr/>
-        </p:nvSpPr>
-        <p:spPr>
-          <a:xfrm xmlns:a="http://schemas.openxmlformats.org/drawingml/2006/main">
-            <a:off x="952500" y="2543175"/>
-            <a:ext cx="95250" cy="95250"/>
-          </a:xfrm>
-          <a:prstGeom xmlns:a="http://schemas.openxmlformats.org/drawingml/2006/main" prst="ellipse">
+              <a:defRPr sz="1350" b="1">
+                <a:solidFill>
+                  <a:srgbClr val="000000"/>
+                </a:solidFill>
+                <a:latin typeface="Helvetica Neue"/>
+                <a:ea typeface="Helvetica Neue"/>
+                <a:cs typeface="Helvetica Neue"/>
+              </a:defRPr>
+            </a:pPr>
+            <a:r>
+              <a:rPr sz="1350" b="1">
+                <a:solidFill>
+                  <a:srgbClr val="000000"/>
+                </a:solidFill>
+                <a:latin typeface="Helvetica Neue"/>
+                <a:ea typeface="Helvetica Neue"/>
+                <a:cs typeface="Helvetica Neue"/>
+              </a:rPr>
+              <a:t>Dev deploy</a:t>
+            </a:r>
+          </a:p>
+        </p:txBody>
+      </p:sp>
+      <p:sp>
+        <p:nvSpPr>
+          <p:cNvPr id="21" name="">
+            <a:extLst xmlns:a="http://schemas.openxmlformats.org/drawingml/2006/main">
+              <a:ext uri="{FF2B5EF4-FFF2-40B4-BE49-F238E27FC236}">
+                <a16:creationId xmlns:a16="http://schemas.microsoft.com/office/drawing/2014/main" id="{9986084E-9109-4D7B-A5FA-2C49BD5A9B9A}"/>
+              </a:ext>
+            </a:extLst>
+          </p:cNvPr>
+          <p:cNvSpPr>
+            <a:spLocks xmlns:a="http://schemas.openxmlformats.org/drawingml/2006/main" noGrp="1"/>
+          </p:cNvSpPr>
+          <p:nvPr/>
+        </p:nvSpPr>
+        <p:spPr>
+          <a:xfrm xmlns:a="http://schemas.openxmlformats.org/drawingml/2006/main">
+            <a:off x="2324100" y="3371850"/>
+            <a:ext cx="3238500" cy="742950"/>
+          </a:xfrm>
+          <a:prstGeom xmlns:a="http://schemas.openxmlformats.org/drawingml/2006/main" prst="rect">
             <a:avLst/>
           </a:prstGeom>
           <a:solidFill xmlns:a="http://schemas.openxmlformats.org/drawingml/2006/main">
-            <a:srgbClr val="3D8DFF"/>
+            <a:srgbClr val="F6F7F9"/>
           </a:solidFill>
-          <a:ln xmlns:a="http://schemas.openxmlformats.org/drawingml/2006/main" w="0">
+          <a:ln xmlns:a="http://schemas.openxmlformats.org/drawingml/2006/main" w="9525">
             <a:solidFill>
-              <a:srgbClr val="3D8DFF"/>
+              <a:srgbClr val="B8BCC4"/>
             </a:solidFill>
             <a:prstDash val="solid"/>
           </a:ln>
@@ -8019,22 +7575,22 @@
       </p:sp>
       <p:sp>
         <p:nvSpPr>
-          <p:cNvPr id="5" name="">
-            <a:extLst xmlns:a="http://schemas.openxmlformats.org/drawingml/2006/main">
-              <a:ext uri="{FF2B5EF4-FFF2-40B4-BE49-F238E27FC236}">
-                <a16:creationId xmlns:a16="http://schemas.microsoft.com/office/drawing/2014/main" id="{3E81A974-F724-41AA-B409-968D2A020368}"/>
-              </a:ext>
-            </a:extLst>
-          </p:cNvPr>
-          <p:cNvSpPr>
-            <a:spLocks xmlns:a="http://schemas.openxmlformats.org/drawingml/2006/main" noGrp="1"/>
-          </p:cNvSpPr>
-          <p:nvPr/>
-        </p:nvSpPr>
-        <p:spPr>
-          <a:xfrm xmlns:a="http://schemas.openxmlformats.org/drawingml/2006/main">
-            <a:off x="1200150" y="2476500"/>
-            <a:ext cx="2495550" cy="571500"/>
+          <p:cNvPr id="22" name="">
+            <a:extLst xmlns:a="http://schemas.openxmlformats.org/drawingml/2006/main">
+              <a:ext uri="{FF2B5EF4-FFF2-40B4-BE49-F238E27FC236}">
+                <a16:creationId xmlns:a16="http://schemas.microsoft.com/office/drawing/2014/main" id="{EC81ABEF-2749-4EA1-B726-1920606FB5A8}"/>
+              </a:ext>
+            </a:extLst>
+          </p:cNvPr>
+          <p:cNvSpPr>
+            <a:spLocks xmlns:a="http://schemas.openxmlformats.org/drawingml/2006/main" noGrp="1"/>
+          </p:cNvSpPr>
+          <p:nvPr/>
+        </p:nvSpPr>
+        <p:spPr>
+          <a:xfrm xmlns:a="http://schemas.openxmlformats.org/drawingml/2006/main">
+            <a:off x="2457450" y="3505200"/>
+            <a:ext cx="2971800" cy="457200"/>
           </a:xfrm>
           <a:prstGeom xmlns:a="http://schemas.openxmlformats.org/drawingml/2006/main" prst="rect">
             <a:avLst/>
@@ -8050,57 +7606,57 @@
           <a:lstStyle xmlns:a="http://schemas.openxmlformats.org/drawingml/2006/main"/>
           <a:p xmlns:a="http://schemas.openxmlformats.org/drawingml/2006/main">
             <a:pPr>
-              <a:defRPr sz="1575">
-                <a:solidFill>
-                  <a:srgbClr val="000000"/>
-                </a:solidFill>
-                <a:latin typeface="Helvetica Neue"/>
-                <a:ea typeface="Helvetica Neue"/>
-                <a:cs typeface="Helvetica Neue"/>
-              </a:defRPr>
-            </a:pPr>
-            <a:r>
-              <a:rPr sz="1575">
-                <a:solidFill>
-                  <a:srgbClr val="000000"/>
-                </a:solidFill>
-                <a:latin typeface="Helvetica Neue"/>
-                <a:ea typeface="Helvetica Neue"/>
-                <a:cs typeface="Helvetica Neue"/>
-              </a:rPr>
-              <a:t>Keep one playbook path across environments.</a:t>
-            </a:r>
-          </a:p>
-        </p:txBody>
-      </p:sp>
-      <p:sp>
-        <p:nvSpPr>
-          <p:cNvPr id="6" name="">
-            <a:extLst xmlns:a="http://schemas.openxmlformats.org/drawingml/2006/main">
-              <a:ext uri="{FF2B5EF4-FFF2-40B4-BE49-F238E27FC236}">
-                <a16:creationId xmlns:a16="http://schemas.microsoft.com/office/drawing/2014/main" id="{C9D36B4A-1775-4C5F-A895-92C11C096FAA}"/>
-              </a:ext>
-            </a:extLst>
-          </p:cNvPr>
-          <p:cNvSpPr>
-            <a:spLocks xmlns:a="http://schemas.openxmlformats.org/drawingml/2006/main" noGrp="1"/>
-          </p:cNvSpPr>
-          <p:nvPr/>
-        </p:nvSpPr>
-        <p:spPr>
-          <a:xfrm xmlns:a="http://schemas.openxmlformats.org/drawingml/2006/main">
-            <a:off x="952500" y="3209925"/>
-            <a:ext cx="95250" cy="95250"/>
-          </a:xfrm>
-          <a:prstGeom xmlns:a="http://schemas.openxmlformats.org/drawingml/2006/main" prst="ellipse">
+              <a:defRPr sz="1200" b="0">
+                <a:solidFill>
+                  <a:srgbClr val="4B5563"/>
+                </a:solidFill>
+                <a:latin typeface="Helvetica Neue"/>
+                <a:ea typeface="Helvetica Neue"/>
+                <a:cs typeface="Helvetica Neue"/>
+              </a:defRPr>
+            </a:pPr>
+            <a:r>
+              <a:rPr sz="1200" b="0">
+                <a:solidFill>
+                  <a:srgbClr val="4B5563"/>
+                </a:solidFill>
+                <a:latin typeface="Helvetica Neue"/>
+                <a:ea typeface="Helvetica Neue"/>
+                <a:cs typeface="Helvetica Neue"/>
+              </a:rPr>
+              <a:t>Translate change intent into vars and runbook updates.</a:t>
+            </a:r>
+          </a:p>
+        </p:txBody>
+      </p:sp>
+      <p:sp>
+        <p:nvSpPr>
+          <p:cNvPr id="23" name="">
+            <a:extLst xmlns:a="http://schemas.openxmlformats.org/drawingml/2006/main">
+              <a:ext uri="{FF2B5EF4-FFF2-40B4-BE49-F238E27FC236}">
+                <a16:creationId xmlns:a16="http://schemas.microsoft.com/office/drawing/2014/main" id="{AA9685CD-BF8B-4452-8E16-4154D2AEC8E0}"/>
+              </a:ext>
+            </a:extLst>
+          </p:cNvPr>
+          <p:cNvSpPr>
+            <a:spLocks xmlns:a="http://schemas.openxmlformats.org/drawingml/2006/main" noGrp="1"/>
+          </p:cNvSpPr>
+          <p:nvPr/>
+        </p:nvSpPr>
+        <p:spPr>
+          <a:xfrm xmlns:a="http://schemas.openxmlformats.org/drawingml/2006/main">
+            <a:off x="5562600" y="3371850"/>
+            <a:ext cx="3429000" cy="742950"/>
+          </a:xfrm>
+          <a:prstGeom xmlns:a="http://schemas.openxmlformats.org/drawingml/2006/main" prst="rect">
             <a:avLst/>
           </a:prstGeom>
           <a:solidFill xmlns:a="http://schemas.openxmlformats.org/drawingml/2006/main">
-            <a:srgbClr val="3D8DFF"/>
+            <a:srgbClr val="F6F7F9"/>
           </a:solidFill>
-          <a:ln xmlns:a="http://schemas.openxmlformats.org/drawingml/2006/main" w="0">
+          <a:ln xmlns:a="http://schemas.openxmlformats.org/drawingml/2006/main" w="9525">
             <a:solidFill>
-              <a:srgbClr val="3D8DFF"/>
+              <a:srgbClr val="B8BCC4"/>
             </a:solidFill>
             <a:prstDash val="solid"/>
           </a:ln>
@@ -8108,22 +7664,22 @@
       </p:sp>
       <p:sp>
         <p:nvSpPr>
-          <p:cNvPr id="7" name="">
-            <a:extLst xmlns:a="http://schemas.openxmlformats.org/drawingml/2006/main">
-              <a:ext uri="{FF2B5EF4-FFF2-40B4-BE49-F238E27FC236}">
-                <a16:creationId xmlns:a16="http://schemas.microsoft.com/office/drawing/2014/main" id="{F7535390-274C-4EFA-A10D-797029971CA5}"/>
-              </a:ext>
-            </a:extLst>
-          </p:cNvPr>
-          <p:cNvSpPr>
-            <a:spLocks xmlns:a="http://schemas.openxmlformats.org/drawingml/2006/main" noGrp="1"/>
-          </p:cNvSpPr>
-          <p:nvPr/>
-        </p:nvSpPr>
-        <p:spPr>
-          <a:xfrm xmlns:a="http://schemas.openxmlformats.org/drawingml/2006/main">
-            <a:off x="1200150" y="3143250"/>
-            <a:ext cx="2495550" cy="571500"/>
+          <p:cNvPr id="24" name="">
+            <a:extLst xmlns:a="http://schemas.openxmlformats.org/drawingml/2006/main">
+              <a:ext uri="{FF2B5EF4-FFF2-40B4-BE49-F238E27FC236}">
+                <a16:creationId xmlns:a16="http://schemas.microsoft.com/office/drawing/2014/main" id="{5155F1AF-7148-4F75-9EEE-9E60F96795FA}"/>
+              </a:ext>
+            </a:extLst>
+          </p:cNvPr>
+          <p:cNvSpPr>
+            <a:spLocks xmlns:a="http://schemas.openxmlformats.org/drawingml/2006/main" noGrp="1"/>
+          </p:cNvSpPr>
+          <p:nvPr/>
+        </p:nvSpPr>
+        <p:spPr>
+          <a:xfrm xmlns:a="http://schemas.openxmlformats.org/drawingml/2006/main">
+            <a:off x="5695950" y="3505200"/>
+            <a:ext cx="3162300" cy="457200"/>
           </a:xfrm>
           <a:prstGeom xmlns:a="http://schemas.openxmlformats.org/drawingml/2006/main" prst="rect">
             <a:avLst/>
@@ -8139,57 +7695,57 @@
           <a:lstStyle xmlns:a="http://schemas.openxmlformats.org/drawingml/2006/main"/>
           <a:p xmlns:a="http://schemas.openxmlformats.org/drawingml/2006/main">
             <a:pPr>
-              <a:defRPr sz="1575">
-                <a:solidFill>
-                  <a:srgbClr val="000000"/>
-                </a:solidFill>
-                <a:latin typeface="Helvetica Neue"/>
-                <a:ea typeface="Helvetica Neue"/>
-                <a:cs typeface="Helvetica Neue"/>
-              </a:defRPr>
-            </a:pPr>
-            <a:r>
-              <a:rPr sz="1575">
-                <a:solidFill>
-                  <a:srgbClr val="000000"/>
-                </a:solidFill>
-                <a:latin typeface="Helvetica Neue"/>
-                <a:ea typeface="Helvetica Neue"/>
-                <a:cs typeface="Helvetica Neue"/>
-              </a:rPr>
-              <a:t>Treat env files and inventory as release inputs.</a:t>
-            </a:r>
-          </a:p>
-        </p:txBody>
-      </p:sp>
-      <p:sp>
-        <p:nvSpPr>
-          <p:cNvPr id="8" name="">
-            <a:extLst xmlns:a="http://schemas.openxmlformats.org/drawingml/2006/main">
-              <a:ext uri="{FF2B5EF4-FFF2-40B4-BE49-F238E27FC236}">
-                <a16:creationId xmlns:a16="http://schemas.microsoft.com/office/drawing/2014/main" id="{92285325-D1FA-4B8D-A64C-15ABEC6C8846}"/>
-              </a:ext>
-            </a:extLst>
-          </p:cNvPr>
-          <p:cNvSpPr>
-            <a:spLocks xmlns:a="http://schemas.openxmlformats.org/drawingml/2006/main" noGrp="1"/>
-          </p:cNvSpPr>
-          <p:nvPr/>
-        </p:nvSpPr>
-        <p:spPr>
-          <a:xfrm xmlns:a="http://schemas.openxmlformats.org/drawingml/2006/main">
-            <a:off x="952500" y="3876675"/>
-            <a:ext cx="95250" cy="95250"/>
-          </a:xfrm>
-          <a:prstGeom xmlns:a="http://schemas.openxmlformats.org/drawingml/2006/main" prst="ellipse">
+              <a:defRPr sz="1200" b="0">
+                <a:solidFill>
+                  <a:srgbClr val="4B5563"/>
+                </a:solidFill>
+                <a:latin typeface="Helvetica Neue"/>
+                <a:ea typeface="Helvetica Neue"/>
+                <a:cs typeface="Helvetica Neue"/>
+              </a:defRPr>
+            </a:pPr>
+            <a:r>
+              <a:rPr sz="1200" b="0">
+                <a:solidFill>
+                  <a:srgbClr val="4B5563"/>
+                </a:solidFill>
+                <a:latin typeface="Helvetica Neue"/>
+                <a:ea typeface="Helvetica Neue"/>
+                <a:cs typeface="Helvetica Neue"/>
+              </a:rPr>
+              <a:t>Run playbook against dev bastion and dev env file.</a:t>
+            </a:r>
+          </a:p>
+        </p:txBody>
+      </p:sp>
+      <p:sp>
+        <p:nvSpPr>
+          <p:cNvPr id="25" name="">
+            <a:extLst xmlns:a="http://schemas.openxmlformats.org/drawingml/2006/main">
+              <a:ext uri="{FF2B5EF4-FFF2-40B4-BE49-F238E27FC236}">
+                <a16:creationId xmlns:a16="http://schemas.microsoft.com/office/drawing/2014/main" id="{80B05B11-BC2C-49CA-87A8-C5120277BB89}"/>
+              </a:ext>
+            </a:extLst>
+          </p:cNvPr>
+          <p:cNvSpPr>
+            <a:spLocks xmlns:a="http://schemas.openxmlformats.org/drawingml/2006/main" noGrp="1"/>
+          </p:cNvSpPr>
+          <p:nvPr/>
+        </p:nvSpPr>
+        <p:spPr>
+          <a:xfrm xmlns:a="http://schemas.openxmlformats.org/drawingml/2006/main">
+            <a:off x="8991600" y="3371850"/>
+            <a:ext cx="2381250" cy="742950"/>
+          </a:xfrm>
+          <a:prstGeom xmlns:a="http://schemas.openxmlformats.org/drawingml/2006/main" prst="rect">
             <a:avLst/>
           </a:prstGeom>
           <a:solidFill xmlns:a="http://schemas.openxmlformats.org/drawingml/2006/main">
-            <a:srgbClr val="3D8DFF"/>
+            <a:srgbClr val="F6F7F9"/>
           </a:solidFill>
-          <a:ln xmlns:a="http://schemas.openxmlformats.org/drawingml/2006/main" w="0">
+          <a:ln xmlns:a="http://schemas.openxmlformats.org/drawingml/2006/main" w="9525">
             <a:solidFill>
-              <a:srgbClr val="3D8DFF"/>
+              <a:srgbClr val="B8BCC4"/>
             </a:solidFill>
             <a:prstDash val="solid"/>
           </a:ln>
@@ -8197,22 +7753,22 @@
       </p:sp>
       <p:sp>
         <p:nvSpPr>
-          <p:cNvPr id="9" name="">
-            <a:extLst xmlns:a="http://schemas.openxmlformats.org/drawingml/2006/main">
-              <a:ext uri="{FF2B5EF4-FFF2-40B4-BE49-F238E27FC236}">
-                <a16:creationId xmlns:a16="http://schemas.microsoft.com/office/drawing/2014/main" id="{9DC402D0-39DA-4C29-A3DB-EE37171A12B3}"/>
-              </a:ext>
-            </a:extLst>
-          </p:cNvPr>
-          <p:cNvSpPr>
-            <a:spLocks xmlns:a="http://schemas.openxmlformats.org/drawingml/2006/main" noGrp="1"/>
-          </p:cNvSpPr>
-          <p:nvPr/>
-        </p:nvSpPr>
-        <p:spPr>
-          <a:xfrm xmlns:a="http://schemas.openxmlformats.org/drawingml/2006/main">
-            <a:off x="1200150" y="3810000"/>
-            <a:ext cx="2495550" cy="571500"/>
+          <p:cNvPr id="26" name="">
+            <a:extLst xmlns:a="http://schemas.openxmlformats.org/drawingml/2006/main">
+              <a:ext uri="{FF2B5EF4-FFF2-40B4-BE49-F238E27FC236}">
+                <a16:creationId xmlns:a16="http://schemas.microsoft.com/office/drawing/2014/main" id="{CA0C234A-D4E2-4F7A-A79B-B89E12DA9FE8}"/>
+              </a:ext>
+            </a:extLst>
+          </p:cNvPr>
+          <p:cNvSpPr>
+            <a:spLocks xmlns:a="http://schemas.openxmlformats.org/drawingml/2006/main" noGrp="1"/>
+          </p:cNvSpPr>
+          <p:nvPr/>
+        </p:nvSpPr>
+        <p:spPr>
+          <a:xfrm xmlns:a="http://schemas.openxmlformats.org/drawingml/2006/main">
+            <a:off x="9124950" y="3505200"/>
+            <a:ext cx="2114550" cy="457200"/>
           </a:xfrm>
           <a:prstGeom xmlns:a="http://schemas.openxmlformats.org/drawingml/2006/main" prst="rect">
             <a:avLst/>
@@ -8228,47 +7784,47 @@
           <a:lstStyle xmlns:a="http://schemas.openxmlformats.org/drawingml/2006/main"/>
           <a:p xmlns:a="http://schemas.openxmlformats.org/drawingml/2006/main">
             <a:pPr>
-              <a:defRPr sz="1575">
-                <a:solidFill>
-                  <a:srgbClr val="000000"/>
-                </a:solidFill>
-                <a:latin typeface="Helvetica Neue"/>
-                <a:ea typeface="Helvetica Neue"/>
-                <a:cs typeface="Helvetica Neue"/>
-              </a:defRPr>
-            </a:pPr>
-            <a:r>
-              <a:rPr sz="1575">
-                <a:solidFill>
-                  <a:srgbClr val="000000"/>
-                </a:solidFill>
-                <a:latin typeface="Helvetica Neue"/>
-                <a:ea typeface="Helvetica Neue"/>
-                <a:cs typeface="Helvetica Neue"/>
-              </a:rPr>
-              <a:t>Make bastion source strategy explicit.</a:t>
-            </a:r>
-          </a:p>
-        </p:txBody>
-      </p:sp>
-      <p:sp>
-        <p:nvSpPr>
-          <p:cNvPr id="10" name="">
-            <a:extLst xmlns:a="http://schemas.openxmlformats.org/drawingml/2006/main">
-              <a:ext uri="{FF2B5EF4-FFF2-40B4-BE49-F238E27FC236}">
-                <a16:creationId xmlns:a16="http://schemas.microsoft.com/office/drawing/2014/main" id="{4632B096-9F6B-42D8-BFF8-37C2764CB3CC}"/>
-              </a:ext>
-            </a:extLst>
-          </p:cNvPr>
-          <p:cNvSpPr>
-            <a:spLocks xmlns:a="http://schemas.openxmlformats.org/drawingml/2006/main" noGrp="1"/>
-          </p:cNvSpPr>
-          <p:nvPr/>
-        </p:nvSpPr>
-        <p:spPr>
-          <a:xfrm xmlns:a="http://schemas.openxmlformats.org/drawingml/2006/main">
-            <a:off x="4381500" y="1571625"/>
-            <a:ext cx="3429000" cy="3381375"/>
+              <a:defRPr sz="1200" b="0">
+                <a:solidFill>
+                  <a:srgbClr val="4B5563"/>
+                </a:solidFill>
+                <a:latin typeface="Helvetica Neue"/>
+                <a:ea typeface="Helvetica Neue"/>
+                <a:cs typeface="Helvetica Neue"/>
+              </a:defRPr>
+            </a:pPr>
+            <a:r>
+              <a:rPr sz="1200" b="0">
+                <a:solidFill>
+                  <a:srgbClr val="4B5563"/>
+                </a:solidFill>
+                <a:latin typeface="Helvetica Neue"/>
+                <a:ea typeface="Helvetica Neue"/>
+                <a:cs typeface="Helvetica Neue"/>
+              </a:rPr>
+              <a:t>Fast, repeatable validation.</a:t>
+            </a:r>
+          </a:p>
+        </p:txBody>
+      </p:sp>
+      <p:sp>
+        <p:nvSpPr>
+          <p:cNvPr id="27" name="">
+            <a:extLst xmlns:a="http://schemas.openxmlformats.org/drawingml/2006/main">
+              <a:ext uri="{FF2B5EF4-FFF2-40B4-BE49-F238E27FC236}">
+                <a16:creationId xmlns:a16="http://schemas.microsoft.com/office/drawing/2014/main" id="{5DAB2200-C5F1-472B-BED2-0F7FB5718F4B}"/>
+              </a:ext>
+            </a:extLst>
+          </p:cNvPr>
+          <p:cNvSpPr>
+            <a:spLocks xmlns:a="http://schemas.openxmlformats.org/drawingml/2006/main" noGrp="1"/>
+          </p:cNvSpPr>
+          <p:nvPr/>
+        </p:nvSpPr>
+        <p:spPr>
+          <a:xfrm xmlns:a="http://schemas.openxmlformats.org/drawingml/2006/main">
+            <a:off x="514350" y="4114800"/>
+            <a:ext cx="1809750" cy="742950"/>
           </a:xfrm>
           <a:prstGeom xmlns:a="http://schemas.openxmlformats.org/drawingml/2006/main" prst="rect">
             <a:avLst/>
@@ -8286,21 +7842,874 @@
       </p:sp>
       <p:sp>
         <p:nvSpPr>
-          <p:cNvPr id="11" name="">
-            <a:extLst xmlns:a="http://schemas.openxmlformats.org/drawingml/2006/main">
-              <a:ext uri="{FF2B5EF4-FFF2-40B4-BE49-F238E27FC236}">
-                <a16:creationId xmlns:a16="http://schemas.microsoft.com/office/drawing/2014/main" id="{791F1E6C-4367-4655-99D3-9836FBD983EF}"/>
-              </a:ext>
-            </a:extLst>
-          </p:cNvPr>
-          <p:cNvSpPr>
-            <a:spLocks xmlns:a="http://schemas.openxmlformats.org/drawingml/2006/main" noGrp="1"/>
-          </p:cNvSpPr>
-          <p:nvPr/>
-        </p:nvSpPr>
-        <p:spPr>
-          <a:xfrm xmlns:a="http://schemas.openxmlformats.org/drawingml/2006/main">
-            <a:off x="4648200" y="1885950"/>
+          <p:cNvPr id="28" name="">
+            <a:extLst xmlns:a="http://schemas.openxmlformats.org/drawingml/2006/main">
+              <a:ext uri="{FF2B5EF4-FFF2-40B4-BE49-F238E27FC236}">
+                <a16:creationId xmlns:a16="http://schemas.microsoft.com/office/drawing/2014/main" id="{5305C728-5339-4380-9928-30F999A14DC0}"/>
+              </a:ext>
+            </a:extLst>
+          </p:cNvPr>
+          <p:cNvSpPr>
+            <a:spLocks xmlns:a="http://schemas.openxmlformats.org/drawingml/2006/main" noGrp="1"/>
+          </p:cNvSpPr>
+          <p:nvPr/>
+        </p:nvSpPr>
+        <p:spPr>
+          <a:xfrm xmlns:a="http://schemas.openxmlformats.org/drawingml/2006/main">
+            <a:off x="647700" y="4248150"/>
+            <a:ext cx="1543050" cy="457200"/>
+          </a:xfrm>
+          <a:prstGeom xmlns:a="http://schemas.openxmlformats.org/drawingml/2006/main" prst="rect">
+            <a:avLst/>
+          </a:prstGeom>
+          <a:noFill xmlns:a="http://schemas.openxmlformats.org/drawingml/2006/main"/>
+          <a:ln xmlns:a="http://schemas.openxmlformats.org/drawingml/2006/main" w="0">
+            <a:noFill/>
+            <a:prstDash val="solid"/>
+          </a:ln>
+        </p:spPr>
+        <p:txBody>
+          <a:bodyPr xmlns:a="http://schemas.openxmlformats.org/drawingml/2006/main"/>
+          <a:lstStyle xmlns:a="http://schemas.openxmlformats.org/drawingml/2006/main"/>
+          <a:p xmlns:a="http://schemas.openxmlformats.org/drawingml/2006/main">
+            <a:pPr>
+              <a:defRPr sz="1350" b="1">
+                <a:solidFill>
+                  <a:srgbClr val="000000"/>
+                </a:solidFill>
+                <a:latin typeface="Helvetica Neue"/>
+                <a:ea typeface="Helvetica Neue"/>
+                <a:cs typeface="Helvetica Neue"/>
+              </a:defRPr>
+            </a:pPr>
+            <a:r>
+              <a:rPr sz="1350" b="1">
+                <a:solidFill>
+                  <a:srgbClr val="000000"/>
+                </a:solidFill>
+                <a:latin typeface="Helvetica Neue"/>
+                <a:ea typeface="Helvetica Neue"/>
+                <a:cs typeface="Helvetica Neue"/>
+              </a:rPr>
+              <a:t>Stage promote</a:t>
+            </a:r>
+          </a:p>
+        </p:txBody>
+      </p:sp>
+      <p:sp>
+        <p:nvSpPr>
+          <p:cNvPr id="29" name="">
+            <a:extLst xmlns:a="http://schemas.openxmlformats.org/drawingml/2006/main">
+              <a:ext uri="{FF2B5EF4-FFF2-40B4-BE49-F238E27FC236}">
+                <a16:creationId xmlns:a16="http://schemas.microsoft.com/office/drawing/2014/main" id="{4781EDD5-2CF5-47F9-896D-FF526BEC7E22}"/>
+              </a:ext>
+            </a:extLst>
+          </p:cNvPr>
+          <p:cNvSpPr>
+            <a:spLocks xmlns:a="http://schemas.openxmlformats.org/drawingml/2006/main" noGrp="1"/>
+          </p:cNvSpPr>
+          <p:nvPr/>
+        </p:nvSpPr>
+        <p:spPr>
+          <a:xfrm xmlns:a="http://schemas.openxmlformats.org/drawingml/2006/main">
+            <a:off x="2324100" y="4114800"/>
+            <a:ext cx="3238500" cy="742950"/>
+          </a:xfrm>
+          <a:prstGeom xmlns:a="http://schemas.openxmlformats.org/drawingml/2006/main" prst="rect">
+            <a:avLst/>
+          </a:prstGeom>
+          <a:solidFill xmlns:a="http://schemas.openxmlformats.org/drawingml/2006/main">
+            <a:srgbClr val="FFFFFF"/>
+          </a:solidFill>
+          <a:ln xmlns:a="http://schemas.openxmlformats.org/drawingml/2006/main" w="9525">
+            <a:solidFill>
+              <a:srgbClr val="B8BCC4"/>
+            </a:solidFill>
+            <a:prstDash val="solid"/>
+          </a:ln>
+        </p:spPr>
+      </p:sp>
+      <p:sp>
+        <p:nvSpPr>
+          <p:cNvPr id="30" name="">
+            <a:extLst xmlns:a="http://schemas.openxmlformats.org/drawingml/2006/main">
+              <a:ext uri="{FF2B5EF4-FFF2-40B4-BE49-F238E27FC236}">
+                <a16:creationId xmlns:a16="http://schemas.microsoft.com/office/drawing/2014/main" id="{A0665A57-FFA9-46A6-9BCF-BA507EB30008}"/>
+              </a:ext>
+            </a:extLst>
+          </p:cNvPr>
+          <p:cNvSpPr>
+            <a:spLocks xmlns:a="http://schemas.openxmlformats.org/drawingml/2006/main" noGrp="1"/>
+          </p:cNvSpPr>
+          <p:nvPr/>
+        </p:nvSpPr>
+        <p:spPr>
+          <a:xfrm xmlns:a="http://schemas.openxmlformats.org/drawingml/2006/main">
+            <a:off x="2457450" y="4248150"/>
+            <a:ext cx="2971800" cy="457200"/>
+          </a:xfrm>
+          <a:prstGeom xmlns:a="http://schemas.openxmlformats.org/drawingml/2006/main" prst="rect">
+            <a:avLst/>
+          </a:prstGeom>
+          <a:noFill xmlns:a="http://schemas.openxmlformats.org/drawingml/2006/main"/>
+          <a:ln xmlns:a="http://schemas.openxmlformats.org/drawingml/2006/main" w="0">
+            <a:noFill/>
+            <a:prstDash val="solid"/>
+          </a:ln>
+        </p:spPr>
+        <p:txBody>
+          <a:bodyPr xmlns:a="http://schemas.openxmlformats.org/drawingml/2006/main"/>
+          <a:lstStyle xmlns:a="http://schemas.openxmlformats.org/drawingml/2006/main"/>
+          <a:p xmlns:a="http://schemas.openxmlformats.org/drawingml/2006/main">
+            <a:pPr>
+              <a:defRPr sz="1200" b="0">
+                <a:solidFill>
+                  <a:srgbClr val="4B5563"/>
+                </a:solidFill>
+                <a:latin typeface="Helvetica Neue"/>
+                <a:ea typeface="Helvetica Neue"/>
+                <a:cs typeface="Helvetica Neue"/>
+              </a:defRPr>
+            </a:pPr>
+            <a:r>
+              <a:rPr sz="1200" b="0">
+                <a:solidFill>
+                  <a:srgbClr val="4B5563"/>
+                </a:solidFill>
+                <a:latin typeface="Helvetica Neue"/>
+                <a:ea typeface="Helvetica Neue"/>
+                <a:cs typeface="Helvetica Neue"/>
+              </a:rPr>
+              <a:t>Summarize changes and unresolved risks.</a:t>
+            </a:r>
+          </a:p>
+        </p:txBody>
+      </p:sp>
+      <p:sp>
+        <p:nvSpPr>
+          <p:cNvPr id="31" name="">
+            <a:extLst xmlns:a="http://schemas.openxmlformats.org/drawingml/2006/main">
+              <a:ext uri="{FF2B5EF4-FFF2-40B4-BE49-F238E27FC236}">
+                <a16:creationId xmlns:a16="http://schemas.microsoft.com/office/drawing/2014/main" id="{1B3FB574-4268-4395-BD27-0E64ABE10C1B}"/>
+              </a:ext>
+            </a:extLst>
+          </p:cNvPr>
+          <p:cNvSpPr>
+            <a:spLocks xmlns:a="http://schemas.openxmlformats.org/drawingml/2006/main" noGrp="1"/>
+          </p:cNvSpPr>
+          <p:nvPr/>
+        </p:nvSpPr>
+        <p:spPr>
+          <a:xfrm xmlns:a="http://schemas.openxmlformats.org/drawingml/2006/main">
+            <a:off x="5562600" y="4114800"/>
+            <a:ext cx="3429000" cy="742950"/>
+          </a:xfrm>
+          <a:prstGeom xmlns:a="http://schemas.openxmlformats.org/drawingml/2006/main" prst="rect">
+            <a:avLst/>
+          </a:prstGeom>
+          <a:solidFill xmlns:a="http://schemas.openxmlformats.org/drawingml/2006/main">
+            <a:srgbClr val="FFFFFF"/>
+          </a:solidFill>
+          <a:ln xmlns:a="http://schemas.openxmlformats.org/drawingml/2006/main" w="9525">
+            <a:solidFill>
+              <a:srgbClr val="B8BCC4"/>
+            </a:solidFill>
+            <a:prstDash val="solid"/>
+          </a:ln>
+        </p:spPr>
+      </p:sp>
+      <p:sp>
+        <p:nvSpPr>
+          <p:cNvPr id="32" name="">
+            <a:extLst xmlns:a="http://schemas.openxmlformats.org/drawingml/2006/main">
+              <a:ext uri="{FF2B5EF4-FFF2-40B4-BE49-F238E27FC236}">
+                <a16:creationId xmlns:a16="http://schemas.microsoft.com/office/drawing/2014/main" id="{2ACA0105-901E-406C-9918-DC1D972265D7}"/>
+              </a:ext>
+            </a:extLst>
+          </p:cNvPr>
+          <p:cNvSpPr>
+            <a:spLocks xmlns:a="http://schemas.openxmlformats.org/drawingml/2006/main" noGrp="1"/>
+          </p:cNvSpPr>
+          <p:nvPr/>
+        </p:nvSpPr>
+        <p:spPr>
+          <a:xfrm xmlns:a="http://schemas.openxmlformats.org/drawingml/2006/main">
+            <a:off x="5695950" y="4248150"/>
+            <a:ext cx="3162300" cy="457200"/>
+          </a:xfrm>
+          <a:prstGeom xmlns:a="http://schemas.openxmlformats.org/drawingml/2006/main" prst="rect">
+            <a:avLst/>
+          </a:prstGeom>
+          <a:noFill xmlns:a="http://schemas.openxmlformats.org/drawingml/2006/main"/>
+          <a:ln xmlns:a="http://schemas.openxmlformats.org/drawingml/2006/main" w="0">
+            <a:noFill/>
+            <a:prstDash val="solid"/>
+          </a:ln>
+        </p:spPr>
+        <p:txBody>
+          <a:bodyPr xmlns:a="http://schemas.openxmlformats.org/drawingml/2006/main"/>
+          <a:lstStyle xmlns:a="http://schemas.openxmlformats.org/drawingml/2006/main"/>
+          <a:p xmlns:a="http://schemas.openxmlformats.org/drawingml/2006/main">
+            <a:pPr>
+              <a:defRPr sz="1200" b="0">
+                <a:solidFill>
+                  <a:srgbClr val="4B5563"/>
+                </a:solidFill>
+                <a:latin typeface="Helvetica Neue"/>
+                <a:ea typeface="Helvetica Neue"/>
+                <a:cs typeface="Helvetica Neue"/>
+              </a:defRPr>
+            </a:pPr>
+            <a:r>
+              <a:rPr sz="1200" b="0">
+                <a:solidFill>
+                  <a:srgbClr val="4B5563"/>
+                </a:solidFill>
+                <a:latin typeface="Helvetica Neue"/>
+                <a:ea typeface="Helvetica Neue"/>
+                <a:cs typeface="Helvetica Neue"/>
+              </a:rPr>
+              <a:t>Reuse same playbook with staging variables.</a:t>
+            </a:r>
+          </a:p>
+        </p:txBody>
+      </p:sp>
+      <p:sp>
+        <p:nvSpPr>
+          <p:cNvPr id="33" name="">
+            <a:extLst xmlns:a="http://schemas.openxmlformats.org/drawingml/2006/main">
+              <a:ext uri="{FF2B5EF4-FFF2-40B4-BE49-F238E27FC236}">
+                <a16:creationId xmlns:a16="http://schemas.microsoft.com/office/drawing/2014/main" id="{F9570AA7-87E4-465D-97F0-B2B89C84FCC4}"/>
+              </a:ext>
+            </a:extLst>
+          </p:cNvPr>
+          <p:cNvSpPr>
+            <a:spLocks xmlns:a="http://schemas.openxmlformats.org/drawingml/2006/main" noGrp="1"/>
+          </p:cNvSpPr>
+          <p:nvPr/>
+        </p:nvSpPr>
+        <p:spPr>
+          <a:xfrm xmlns:a="http://schemas.openxmlformats.org/drawingml/2006/main">
+            <a:off x="8991600" y="4114800"/>
+            <a:ext cx="2381250" cy="742950"/>
+          </a:xfrm>
+          <a:prstGeom xmlns:a="http://schemas.openxmlformats.org/drawingml/2006/main" prst="rect">
+            <a:avLst/>
+          </a:prstGeom>
+          <a:solidFill xmlns:a="http://schemas.openxmlformats.org/drawingml/2006/main">
+            <a:srgbClr val="FFFFFF"/>
+          </a:solidFill>
+          <a:ln xmlns:a="http://schemas.openxmlformats.org/drawingml/2006/main" w="9525">
+            <a:solidFill>
+              <a:srgbClr val="B8BCC4"/>
+            </a:solidFill>
+            <a:prstDash val="solid"/>
+          </a:ln>
+        </p:spPr>
+      </p:sp>
+      <p:sp>
+        <p:nvSpPr>
+          <p:cNvPr id="34" name="">
+            <a:extLst xmlns:a="http://schemas.openxmlformats.org/drawingml/2006/main">
+              <a:ext uri="{FF2B5EF4-FFF2-40B4-BE49-F238E27FC236}">
+                <a16:creationId xmlns:a16="http://schemas.microsoft.com/office/drawing/2014/main" id="{00E4C1B1-F04E-4F88-A859-1308A513ABAB}"/>
+              </a:ext>
+            </a:extLst>
+          </p:cNvPr>
+          <p:cNvSpPr>
+            <a:spLocks xmlns:a="http://schemas.openxmlformats.org/drawingml/2006/main" noGrp="1"/>
+          </p:cNvSpPr>
+          <p:nvPr/>
+        </p:nvSpPr>
+        <p:spPr>
+          <a:xfrm xmlns:a="http://schemas.openxmlformats.org/drawingml/2006/main">
+            <a:off x="9124950" y="4248150"/>
+            <a:ext cx="2114550" cy="457200"/>
+          </a:xfrm>
+          <a:prstGeom xmlns:a="http://schemas.openxmlformats.org/drawingml/2006/main" prst="rect">
+            <a:avLst/>
+          </a:prstGeom>
+          <a:noFill xmlns:a="http://schemas.openxmlformats.org/drawingml/2006/main"/>
+          <a:ln xmlns:a="http://schemas.openxmlformats.org/drawingml/2006/main" w="0">
+            <a:noFill/>
+            <a:prstDash val="solid"/>
+          </a:ln>
+        </p:spPr>
+        <p:txBody>
+          <a:bodyPr xmlns:a="http://schemas.openxmlformats.org/drawingml/2006/main"/>
+          <a:lstStyle xmlns:a="http://schemas.openxmlformats.org/drawingml/2006/main"/>
+          <a:p xmlns:a="http://schemas.openxmlformats.org/drawingml/2006/main">
+            <a:pPr>
+              <a:defRPr sz="1200" b="0">
+                <a:solidFill>
+                  <a:srgbClr val="4B5563"/>
+                </a:solidFill>
+                <a:latin typeface="Helvetica Neue"/>
+                <a:ea typeface="Helvetica Neue"/>
+                <a:cs typeface="Helvetica Neue"/>
+              </a:defRPr>
+            </a:pPr>
+            <a:r>
+              <a:rPr sz="1200" b="0">
+                <a:solidFill>
+                  <a:srgbClr val="4B5563"/>
+                </a:solidFill>
+                <a:latin typeface="Helvetica Neue"/>
+                <a:ea typeface="Helvetica Neue"/>
+                <a:cs typeface="Helvetica Neue"/>
+              </a:rPr>
+              <a:t>Same logic, new target.</a:t>
+            </a:r>
+          </a:p>
+        </p:txBody>
+      </p:sp>
+      <p:sp>
+        <p:nvSpPr>
+          <p:cNvPr id="35" name="">
+            <a:extLst xmlns:a="http://schemas.openxmlformats.org/drawingml/2006/main">
+              <a:ext uri="{FF2B5EF4-FFF2-40B4-BE49-F238E27FC236}">
+                <a16:creationId xmlns:a16="http://schemas.microsoft.com/office/drawing/2014/main" id="{53D28175-0BAD-48A2-8DE6-C55C746F913E}"/>
+              </a:ext>
+            </a:extLst>
+          </p:cNvPr>
+          <p:cNvSpPr>
+            <a:spLocks xmlns:a="http://schemas.openxmlformats.org/drawingml/2006/main" noGrp="1"/>
+          </p:cNvSpPr>
+          <p:nvPr/>
+        </p:nvSpPr>
+        <p:spPr>
+          <a:xfrm xmlns:a="http://schemas.openxmlformats.org/drawingml/2006/main">
+            <a:off x="514350" y="4857750"/>
+            <a:ext cx="1809750" cy="742950"/>
+          </a:xfrm>
+          <a:prstGeom xmlns:a="http://schemas.openxmlformats.org/drawingml/2006/main" prst="rect">
+            <a:avLst/>
+          </a:prstGeom>
+          <a:solidFill xmlns:a="http://schemas.openxmlformats.org/drawingml/2006/main">
+            <a:srgbClr val="F6F7F9"/>
+          </a:solidFill>
+          <a:ln xmlns:a="http://schemas.openxmlformats.org/drawingml/2006/main" w="9525">
+            <a:solidFill>
+              <a:srgbClr val="B8BCC4"/>
+            </a:solidFill>
+            <a:prstDash val="solid"/>
+          </a:ln>
+        </p:spPr>
+      </p:sp>
+      <p:sp>
+        <p:nvSpPr>
+          <p:cNvPr id="36" name="">
+            <a:extLst xmlns:a="http://schemas.openxmlformats.org/drawingml/2006/main">
+              <a:ext uri="{FF2B5EF4-FFF2-40B4-BE49-F238E27FC236}">
+                <a16:creationId xmlns:a16="http://schemas.microsoft.com/office/drawing/2014/main" id="{2EB8BB2C-2DDE-43AA-835F-09847CA54AB3}"/>
+              </a:ext>
+            </a:extLst>
+          </p:cNvPr>
+          <p:cNvSpPr>
+            <a:spLocks xmlns:a="http://schemas.openxmlformats.org/drawingml/2006/main" noGrp="1"/>
+          </p:cNvSpPr>
+          <p:nvPr/>
+        </p:nvSpPr>
+        <p:spPr>
+          <a:xfrm xmlns:a="http://schemas.openxmlformats.org/drawingml/2006/main">
+            <a:off x="647700" y="4991100"/>
+            <a:ext cx="1543050" cy="457200"/>
+          </a:xfrm>
+          <a:prstGeom xmlns:a="http://schemas.openxmlformats.org/drawingml/2006/main" prst="rect">
+            <a:avLst/>
+          </a:prstGeom>
+          <a:noFill xmlns:a="http://schemas.openxmlformats.org/drawingml/2006/main"/>
+          <a:ln xmlns:a="http://schemas.openxmlformats.org/drawingml/2006/main" w="0">
+            <a:noFill/>
+            <a:prstDash val="solid"/>
+          </a:ln>
+        </p:spPr>
+        <p:txBody>
+          <a:bodyPr xmlns:a="http://schemas.openxmlformats.org/drawingml/2006/main"/>
+          <a:lstStyle xmlns:a="http://schemas.openxmlformats.org/drawingml/2006/main"/>
+          <a:p xmlns:a="http://schemas.openxmlformats.org/drawingml/2006/main">
+            <a:pPr>
+              <a:defRPr sz="1350" b="1">
+                <a:solidFill>
+                  <a:srgbClr val="000000"/>
+                </a:solidFill>
+                <a:latin typeface="Helvetica Neue"/>
+                <a:ea typeface="Helvetica Neue"/>
+                <a:cs typeface="Helvetica Neue"/>
+              </a:defRPr>
+            </a:pPr>
+            <a:r>
+              <a:rPr sz="1350" b="1">
+                <a:solidFill>
+                  <a:srgbClr val="000000"/>
+                </a:solidFill>
+                <a:latin typeface="Helvetica Neue"/>
+                <a:ea typeface="Helvetica Neue"/>
+                <a:cs typeface="Helvetica Neue"/>
+              </a:rPr>
+              <a:t>Release gate</a:t>
+            </a:r>
+          </a:p>
+        </p:txBody>
+      </p:sp>
+      <p:sp>
+        <p:nvSpPr>
+          <p:cNvPr id="37" name="">
+            <a:extLst xmlns:a="http://schemas.openxmlformats.org/drawingml/2006/main">
+              <a:ext uri="{FF2B5EF4-FFF2-40B4-BE49-F238E27FC236}">
+                <a16:creationId xmlns:a16="http://schemas.microsoft.com/office/drawing/2014/main" id="{2B45A761-319D-4E5C-8970-734317C97C2D}"/>
+              </a:ext>
+            </a:extLst>
+          </p:cNvPr>
+          <p:cNvSpPr>
+            <a:spLocks xmlns:a="http://schemas.openxmlformats.org/drawingml/2006/main" noGrp="1"/>
+          </p:cNvSpPr>
+          <p:nvPr/>
+        </p:nvSpPr>
+        <p:spPr>
+          <a:xfrm xmlns:a="http://schemas.openxmlformats.org/drawingml/2006/main">
+            <a:off x="2324100" y="4857750"/>
+            <a:ext cx="3238500" cy="742950"/>
+          </a:xfrm>
+          <a:prstGeom xmlns:a="http://schemas.openxmlformats.org/drawingml/2006/main" prst="rect">
+            <a:avLst/>
+          </a:prstGeom>
+          <a:solidFill xmlns:a="http://schemas.openxmlformats.org/drawingml/2006/main">
+            <a:srgbClr val="F6F7F9"/>
+          </a:solidFill>
+          <a:ln xmlns:a="http://schemas.openxmlformats.org/drawingml/2006/main" w="9525">
+            <a:solidFill>
+              <a:srgbClr val="B8BCC4"/>
+            </a:solidFill>
+            <a:prstDash val="solid"/>
+          </a:ln>
+        </p:spPr>
+      </p:sp>
+      <p:sp>
+        <p:nvSpPr>
+          <p:cNvPr id="38" name="">
+            <a:extLst xmlns:a="http://schemas.openxmlformats.org/drawingml/2006/main">
+              <a:ext uri="{FF2B5EF4-FFF2-40B4-BE49-F238E27FC236}">
+                <a16:creationId xmlns:a16="http://schemas.microsoft.com/office/drawing/2014/main" id="{2A3499B4-EAAA-495F-B610-679DD9FB4DCD}"/>
+              </a:ext>
+            </a:extLst>
+          </p:cNvPr>
+          <p:cNvSpPr>
+            <a:spLocks xmlns:a="http://schemas.openxmlformats.org/drawingml/2006/main" noGrp="1"/>
+          </p:cNvSpPr>
+          <p:nvPr/>
+        </p:nvSpPr>
+        <p:spPr>
+          <a:xfrm xmlns:a="http://schemas.openxmlformats.org/drawingml/2006/main">
+            <a:off x="2457450" y="4991100"/>
+            <a:ext cx="2971800" cy="457200"/>
+          </a:xfrm>
+          <a:prstGeom xmlns:a="http://schemas.openxmlformats.org/drawingml/2006/main" prst="rect">
+            <a:avLst/>
+          </a:prstGeom>
+          <a:noFill xmlns:a="http://schemas.openxmlformats.org/drawingml/2006/main"/>
+          <a:ln xmlns:a="http://schemas.openxmlformats.org/drawingml/2006/main" w="0">
+            <a:noFill/>
+            <a:prstDash val="solid"/>
+          </a:ln>
+        </p:spPr>
+        <p:txBody>
+          <a:bodyPr xmlns:a="http://schemas.openxmlformats.org/drawingml/2006/main"/>
+          <a:lstStyle xmlns:a="http://schemas.openxmlformats.org/drawingml/2006/main"/>
+          <a:p xmlns:a="http://schemas.openxmlformats.org/drawingml/2006/main">
+            <a:pPr>
+              <a:defRPr sz="1200" b="0">
+                <a:solidFill>
+                  <a:srgbClr val="4B5563"/>
+                </a:solidFill>
+                <a:latin typeface="Helvetica Neue"/>
+                <a:ea typeface="Helvetica Neue"/>
+                <a:cs typeface="Helvetica Neue"/>
+              </a:defRPr>
+            </a:pPr>
+            <a:r>
+              <a:rPr sz="1200" b="0">
+                <a:solidFill>
+                  <a:srgbClr val="4B5563"/>
+                </a:solidFill>
+                <a:latin typeface="Helvetica Neue"/>
+                <a:ea typeface="Helvetica Neue"/>
+                <a:cs typeface="Helvetica Neue"/>
+              </a:rPr>
+              <a:t>Explain failure signals and next fixes.</a:t>
+            </a:r>
+          </a:p>
+        </p:txBody>
+      </p:sp>
+      <p:sp>
+        <p:nvSpPr>
+          <p:cNvPr id="39" name="">
+            <a:extLst xmlns:a="http://schemas.openxmlformats.org/drawingml/2006/main">
+              <a:ext uri="{FF2B5EF4-FFF2-40B4-BE49-F238E27FC236}">
+                <a16:creationId xmlns:a16="http://schemas.microsoft.com/office/drawing/2014/main" id="{501865A8-0C6A-401D-B76F-72AED8E73297}"/>
+              </a:ext>
+            </a:extLst>
+          </p:cNvPr>
+          <p:cNvSpPr>
+            <a:spLocks xmlns:a="http://schemas.openxmlformats.org/drawingml/2006/main" noGrp="1"/>
+          </p:cNvSpPr>
+          <p:nvPr/>
+        </p:nvSpPr>
+        <p:spPr>
+          <a:xfrm xmlns:a="http://schemas.openxmlformats.org/drawingml/2006/main">
+            <a:off x="5562600" y="4857750"/>
+            <a:ext cx="3429000" cy="742950"/>
+          </a:xfrm>
+          <a:prstGeom xmlns:a="http://schemas.openxmlformats.org/drawingml/2006/main" prst="rect">
+            <a:avLst/>
+          </a:prstGeom>
+          <a:solidFill xmlns:a="http://schemas.openxmlformats.org/drawingml/2006/main">
+            <a:srgbClr val="F6F7F9"/>
+          </a:solidFill>
+          <a:ln xmlns:a="http://schemas.openxmlformats.org/drawingml/2006/main" w="9525">
+            <a:solidFill>
+              <a:srgbClr val="B8BCC4"/>
+            </a:solidFill>
+            <a:prstDash val="solid"/>
+          </a:ln>
+        </p:spPr>
+      </p:sp>
+      <p:sp>
+        <p:nvSpPr>
+          <p:cNvPr id="40" name="">
+            <a:extLst xmlns:a="http://schemas.openxmlformats.org/drawingml/2006/main">
+              <a:ext uri="{FF2B5EF4-FFF2-40B4-BE49-F238E27FC236}">
+                <a16:creationId xmlns:a16="http://schemas.microsoft.com/office/drawing/2014/main" id="{FEA6C491-E433-4E98-9A8B-7FAD21A4F3BF}"/>
+              </a:ext>
+            </a:extLst>
+          </p:cNvPr>
+          <p:cNvSpPr>
+            <a:spLocks xmlns:a="http://schemas.openxmlformats.org/drawingml/2006/main" noGrp="1"/>
+          </p:cNvSpPr>
+          <p:nvPr/>
+        </p:nvSpPr>
+        <p:spPr>
+          <a:xfrm xmlns:a="http://schemas.openxmlformats.org/drawingml/2006/main">
+            <a:off x="5695950" y="4991100"/>
+            <a:ext cx="3162300" cy="457200"/>
+          </a:xfrm>
+          <a:prstGeom xmlns:a="http://schemas.openxmlformats.org/drawingml/2006/main" prst="rect">
+            <a:avLst/>
+          </a:prstGeom>
+          <a:noFill xmlns:a="http://schemas.openxmlformats.org/drawingml/2006/main"/>
+          <a:ln xmlns:a="http://schemas.openxmlformats.org/drawingml/2006/main" w="0">
+            <a:noFill/>
+            <a:prstDash val="solid"/>
+          </a:ln>
+        </p:spPr>
+        <p:txBody>
+          <a:bodyPr xmlns:a="http://schemas.openxmlformats.org/drawingml/2006/main"/>
+          <a:lstStyle xmlns:a="http://schemas.openxmlformats.org/drawingml/2006/main"/>
+          <a:p xmlns:a="http://schemas.openxmlformats.org/drawingml/2006/main">
+            <a:pPr>
+              <a:defRPr sz="1200" b="0">
+                <a:solidFill>
+                  <a:srgbClr val="4B5563"/>
+                </a:solidFill>
+                <a:latin typeface="Helvetica Neue"/>
+                <a:ea typeface="Helvetica Neue"/>
+                <a:cs typeface="Helvetica Neue"/>
+              </a:defRPr>
+            </a:pPr>
+            <a:r>
+              <a:rPr sz="1200" b="0">
+                <a:solidFill>
+                  <a:srgbClr val="4B5563"/>
+                </a:solidFill>
+                <a:latin typeface="Helvetica Neue"/>
+                <a:ea typeface="Helvetica Neue"/>
+                <a:cs typeface="Helvetica Neue"/>
+              </a:rPr>
+              <a:t>Verify endpoints and Container App revision health.</a:t>
+            </a:r>
+          </a:p>
+        </p:txBody>
+      </p:sp>
+      <p:sp>
+        <p:nvSpPr>
+          <p:cNvPr id="41" name="">
+            <a:extLst xmlns:a="http://schemas.openxmlformats.org/drawingml/2006/main">
+              <a:ext uri="{FF2B5EF4-FFF2-40B4-BE49-F238E27FC236}">
+                <a16:creationId xmlns:a16="http://schemas.microsoft.com/office/drawing/2014/main" id="{C28F2FB7-0E57-4AC8-A943-3B53CA4660C4}"/>
+              </a:ext>
+            </a:extLst>
+          </p:cNvPr>
+          <p:cNvSpPr>
+            <a:spLocks xmlns:a="http://schemas.openxmlformats.org/drawingml/2006/main" noGrp="1"/>
+          </p:cNvSpPr>
+          <p:nvPr/>
+        </p:nvSpPr>
+        <p:spPr>
+          <a:xfrm xmlns:a="http://schemas.openxmlformats.org/drawingml/2006/main">
+            <a:off x="8991600" y="4857750"/>
+            <a:ext cx="2381250" cy="742950"/>
+          </a:xfrm>
+          <a:prstGeom xmlns:a="http://schemas.openxmlformats.org/drawingml/2006/main" prst="rect">
+            <a:avLst/>
+          </a:prstGeom>
+          <a:solidFill xmlns:a="http://schemas.openxmlformats.org/drawingml/2006/main">
+            <a:srgbClr val="F6F7F9"/>
+          </a:solidFill>
+          <a:ln xmlns:a="http://schemas.openxmlformats.org/drawingml/2006/main" w="9525">
+            <a:solidFill>
+              <a:srgbClr val="B8BCC4"/>
+            </a:solidFill>
+            <a:prstDash val="solid"/>
+          </a:ln>
+        </p:spPr>
+      </p:sp>
+      <p:sp>
+        <p:nvSpPr>
+          <p:cNvPr id="42" name="">
+            <a:extLst xmlns:a="http://schemas.openxmlformats.org/drawingml/2006/main">
+              <a:ext uri="{FF2B5EF4-FFF2-40B4-BE49-F238E27FC236}">
+                <a16:creationId xmlns:a16="http://schemas.microsoft.com/office/drawing/2014/main" id="{5754810D-4655-4C05-A257-17A617950471}"/>
+              </a:ext>
+            </a:extLst>
+          </p:cNvPr>
+          <p:cNvSpPr>
+            <a:spLocks xmlns:a="http://schemas.openxmlformats.org/drawingml/2006/main" noGrp="1"/>
+          </p:cNvSpPr>
+          <p:nvPr/>
+        </p:nvSpPr>
+        <p:spPr>
+          <a:xfrm xmlns:a="http://schemas.openxmlformats.org/drawingml/2006/main">
+            <a:off x="9124950" y="4991100"/>
+            <a:ext cx="2114550" cy="457200"/>
+          </a:xfrm>
+          <a:prstGeom xmlns:a="http://schemas.openxmlformats.org/drawingml/2006/main" prst="rect">
+            <a:avLst/>
+          </a:prstGeom>
+          <a:noFill xmlns:a="http://schemas.openxmlformats.org/drawingml/2006/main"/>
+          <a:ln xmlns:a="http://schemas.openxmlformats.org/drawingml/2006/main" w="0">
+            <a:noFill/>
+            <a:prstDash val="solid"/>
+          </a:ln>
+        </p:spPr>
+        <p:txBody>
+          <a:bodyPr xmlns:a="http://schemas.openxmlformats.org/drawingml/2006/main"/>
+          <a:lstStyle xmlns:a="http://schemas.openxmlformats.org/drawingml/2006/main"/>
+          <a:p xmlns:a="http://schemas.openxmlformats.org/drawingml/2006/main">
+            <a:pPr>
+              <a:defRPr sz="1200" b="0">
+                <a:solidFill>
+                  <a:srgbClr val="4B5563"/>
+                </a:solidFill>
+                <a:latin typeface="Helvetica Neue"/>
+                <a:ea typeface="Helvetica Neue"/>
+                <a:cs typeface="Helvetica Neue"/>
+              </a:defRPr>
+            </a:pPr>
+            <a:r>
+              <a:rPr sz="1200" b="0">
+                <a:solidFill>
+                  <a:srgbClr val="4B5563"/>
+                </a:solidFill>
+                <a:latin typeface="Helvetica Neue"/>
+                <a:ea typeface="Helvetica Neue"/>
+                <a:cs typeface="Helvetica Neue"/>
+              </a:rPr>
+              <a:t>Evidence-backed approval.</a:t>
+            </a:r>
+          </a:p>
+        </p:txBody>
+      </p:sp>
+      <p:sp>
+        <p:nvSpPr>
+          <p:cNvPr id="43" name="">
+            <a:extLst xmlns:a="http://schemas.openxmlformats.org/drawingml/2006/main">
+              <a:ext uri="{FF2B5EF4-FFF2-40B4-BE49-F238E27FC236}">
+                <a16:creationId xmlns:a16="http://schemas.microsoft.com/office/drawing/2014/main" id="{55EB62BA-EDF1-471C-B540-21243641DC70}"/>
+              </a:ext>
+            </a:extLst>
+          </p:cNvPr>
+          <p:cNvSpPr>
+            <a:spLocks xmlns:a="http://schemas.openxmlformats.org/drawingml/2006/main" noGrp="1"/>
+          </p:cNvSpPr>
+          <p:nvPr/>
+        </p:nvSpPr>
+        <p:spPr>
+          <a:xfrm xmlns:a="http://schemas.openxmlformats.org/drawingml/2006/main">
+            <a:off x="11277600" y="6276975"/>
+            <a:ext cx="523875" cy="247650"/>
+          </a:xfrm>
+          <a:prstGeom xmlns:a="http://schemas.openxmlformats.org/drawingml/2006/main" prst="rect">
+            <a:avLst/>
+          </a:prstGeom>
+          <a:noFill xmlns:a="http://schemas.openxmlformats.org/drawingml/2006/main"/>
+          <a:ln xmlns:a="http://schemas.openxmlformats.org/drawingml/2006/main" w="0">
+            <a:noFill/>
+            <a:prstDash val="solid"/>
+          </a:ln>
+        </p:spPr>
+        <p:txBody>
+          <a:bodyPr xmlns:a="http://schemas.openxmlformats.org/drawingml/2006/main"/>
+          <a:lstStyle xmlns:a="http://schemas.openxmlformats.org/drawingml/2006/main"/>
+          <a:p xmlns:a="http://schemas.openxmlformats.org/drawingml/2006/main">
+            <a:pPr algn="r">
+              <a:defRPr sz="975">
+                <a:solidFill>
+                  <a:srgbClr val="000000"/>
+                </a:solidFill>
+                <a:latin typeface="Helvetica Neue"/>
+                <a:ea typeface="Helvetica Neue"/>
+                <a:cs typeface="Helvetica Neue"/>
+              </a:defRPr>
+            </a:pPr>
+            <a:r>
+              <a:rPr sz="975">
+                <a:solidFill>
+                  <a:srgbClr val="000000"/>
+                </a:solidFill>
+                <a:latin typeface="Helvetica Neue"/>
+                <a:ea typeface="Helvetica Neue"/>
+                <a:cs typeface="Helvetica Neue"/>
+              </a:rPr>
+              <a:t>6</a:t>
+            </a:r>
+          </a:p>
+        </p:txBody>
+      </p:sp>
+    </p:spTree>
+    <p:extLst>
+      <p:ext uri="{BB962C8B-B14F-4D97-AF65-F5344CB8AC3E}">
+        <p14:creationId xmlns:p14="http://schemas.microsoft.com/office/powerpoint/2010/main" val="1109892872"/>
+      </p:ext>
+    </p:extLst>
+  </p:cSld>
+</p:sld>
+</file>
+
+<file path=ppt/slides/slide7.xml><?xml version="1.0" encoding="utf-8"?>
+<p:sld xmlns:p="http://schemas.openxmlformats.org/presentationml/2006/main">
+  <p:cSld>
+    <p:bg>
+      <p:bgPr>
+        <a:solidFill xmlns:a="http://schemas.openxmlformats.org/drawingml/2006/main">
+          <a:srgbClr val="FFFFFF"/>
+        </a:solidFill>
+      </p:bgPr>
+    </p:bg>
+    <p:spTree>
+      <p:nvGrpSpPr>
+        <p:cNvPr id="1" name=""/>
+        <p:cNvGrpSpPr/>
+        <p:nvPr/>
+      </p:nvGrpSpPr>
+      <p:grpSpPr>
+        <a:xfrm xmlns:a="http://schemas.openxmlformats.org/drawingml/2006/main"/>
+      </p:grpSpPr>
+      <p:sp>
+        <p:nvSpPr>
+          <p:cNvPr id="28" name="">
+            <a:extLst xmlns:a="http://schemas.openxmlformats.org/drawingml/2006/main">
+              <a:ext uri="{FF2B5EF4-FFF2-40B4-BE49-F238E27FC236}">
+                <a16:creationId xmlns:a16="http://schemas.microsoft.com/office/drawing/2014/main" id="{F2BB3E2C-ABCC-44C7-9945-7B0D17C1A7DE}"/>
+              </a:ext>
+            </a:extLst>
+          </p:cNvPr>
+          <p:cNvSpPr>
+            <a:spLocks xmlns:a="http://schemas.openxmlformats.org/drawingml/2006/main" noGrp="1"/>
+          </p:cNvSpPr>
+          <p:nvPr/>
+        </p:nvSpPr>
+        <p:spPr>
+          <a:xfrm xmlns:a="http://schemas.openxmlformats.org/drawingml/2006/main">
+            <a:off x="390525" y="400050"/>
+            <a:ext cx="10572750" cy="723900"/>
+          </a:xfrm>
+          <a:prstGeom xmlns:a="http://schemas.openxmlformats.org/drawingml/2006/main" prst="rect">
+            <a:avLst/>
+          </a:prstGeom>
+          <a:noFill xmlns:a="http://schemas.openxmlformats.org/drawingml/2006/main"/>
+          <a:ln xmlns:a="http://schemas.openxmlformats.org/drawingml/2006/main" w="0">
+            <a:noFill/>
+            <a:prstDash val="solid"/>
+          </a:ln>
+        </p:spPr>
+        <p:txBody>
+          <a:bodyPr xmlns:a="http://schemas.openxmlformats.org/drawingml/2006/main"/>
+          <a:lstStyle xmlns:a="http://schemas.openxmlformats.org/drawingml/2006/main"/>
+          <a:p xmlns:a="http://schemas.openxmlformats.org/drawingml/2006/main">
+            <a:pPr>
+              <a:defRPr sz="3000" b="1">
+                <a:solidFill>
+                  <a:srgbClr val="000000"/>
+                </a:solidFill>
+                <a:latin typeface="Helvetica Neue"/>
+                <a:ea typeface="Helvetica Neue"/>
+                <a:cs typeface="Helvetica Neue"/>
+              </a:defRPr>
+            </a:pPr>
+            <a:r>
+              <a:rPr sz="3000" b="1">
+                <a:solidFill>
+                  <a:srgbClr val="000000"/>
+                </a:solidFill>
+                <a:latin typeface="Helvetica Neue"/>
+                <a:ea typeface="Helvetica Neue"/>
+                <a:cs typeface="Helvetica Neue"/>
+              </a:rPr>
+              <a:t>Use the pattern as a delivery operating model</a:t>
+            </a:r>
+          </a:p>
+        </p:txBody>
+      </p:sp>
+      <p:sp>
+        <p:nvSpPr>
+          <p:cNvPr id="2" name="">
+            <a:extLst xmlns:a="http://schemas.openxmlformats.org/drawingml/2006/main">
+              <a:ext uri="{FF2B5EF4-FFF2-40B4-BE49-F238E27FC236}">
+                <a16:creationId xmlns:a16="http://schemas.microsoft.com/office/drawing/2014/main" id="{E14342C8-5383-49BC-9F16-FBD128455E1E}"/>
+              </a:ext>
+            </a:extLst>
+          </p:cNvPr>
+          <p:cNvSpPr>
+            <a:spLocks xmlns:a="http://schemas.openxmlformats.org/drawingml/2006/main" noGrp="1"/>
+          </p:cNvSpPr>
+          <p:nvPr/>
+        </p:nvSpPr>
+        <p:spPr>
+          <a:xfrm xmlns:a="http://schemas.openxmlformats.org/drawingml/2006/main">
+            <a:off x="666750" y="1571625"/>
+            <a:ext cx="3429000" cy="3381375"/>
+          </a:xfrm>
+          <a:prstGeom xmlns:a="http://schemas.openxmlformats.org/drawingml/2006/main" prst="rect">
+            <a:avLst/>
+          </a:prstGeom>
+          <a:solidFill xmlns:a="http://schemas.openxmlformats.org/drawingml/2006/main">
+            <a:srgbClr val="F6F7F9"/>
+          </a:solidFill>
+          <a:ln xmlns:a="http://schemas.openxmlformats.org/drawingml/2006/main" w="9525">
+            <a:solidFill>
+              <a:srgbClr val="B8BCC4"/>
+            </a:solidFill>
+            <a:prstDash val="solid"/>
+          </a:ln>
+        </p:spPr>
+      </p:sp>
+      <p:sp>
+        <p:nvSpPr>
+          <p:cNvPr id="3" name="">
+            <a:extLst xmlns:a="http://schemas.openxmlformats.org/drawingml/2006/main">
+              <a:ext uri="{FF2B5EF4-FFF2-40B4-BE49-F238E27FC236}">
+                <a16:creationId xmlns:a16="http://schemas.microsoft.com/office/drawing/2014/main" id="{A52EF856-FAC4-46D6-8EFF-0F2A0CBD66C4}"/>
+              </a:ext>
+            </a:extLst>
+          </p:cNvPr>
+          <p:cNvSpPr>
+            <a:spLocks xmlns:a="http://schemas.openxmlformats.org/drawingml/2006/main" noGrp="1"/>
+          </p:cNvSpPr>
+          <p:nvPr/>
+        </p:nvSpPr>
+        <p:spPr>
+          <a:xfrm xmlns:a="http://schemas.openxmlformats.org/drawingml/2006/main">
+            <a:off x="933450" y="1885950"/>
             <a:ext cx="2857500" cy="323850"/>
           </a:xfrm>
           <a:prstGeom xmlns:a="http://schemas.openxmlformats.org/drawingml/2006/main" prst="rect">
@@ -8335,28 +8744,28 @@
                 <a:ea typeface="Helvetica Neue"/>
                 <a:cs typeface="Helvetica Neue"/>
               </a:rPr>
-              <a:t>Govern</a:t>
-            </a:r>
-          </a:p>
-        </p:txBody>
-      </p:sp>
-      <p:sp>
-        <p:nvSpPr>
-          <p:cNvPr id="12" name="">
-            <a:extLst xmlns:a="http://schemas.openxmlformats.org/drawingml/2006/main">
-              <a:ext uri="{FF2B5EF4-FFF2-40B4-BE49-F238E27FC236}">
-                <a16:creationId xmlns:a16="http://schemas.microsoft.com/office/drawing/2014/main" id="{88E45526-F2CB-4D49-B0BA-5ED3D97A7DB1}"/>
-              </a:ext>
-            </a:extLst>
-          </p:cNvPr>
-          <p:cNvSpPr>
-            <a:spLocks xmlns:a="http://schemas.openxmlformats.org/drawingml/2006/main" noGrp="1"/>
-          </p:cNvSpPr>
-          <p:nvPr/>
-        </p:nvSpPr>
-        <p:spPr>
-          <a:xfrm xmlns:a="http://schemas.openxmlformats.org/drawingml/2006/main">
-            <a:off x="4667250" y="2543175"/>
+              <a:t>Standardize</a:t>
+            </a:r>
+          </a:p>
+        </p:txBody>
+      </p:sp>
+      <p:sp>
+        <p:nvSpPr>
+          <p:cNvPr id="4" name="">
+            <a:extLst xmlns:a="http://schemas.openxmlformats.org/drawingml/2006/main">
+              <a:ext uri="{FF2B5EF4-FFF2-40B4-BE49-F238E27FC236}">
+                <a16:creationId xmlns:a16="http://schemas.microsoft.com/office/drawing/2014/main" id="{59F438EE-52B5-4B32-86BD-934A72561E95}"/>
+              </a:ext>
+            </a:extLst>
+          </p:cNvPr>
+          <p:cNvSpPr>
+            <a:spLocks xmlns:a="http://schemas.openxmlformats.org/drawingml/2006/main" noGrp="1"/>
+          </p:cNvSpPr>
+          <p:nvPr/>
+        </p:nvSpPr>
+        <p:spPr>
+          <a:xfrm xmlns:a="http://schemas.openxmlformats.org/drawingml/2006/main">
+            <a:off x="952500" y="2543175"/>
             <a:ext cx="95250" cy="95250"/>
           </a:xfrm>
           <a:prstGeom xmlns:a="http://schemas.openxmlformats.org/drawingml/2006/main" prst="ellipse">
@@ -8375,21 +8784,21 @@
       </p:sp>
       <p:sp>
         <p:nvSpPr>
-          <p:cNvPr id="13" name="">
-            <a:extLst xmlns:a="http://schemas.openxmlformats.org/drawingml/2006/main">
-              <a:ext uri="{FF2B5EF4-FFF2-40B4-BE49-F238E27FC236}">
-                <a16:creationId xmlns:a16="http://schemas.microsoft.com/office/drawing/2014/main" id="{3DFB5F28-EF37-4299-B2AF-2CA15C6B36B2}"/>
-              </a:ext>
-            </a:extLst>
-          </p:cNvPr>
-          <p:cNvSpPr>
-            <a:spLocks xmlns:a="http://schemas.openxmlformats.org/drawingml/2006/main" noGrp="1"/>
-          </p:cNvSpPr>
-          <p:nvPr/>
-        </p:nvSpPr>
-        <p:spPr>
-          <a:xfrm xmlns:a="http://schemas.openxmlformats.org/drawingml/2006/main">
-            <a:off x="4914900" y="2476500"/>
+          <p:cNvPr id="5" name="">
+            <a:extLst xmlns:a="http://schemas.openxmlformats.org/drawingml/2006/main">
+              <a:ext uri="{FF2B5EF4-FFF2-40B4-BE49-F238E27FC236}">
+                <a16:creationId xmlns:a16="http://schemas.microsoft.com/office/drawing/2014/main" id="{A07A2A78-3D58-4967-BE48-A562DA980790}"/>
+              </a:ext>
+            </a:extLst>
+          </p:cNvPr>
+          <p:cNvSpPr>
+            <a:spLocks xmlns:a="http://schemas.openxmlformats.org/drawingml/2006/main" noGrp="1"/>
+          </p:cNvSpPr>
+          <p:nvPr/>
+        </p:nvSpPr>
+        <p:spPr>
+          <a:xfrm xmlns:a="http://schemas.openxmlformats.org/drawingml/2006/main">
+            <a:off x="1200150" y="2476500"/>
             <a:ext cx="2495550" cy="571500"/>
           </a:xfrm>
           <a:prstGeom xmlns:a="http://schemas.openxmlformats.org/drawingml/2006/main" prst="rect">
@@ -8424,28 +8833,28 @@
                 <a:ea typeface="Helvetica Neue"/>
                 <a:cs typeface="Helvetica Neue"/>
               </a:rPr>
-              <a:t>Approve RBAC, secrets, and risky infra.</a:t>
-            </a:r>
-          </a:p>
-        </p:txBody>
-      </p:sp>
-      <p:sp>
-        <p:nvSpPr>
-          <p:cNvPr id="14" name="">
-            <a:extLst xmlns:a="http://schemas.openxmlformats.org/drawingml/2006/main">
-              <a:ext uri="{FF2B5EF4-FFF2-40B4-BE49-F238E27FC236}">
-                <a16:creationId xmlns:a16="http://schemas.microsoft.com/office/drawing/2014/main" id="{3693FC15-AC8A-418D-824B-F8CA07E40DCD}"/>
-              </a:ext>
-            </a:extLst>
-          </p:cNvPr>
-          <p:cNvSpPr>
-            <a:spLocks xmlns:a="http://schemas.openxmlformats.org/drawingml/2006/main" noGrp="1"/>
-          </p:cNvSpPr>
-          <p:nvPr/>
-        </p:nvSpPr>
-        <p:spPr>
-          <a:xfrm xmlns:a="http://schemas.openxmlformats.org/drawingml/2006/main">
-            <a:off x="4667250" y="3209925"/>
+              <a:t>Keep one playbook path across environments.</a:t>
+            </a:r>
+          </a:p>
+        </p:txBody>
+      </p:sp>
+      <p:sp>
+        <p:nvSpPr>
+          <p:cNvPr id="6" name="">
+            <a:extLst xmlns:a="http://schemas.openxmlformats.org/drawingml/2006/main">
+              <a:ext uri="{FF2B5EF4-FFF2-40B4-BE49-F238E27FC236}">
+                <a16:creationId xmlns:a16="http://schemas.microsoft.com/office/drawing/2014/main" id="{ECBBA427-2088-4B44-89B9-F673C1C9456D}"/>
+              </a:ext>
+            </a:extLst>
+          </p:cNvPr>
+          <p:cNvSpPr>
+            <a:spLocks xmlns:a="http://schemas.openxmlformats.org/drawingml/2006/main" noGrp="1"/>
+          </p:cNvSpPr>
+          <p:nvPr/>
+        </p:nvSpPr>
+        <p:spPr>
+          <a:xfrm xmlns:a="http://schemas.openxmlformats.org/drawingml/2006/main">
+            <a:off x="952500" y="3209925"/>
             <a:ext cx="95250" cy="95250"/>
           </a:xfrm>
           <a:prstGeom xmlns:a="http://schemas.openxmlformats.org/drawingml/2006/main" prst="ellipse">
@@ -8464,21 +8873,21 @@
       </p:sp>
       <p:sp>
         <p:nvSpPr>
-          <p:cNvPr id="15" name="">
-            <a:extLst xmlns:a="http://schemas.openxmlformats.org/drawingml/2006/main">
-              <a:ext uri="{FF2B5EF4-FFF2-40B4-BE49-F238E27FC236}">
-                <a16:creationId xmlns:a16="http://schemas.microsoft.com/office/drawing/2014/main" id="{ABB57EB5-BD13-4EC1-8956-D253D4928E5A}"/>
-              </a:ext>
-            </a:extLst>
-          </p:cNvPr>
-          <p:cNvSpPr>
-            <a:spLocks xmlns:a="http://schemas.openxmlformats.org/drawingml/2006/main" noGrp="1"/>
-          </p:cNvSpPr>
-          <p:nvPr/>
-        </p:nvSpPr>
-        <p:spPr>
-          <a:xfrm xmlns:a="http://schemas.openxmlformats.org/drawingml/2006/main">
-            <a:off x="4914900" y="3143250"/>
+          <p:cNvPr id="7" name="">
+            <a:extLst xmlns:a="http://schemas.openxmlformats.org/drawingml/2006/main">
+              <a:ext uri="{FF2B5EF4-FFF2-40B4-BE49-F238E27FC236}">
+                <a16:creationId xmlns:a16="http://schemas.microsoft.com/office/drawing/2014/main" id="{808C9864-136D-46D3-BE4B-E6C21B897A69}"/>
+              </a:ext>
+            </a:extLst>
+          </p:cNvPr>
+          <p:cNvSpPr>
+            <a:spLocks xmlns:a="http://schemas.openxmlformats.org/drawingml/2006/main" noGrp="1"/>
+          </p:cNvSpPr>
+          <p:nvPr/>
+        </p:nvSpPr>
+        <p:spPr>
+          <a:xfrm xmlns:a="http://schemas.openxmlformats.org/drawingml/2006/main">
+            <a:off x="1200150" y="3143250"/>
             <a:ext cx="2495550" cy="571500"/>
           </a:xfrm>
           <a:prstGeom xmlns:a="http://schemas.openxmlformats.org/drawingml/2006/main" prst="rect">
@@ -8513,28 +8922,28 @@
                 <a:ea typeface="Helvetica Neue"/>
                 <a:cs typeface="Helvetica Neue"/>
               </a:rPr>
-              <a:t>Let CI run validation before promotion.</a:t>
-            </a:r>
-          </a:p>
-        </p:txBody>
-      </p:sp>
-      <p:sp>
-        <p:nvSpPr>
-          <p:cNvPr id="16" name="">
-            <a:extLst xmlns:a="http://schemas.openxmlformats.org/drawingml/2006/main">
-              <a:ext uri="{FF2B5EF4-FFF2-40B4-BE49-F238E27FC236}">
-                <a16:creationId xmlns:a16="http://schemas.microsoft.com/office/drawing/2014/main" id="{2AE21EDD-7C75-40B8-B330-62968C8D56A1}"/>
-              </a:ext>
-            </a:extLst>
-          </p:cNvPr>
-          <p:cNvSpPr>
-            <a:spLocks xmlns:a="http://schemas.openxmlformats.org/drawingml/2006/main" noGrp="1"/>
-          </p:cNvSpPr>
-          <p:nvPr/>
-        </p:nvSpPr>
-        <p:spPr>
-          <a:xfrm xmlns:a="http://schemas.openxmlformats.org/drawingml/2006/main">
-            <a:off x="4667250" y="3876675"/>
+              <a:t>Treat env files and inventory as release inputs.</a:t>
+            </a:r>
+          </a:p>
+        </p:txBody>
+      </p:sp>
+      <p:sp>
+        <p:nvSpPr>
+          <p:cNvPr id="8" name="">
+            <a:extLst xmlns:a="http://schemas.openxmlformats.org/drawingml/2006/main">
+              <a:ext uri="{FF2B5EF4-FFF2-40B4-BE49-F238E27FC236}">
+                <a16:creationId xmlns:a16="http://schemas.microsoft.com/office/drawing/2014/main" id="{B94FC703-543A-4808-9FAC-B5FCBE6BDD09}"/>
+              </a:ext>
+            </a:extLst>
+          </p:cNvPr>
+          <p:cNvSpPr>
+            <a:spLocks xmlns:a="http://schemas.openxmlformats.org/drawingml/2006/main" noGrp="1"/>
+          </p:cNvSpPr>
+          <p:nvPr/>
+        </p:nvSpPr>
+        <p:spPr>
+          <a:xfrm xmlns:a="http://schemas.openxmlformats.org/drawingml/2006/main">
+            <a:off x="952500" y="3876675"/>
             <a:ext cx="95250" cy="95250"/>
           </a:xfrm>
           <a:prstGeom xmlns:a="http://schemas.openxmlformats.org/drawingml/2006/main" prst="ellipse">
@@ -8553,10 +8962,366 @@
       </p:sp>
       <p:sp>
         <p:nvSpPr>
+          <p:cNvPr id="9" name="">
+            <a:extLst xmlns:a="http://schemas.openxmlformats.org/drawingml/2006/main">
+              <a:ext uri="{FF2B5EF4-FFF2-40B4-BE49-F238E27FC236}">
+                <a16:creationId xmlns:a16="http://schemas.microsoft.com/office/drawing/2014/main" id="{C90C8455-33D6-43DF-BC3A-DC1D56E3C8E9}"/>
+              </a:ext>
+            </a:extLst>
+          </p:cNvPr>
+          <p:cNvSpPr>
+            <a:spLocks xmlns:a="http://schemas.openxmlformats.org/drawingml/2006/main" noGrp="1"/>
+          </p:cNvSpPr>
+          <p:nvPr/>
+        </p:nvSpPr>
+        <p:spPr>
+          <a:xfrm xmlns:a="http://schemas.openxmlformats.org/drawingml/2006/main">
+            <a:off x="1200150" y="3810000"/>
+            <a:ext cx="2495550" cy="571500"/>
+          </a:xfrm>
+          <a:prstGeom xmlns:a="http://schemas.openxmlformats.org/drawingml/2006/main" prst="rect">
+            <a:avLst/>
+          </a:prstGeom>
+          <a:noFill xmlns:a="http://schemas.openxmlformats.org/drawingml/2006/main"/>
+          <a:ln xmlns:a="http://schemas.openxmlformats.org/drawingml/2006/main" w="0">
+            <a:noFill/>
+            <a:prstDash val="solid"/>
+          </a:ln>
+        </p:spPr>
+        <p:txBody>
+          <a:bodyPr xmlns:a="http://schemas.openxmlformats.org/drawingml/2006/main"/>
+          <a:lstStyle xmlns:a="http://schemas.openxmlformats.org/drawingml/2006/main"/>
+          <a:p xmlns:a="http://schemas.openxmlformats.org/drawingml/2006/main">
+            <a:pPr>
+              <a:defRPr sz="1575">
+                <a:solidFill>
+                  <a:srgbClr val="000000"/>
+                </a:solidFill>
+                <a:latin typeface="Helvetica Neue"/>
+                <a:ea typeface="Helvetica Neue"/>
+                <a:cs typeface="Helvetica Neue"/>
+              </a:defRPr>
+            </a:pPr>
+            <a:r>
+              <a:rPr sz="1575">
+                <a:solidFill>
+                  <a:srgbClr val="000000"/>
+                </a:solidFill>
+                <a:latin typeface="Helvetica Neue"/>
+                <a:ea typeface="Helvetica Neue"/>
+                <a:cs typeface="Helvetica Neue"/>
+              </a:rPr>
+              <a:t>Make bastion source strategy explicit.</a:t>
+            </a:r>
+          </a:p>
+        </p:txBody>
+      </p:sp>
+      <p:sp>
+        <p:nvSpPr>
+          <p:cNvPr id="10" name="">
+            <a:extLst xmlns:a="http://schemas.openxmlformats.org/drawingml/2006/main">
+              <a:ext uri="{FF2B5EF4-FFF2-40B4-BE49-F238E27FC236}">
+                <a16:creationId xmlns:a16="http://schemas.microsoft.com/office/drawing/2014/main" id="{AA0AB3D2-2478-4CBE-A379-6F7880CC890F}"/>
+              </a:ext>
+            </a:extLst>
+          </p:cNvPr>
+          <p:cNvSpPr>
+            <a:spLocks xmlns:a="http://schemas.openxmlformats.org/drawingml/2006/main" noGrp="1"/>
+          </p:cNvSpPr>
+          <p:nvPr/>
+        </p:nvSpPr>
+        <p:spPr>
+          <a:xfrm xmlns:a="http://schemas.openxmlformats.org/drawingml/2006/main">
+            <a:off x="4381500" y="1571625"/>
+            <a:ext cx="3429000" cy="3381375"/>
+          </a:xfrm>
+          <a:prstGeom xmlns:a="http://schemas.openxmlformats.org/drawingml/2006/main" prst="rect">
+            <a:avLst/>
+          </a:prstGeom>
+          <a:solidFill xmlns:a="http://schemas.openxmlformats.org/drawingml/2006/main">
+            <a:srgbClr val="FFFFFF"/>
+          </a:solidFill>
+          <a:ln xmlns:a="http://schemas.openxmlformats.org/drawingml/2006/main" w="9525">
+            <a:solidFill>
+              <a:srgbClr val="B8BCC4"/>
+            </a:solidFill>
+            <a:prstDash val="solid"/>
+          </a:ln>
+        </p:spPr>
+      </p:sp>
+      <p:sp>
+        <p:nvSpPr>
+          <p:cNvPr id="11" name="">
+            <a:extLst xmlns:a="http://schemas.openxmlformats.org/drawingml/2006/main">
+              <a:ext uri="{FF2B5EF4-FFF2-40B4-BE49-F238E27FC236}">
+                <a16:creationId xmlns:a16="http://schemas.microsoft.com/office/drawing/2014/main" id="{1369D01A-DA1B-4A36-94E1-C5BE8EB1F2B5}"/>
+              </a:ext>
+            </a:extLst>
+          </p:cNvPr>
+          <p:cNvSpPr>
+            <a:spLocks xmlns:a="http://schemas.openxmlformats.org/drawingml/2006/main" noGrp="1"/>
+          </p:cNvSpPr>
+          <p:nvPr/>
+        </p:nvSpPr>
+        <p:spPr>
+          <a:xfrm xmlns:a="http://schemas.openxmlformats.org/drawingml/2006/main">
+            <a:off x="4648200" y="1885950"/>
+            <a:ext cx="2857500" cy="323850"/>
+          </a:xfrm>
+          <a:prstGeom xmlns:a="http://schemas.openxmlformats.org/drawingml/2006/main" prst="rect">
+            <a:avLst/>
+          </a:prstGeom>
+          <a:noFill xmlns:a="http://schemas.openxmlformats.org/drawingml/2006/main"/>
+          <a:ln xmlns:a="http://schemas.openxmlformats.org/drawingml/2006/main" w="0">
+            <a:noFill/>
+            <a:prstDash val="solid"/>
+          </a:ln>
+        </p:spPr>
+        <p:txBody>
+          <a:bodyPr xmlns:a="http://schemas.openxmlformats.org/drawingml/2006/main"/>
+          <a:lstStyle xmlns:a="http://schemas.openxmlformats.org/drawingml/2006/main"/>
+          <a:p xmlns:a="http://schemas.openxmlformats.org/drawingml/2006/main">
+            <a:pPr>
+              <a:defRPr sz="2175" b="1">
+                <a:solidFill>
+                  <a:srgbClr val="000000"/>
+                </a:solidFill>
+                <a:latin typeface="Helvetica Neue"/>
+                <a:ea typeface="Helvetica Neue"/>
+                <a:cs typeface="Helvetica Neue"/>
+              </a:defRPr>
+            </a:pPr>
+            <a:r>
+              <a:rPr sz="2175" b="1">
+                <a:solidFill>
+                  <a:srgbClr val="000000"/>
+                </a:solidFill>
+                <a:latin typeface="Helvetica Neue"/>
+                <a:ea typeface="Helvetica Neue"/>
+                <a:cs typeface="Helvetica Neue"/>
+              </a:rPr>
+              <a:t>Govern</a:t>
+            </a:r>
+          </a:p>
+        </p:txBody>
+      </p:sp>
+      <p:sp>
+        <p:nvSpPr>
+          <p:cNvPr id="12" name="">
+            <a:extLst xmlns:a="http://schemas.openxmlformats.org/drawingml/2006/main">
+              <a:ext uri="{FF2B5EF4-FFF2-40B4-BE49-F238E27FC236}">
+                <a16:creationId xmlns:a16="http://schemas.microsoft.com/office/drawing/2014/main" id="{733F3A36-34E7-4D49-96E1-36C3B5EF1435}"/>
+              </a:ext>
+            </a:extLst>
+          </p:cNvPr>
+          <p:cNvSpPr>
+            <a:spLocks xmlns:a="http://schemas.openxmlformats.org/drawingml/2006/main" noGrp="1"/>
+          </p:cNvSpPr>
+          <p:nvPr/>
+        </p:nvSpPr>
+        <p:spPr>
+          <a:xfrm xmlns:a="http://schemas.openxmlformats.org/drawingml/2006/main">
+            <a:off x="4667250" y="2543175"/>
+            <a:ext cx="95250" cy="95250"/>
+          </a:xfrm>
+          <a:prstGeom xmlns:a="http://schemas.openxmlformats.org/drawingml/2006/main" prst="ellipse">
+            <a:avLst/>
+          </a:prstGeom>
+          <a:solidFill xmlns:a="http://schemas.openxmlformats.org/drawingml/2006/main">
+            <a:srgbClr val="3D8DFF"/>
+          </a:solidFill>
+          <a:ln xmlns:a="http://schemas.openxmlformats.org/drawingml/2006/main" w="0">
+            <a:solidFill>
+              <a:srgbClr val="3D8DFF"/>
+            </a:solidFill>
+            <a:prstDash val="solid"/>
+          </a:ln>
+        </p:spPr>
+      </p:sp>
+      <p:sp>
+        <p:nvSpPr>
+          <p:cNvPr id="13" name="">
+            <a:extLst xmlns:a="http://schemas.openxmlformats.org/drawingml/2006/main">
+              <a:ext uri="{FF2B5EF4-FFF2-40B4-BE49-F238E27FC236}">
+                <a16:creationId xmlns:a16="http://schemas.microsoft.com/office/drawing/2014/main" id="{991A7C94-75F7-408A-98B3-7EBF0367ADAC}"/>
+              </a:ext>
+            </a:extLst>
+          </p:cNvPr>
+          <p:cNvSpPr>
+            <a:spLocks xmlns:a="http://schemas.openxmlformats.org/drawingml/2006/main" noGrp="1"/>
+          </p:cNvSpPr>
+          <p:nvPr/>
+        </p:nvSpPr>
+        <p:spPr>
+          <a:xfrm xmlns:a="http://schemas.openxmlformats.org/drawingml/2006/main">
+            <a:off x="4914900" y="2476500"/>
+            <a:ext cx="2495550" cy="571500"/>
+          </a:xfrm>
+          <a:prstGeom xmlns:a="http://schemas.openxmlformats.org/drawingml/2006/main" prst="rect">
+            <a:avLst/>
+          </a:prstGeom>
+          <a:noFill xmlns:a="http://schemas.openxmlformats.org/drawingml/2006/main"/>
+          <a:ln xmlns:a="http://schemas.openxmlformats.org/drawingml/2006/main" w="0">
+            <a:noFill/>
+            <a:prstDash val="solid"/>
+          </a:ln>
+        </p:spPr>
+        <p:txBody>
+          <a:bodyPr xmlns:a="http://schemas.openxmlformats.org/drawingml/2006/main"/>
+          <a:lstStyle xmlns:a="http://schemas.openxmlformats.org/drawingml/2006/main"/>
+          <a:p xmlns:a="http://schemas.openxmlformats.org/drawingml/2006/main">
+            <a:pPr>
+              <a:defRPr sz="1575">
+                <a:solidFill>
+                  <a:srgbClr val="000000"/>
+                </a:solidFill>
+                <a:latin typeface="Helvetica Neue"/>
+                <a:ea typeface="Helvetica Neue"/>
+                <a:cs typeface="Helvetica Neue"/>
+              </a:defRPr>
+            </a:pPr>
+            <a:r>
+              <a:rPr sz="1575">
+                <a:solidFill>
+                  <a:srgbClr val="000000"/>
+                </a:solidFill>
+                <a:latin typeface="Helvetica Neue"/>
+                <a:ea typeface="Helvetica Neue"/>
+                <a:cs typeface="Helvetica Neue"/>
+              </a:rPr>
+              <a:t>Approve RBAC, secrets, and risky infra.</a:t>
+            </a:r>
+          </a:p>
+        </p:txBody>
+      </p:sp>
+      <p:sp>
+        <p:nvSpPr>
+          <p:cNvPr id="14" name="">
+            <a:extLst xmlns:a="http://schemas.openxmlformats.org/drawingml/2006/main">
+              <a:ext uri="{FF2B5EF4-FFF2-40B4-BE49-F238E27FC236}">
+                <a16:creationId xmlns:a16="http://schemas.microsoft.com/office/drawing/2014/main" id="{3B6C8B83-B760-40CB-B60F-E64B9451E8B8}"/>
+              </a:ext>
+            </a:extLst>
+          </p:cNvPr>
+          <p:cNvSpPr>
+            <a:spLocks xmlns:a="http://schemas.openxmlformats.org/drawingml/2006/main" noGrp="1"/>
+          </p:cNvSpPr>
+          <p:nvPr/>
+        </p:nvSpPr>
+        <p:spPr>
+          <a:xfrm xmlns:a="http://schemas.openxmlformats.org/drawingml/2006/main">
+            <a:off x="4667250" y="3209925"/>
+            <a:ext cx="95250" cy="95250"/>
+          </a:xfrm>
+          <a:prstGeom xmlns:a="http://schemas.openxmlformats.org/drawingml/2006/main" prst="ellipse">
+            <a:avLst/>
+          </a:prstGeom>
+          <a:solidFill xmlns:a="http://schemas.openxmlformats.org/drawingml/2006/main">
+            <a:srgbClr val="3D8DFF"/>
+          </a:solidFill>
+          <a:ln xmlns:a="http://schemas.openxmlformats.org/drawingml/2006/main" w="0">
+            <a:solidFill>
+              <a:srgbClr val="3D8DFF"/>
+            </a:solidFill>
+            <a:prstDash val="solid"/>
+          </a:ln>
+        </p:spPr>
+      </p:sp>
+      <p:sp>
+        <p:nvSpPr>
+          <p:cNvPr id="15" name="">
+            <a:extLst xmlns:a="http://schemas.openxmlformats.org/drawingml/2006/main">
+              <a:ext uri="{FF2B5EF4-FFF2-40B4-BE49-F238E27FC236}">
+                <a16:creationId xmlns:a16="http://schemas.microsoft.com/office/drawing/2014/main" id="{A4A22AE2-9A2C-45F7-9559-149FC6ED6407}"/>
+              </a:ext>
+            </a:extLst>
+          </p:cNvPr>
+          <p:cNvSpPr>
+            <a:spLocks xmlns:a="http://schemas.openxmlformats.org/drawingml/2006/main" noGrp="1"/>
+          </p:cNvSpPr>
+          <p:nvPr/>
+        </p:nvSpPr>
+        <p:spPr>
+          <a:xfrm xmlns:a="http://schemas.openxmlformats.org/drawingml/2006/main">
+            <a:off x="4914900" y="3143250"/>
+            <a:ext cx="2495550" cy="571500"/>
+          </a:xfrm>
+          <a:prstGeom xmlns:a="http://schemas.openxmlformats.org/drawingml/2006/main" prst="rect">
+            <a:avLst/>
+          </a:prstGeom>
+          <a:noFill xmlns:a="http://schemas.openxmlformats.org/drawingml/2006/main"/>
+          <a:ln xmlns:a="http://schemas.openxmlformats.org/drawingml/2006/main" w="0">
+            <a:noFill/>
+            <a:prstDash val="solid"/>
+          </a:ln>
+        </p:spPr>
+        <p:txBody>
+          <a:bodyPr xmlns:a="http://schemas.openxmlformats.org/drawingml/2006/main"/>
+          <a:lstStyle xmlns:a="http://schemas.openxmlformats.org/drawingml/2006/main"/>
+          <a:p xmlns:a="http://schemas.openxmlformats.org/drawingml/2006/main">
+            <a:pPr>
+              <a:defRPr sz="1575">
+                <a:solidFill>
+                  <a:srgbClr val="000000"/>
+                </a:solidFill>
+                <a:latin typeface="Helvetica Neue"/>
+                <a:ea typeface="Helvetica Neue"/>
+                <a:cs typeface="Helvetica Neue"/>
+              </a:defRPr>
+            </a:pPr>
+            <a:r>
+              <a:rPr sz="1575">
+                <a:solidFill>
+                  <a:srgbClr val="000000"/>
+                </a:solidFill>
+                <a:latin typeface="Helvetica Neue"/>
+                <a:ea typeface="Helvetica Neue"/>
+                <a:cs typeface="Helvetica Neue"/>
+              </a:rPr>
+              <a:t>Let CI run validation before promotion.</a:t>
+            </a:r>
+          </a:p>
+        </p:txBody>
+      </p:sp>
+      <p:sp>
+        <p:nvSpPr>
+          <p:cNvPr id="16" name="">
+            <a:extLst xmlns:a="http://schemas.openxmlformats.org/drawingml/2006/main">
+              <a:ext uri="{FF2B5EF4-FFF2-40B4-BE49-F238E27FC236}">
+                <a16:creationId xmlns:a16="http://schemas.microsoft.com/office/drawing/2014/main" id="{89B7E6EB-00CE-407D-9454-73BA96560354}"/>
+              </a:ext>
+            </a:extLst>
+          </p:cNvPr>
+          <p:cNvSpPr>
+            <a:spLocks xmlns:a="http://schemas.openxmlformats.org/drawingml/2006/main" noGrp="1"/>
+          </p:cNvSpPr>
+          <p:nvPr/>
+        </p:nvSpPr>
+        <p:spPr>
+          <a:xfrm xmlns:a="http://schemas.openxmlformats.org/drawingml/2006/main">
+            <a:off x="4667250" y="3876675"/>
+            <a:ext cx="95250" cy="95250"/>
+          </a:xfrm>
+          <a:prstGeom xmlns:a="http://schemas.openxmlformats.org/drawingml/2006/main" prst="ellipse">
+            <a:avLst/>
+          </a:prstGeom>
+          <a:solidFill xmlns:a="http://schemas.openxmlformats.org/drawingml/2006/main">
+            <a:srgbClr val="3D8DFF"/>
+          </a:solidFill>
+          <a:ln xmlns:a="http://schemas.openxmlformats.org/drawingml/2006/main" w="0">
+            <a:solidFill>
+              <a:srgbClr val="3D8DFF"/>
+            </a:solidFill>
+            <a:prstDash val="solid"/>
+          </a:ln>
+        </p:spPr>
+      </p:sp>
+      <p:sp>
+        <p:nvSpPr>
           <p:cNvPr id="17" name="">
             <a:extLst xmlns:a="http://schemas.openxmlformats.org/drawingml/2006/main">
               <a:ext uri="{FF2B5EF4-FFF2-40B4-BE49-F238E27FC236}">
-                <a16:creationId xmlns:a16="http://schemas.microsoft.com/office/drawing/2014/main" id="{B852AA63-BE74-466C-8C5A-1FBDDFCD6587}"/>
+                <a16:creationId xmlns:a16="http://schemas.microsoft.com/office/drawing/2014/main" id="{F0ECB988-7FB5-4326-9C0A-76D48D4758E6}"/>
               </a:ext>
             </a:extLst>
           </p:cNvPr>
@@ -8612,7 +9377,7 @@
           <p:cNvPr id="18" name="">
             <a:extLst xmlns:a="http://schemas.openxmlformats.org/drawingml/2006/main">
               <a:ext uri="{FF2B5EF4-FFF2-40B4-BE49-F238E27FC236}">
-                <a16:creationId xmlns:a16="http://schemas.microsoft.com/office/drawing/2014/main" id="{FA108EEA-F4E5-4E5B-9B8B-D6CE23D5B3B0}"/>
+                <a16:creationId xmlns:a16="http://schemas.microsoft.com/office/drawing/2014/main" id="{E1D1D937-A2FB-4E97-A7FE-0EE3BFA718E4}"/>
               </a:ext>
             </a:extLst>
           </p:cNvPr>
@@ -8645,7 +9410,7 @@
           <p:cNvPr id="19" name="">
             <a:extLst xmlns:a="http://schemas.openxmlformats.org/drawingml/2006/main">
               <a:ext uri="{FF2B5EF4-FFF2-40B4-BE49-F238E27FC236}">
-                <a16:creationId xmlns:a16="http://schemas.microsoft.com/office/drawing/2014/main" id="{B467D87A-F628-4E57-B66A-FE30D1A37820}"/>
+                <a16:creationId xmlns:a16="http://schemas.microsoft.com/office/drawing/2014/main" id="{C327A39C-4D77-4F47-9320-694FCEC85158}"/>
               </a:ext>
             </a:extLst>
           </p:cNvPr>
@@ -8701,7 +9466,7 @@
           <p:cNvPr id="20" name="">
             <a:extLst xmlns:a="http://schemas.openxmlformats.org/drawingml/2006/main">
               <a:ext uri="{FF2B5EF4-FFF2-40B4-BE49-F238E27FC236}">
-                <a16:creationId xmlns:a16="http://schemas.microsoft.com/office/drawing/2014/main" id="{AE859509-2CAB-42A6-A4DF-1465374CFFE5}"/>
+                <a16:creationId xmlns:a16="http://schemas.microsoft.com/office/drawing/2014/main" id="{891E3995-3504-4128-9C66-806553EC81E1}"/>
               </a:ext>
             </a:extLst>
           </p:cNvPr>
@@ -8734,7 +9499,7 @@
           <p:cNvPr id="21" name="">
             <a:extLst xmlns:a="http://schemas.openxmlformats.org/drawingml/2006/main">
               <a:ext uri="{FF2B5EF4-FFF2-40B4-BE49-F238E27FC236}">
-                <a16:creationId xmlns:a16="http://schemas.microsoft.com/office/drawing/2014/main" id="{2E4C1964-5CA1-4609-A729-29937B00B09F}"/>
+                <a16:creationId xmlns:a16="http://schemas.microsoft.com/office/drawing/2014/main" id="{AEF40C8A-F164-4A1E-B3A6-3003C470CB58}"/>
               </a:ext>
             </a:extLst>
           </p:cNvPr>
@@ -8790,7 +9555,7 @@
           <p:cNvPr id="22" name="">
             <a:extLst xmlns:a="http://schemas.openxmlformats.org/drawingml/2006/main">
               <a:ext uri="{FF2B5EF4-FFF2-40B4-BE49-F238E27FC236}">
-                <a16:creationId xmlns:a16="http://schemas.microsoft.com/office/drawing/2014/main" id="{7070E91B-8328-4FA3-98C1-78DDA2B88425}"/>
+                <a16:creationId xmlns:a16="http://schemas.microsoft.com/office/drawing/2014/main" id="{6DF5A79D-FB24-48A2-93BD-33F7A3962E52}"/>
               </a:ext>
             </a:extLst>
           </p:cNvPr>
@@ -8823,7 +9588,7 @@
           <p:cNvPr id="23" name="">
             <a:extLst xmlns:a="http://schemas.openxmlformats.org/drawingml/2006/main">
               <a:ext uri="{FF2B5EF4-FFF2-40B4-BE49-F238E27FC236}">
-                <a16:creationId xmlns:a16="http://schemas.microsoft.com/office/drawing/2014/main" id="{E802B530-0AEF-4B17-9332-6B4DD03F222C}"/>
+                <a16:creationId xmlns:a16="http://schemas.microsoft.com/office/drawing/2014/main" id="{125B3066-D039-4130-90E1-58305807FA27}"/>
               </a:ext>
             </a:extLst>
           </p:cNvPr>
@@ -8879,7 +9644,7 @@
           <p:cNvPr id="24" name="">
             <a:extLst xmlns:a="http://schemas.openxmlformats.org/drawingml/2006/main">
               <a:ext uri="{FF2B5EF4-FFF2-40B4-BE49-F238E27FC236}">
-                <a16:creationId xmlns:a16="http://schemas.microsoft.com/office/drawing/2014/main" id="{9343D0A6-D55E-4A62-9FFD-F88F19A7B2F9}"/>
+                <a16:creationId xmlns:a16="http://schemas.microsoft.com/office/drawing/2014/main" id="{53CBD0EE-6279-48B0-A29E-448038321395}"/>
               </a:ext>
             </a:extLst>
           </p:cNvPr>
@@ -8912,7 +9677,7 @@
           <p:cNvPr id="25" name="">
             <a:extLst xmlns:a="http://schemas.openxmlformats.org/drawingml/2006/main">
               <a:ext uri="{FF2B5EF4-FFF2-40B4-BE49-F238E27FC236}">
-                <a16:creationId xmlns:a16="http://schemas.microsoft.com/office/drawing/2014/main" id="{6EAECDF0-E2F2-4834-8ADB-4061FCE13F31}"/>
+                <a16:creationId xmlns:a16="http://schemas.microsoft.com/office/drawing/2014/main" id="{1EAACF3F-271D-4D21-8DC8-B598F741AB51}"/>
               </a:ext>
             </a:extLst>
           </p:cNvPr>
@@ -8968,7 +9733,7 @@
           <p:cNvPr id="26" name="">
             <a:extLst xmlns:a="http://schemas.openxmlformats.org/drawingml/2006/main">
               <a:ext uri="{FF2B5EF4-FFF2-40B4-BE49-F238E27FC236}">
-                <a16:creationId xmlns:a16="http://schemas.microsoft.com/office/drawing/2014/main" id="{B5614014-E31B-4031-AC1F-8D1F5706E627}"/>
+                <a16:creationId xmlns:a16="http://schemas.microsoft.com/office/drawing/2014/main" id="{A296C941-F540-42BF-B1B1-958118B1BA0E}"/>
               </a:ext>
             </a:extLst>
           </p:cNvPr>
@@ -9024,7 +9789,7 @@
           <p:cNvPr id="27" name="">
             <a:extLst xmlns:a="http://schemas.openxmlformats.org/drawingml/2006/main">
               <a:ext uri="{FF2B5EF4-FFF2-40B4-BE49-F238E27FC236}">
-                <a16:creationId xmlns:a16="http://schemas.microsoft.com/office/drawing/2014/main" id="{4C38DCCE-5C25-4002-8728-E9E110277ADD}"/>
+                <a16:creationId xmlns:a16="http://schemas.microsoft.com/office/drawing/2014/main" id="{94F498FC-3B79-45A4-B256-ED9742FEC4D6}"/>
               </a:ext>
             </a:extLst>
           </p:cNvPr>
@@ -9070,7 +9835,7 @@
                 <a:ea typeface="Helvetica Neue"/>
                 <a:cs typeface="Helvetica Neue"/>
               </a:rPr>
-              <a:t>6</a:t>
+              <a:t>7</a:t>
             </a:r>
           </a:p>
         </p:txBody>
@@ -9078,7 +9843,7 @@
     </p:spTree>
     <p:extLst>
       <p:ext uri="{BB962C8B-B14F-4D97-AF65-F5344CB8AC3E}">
-        <p14:creationId xmlns:p14="http://schemas.microsoft.com/office/powerpoint/2010/main" val="13192783"/>
+        <p14:creationId xmlns:p14="http://schemas.microsoft.com/office/powerpoint/2010/main" val="898681886"/>
       </p:ext>
     </p:extLst>
   </p:cSld>
